--- a/IoT_WallClock_설명.pptx
+++ b/IoT_WallClock_설명.pptx
@@ -3953,7 +3953,7 @@
                   <a:srgbClr val="666666"/>
                 </a:solidFill>
               </a:rPr>
-              <a:t>CDS raw &gt; 920 → 야간 모드: 시계만 표시 + 밝기 2</a:t>
+              <a:t>CDS raw &gt; 920 → 야간 모드: 시계만 표시 + 밝기 1</a:t>
             </a:r>
             <a:endParaRPr lang="en-US" sz="1050" dirty="0"/>
           </a:p>
@@ -7305,7 +7305,7 @@
                   <a:srgbClr val="222222"/>
                 </a:solidFill>
               </a:rPr>
-              <a:t>→  CDS raw &gt; 920 → 시계만 표시 + 밝기 2 (스크롤 생략)</a:t>
+              <a:t>→  CDS raw &gt; 920 → 시계만 표시 + 밝기 1 (스크롤 생략)</a:t>
             </a:r>
             <a:endParaRPr lang="en-US" sz="1100" dirty="0"/>
           </a:p>

--- a/IoT_WallClock_설명.pptx
+++ b/IoT_WallClock_설명.pptx
@@ -1704,7 +1704,7 @@
                   <a:srgbClr val="000000"/>
                 </a:solidFill>
               </a:rPr>
-              <a:t>날씨</a:t>
+              <a:t>기상청날씨</a:t>
             </a:r>
             <a:endParaRPr lang="en-US" sz="1200" dirty="0"/>
           </a:p>
@@ -1765,7 +1765,7 @@
                   <a:srgbClr val="000000"/>
                 </a:solidFill>
               </a:rPr>
-              <a:t>자동 밝기</a:t>
+              <a:t>자동밝기</a:t>
             </a:r>
             <a:endParaRPr lang="en-US" sz="1200" dirty="0"/>
           </a:p>
@@ -1826,7 +1826,7 @@
                   <a:srgbClr val="000000"/>
                 </a:solidFill>
               </a:rPr>
-              <a:t>WiFi IoT</a:t>
+              <a:t>다중AP</a:t>
             </a:r>
             <a:endParaRPr lang="en-US" sz="1200" dirty="0"/>
           </a:p>
@@ -1857,14 +1857,14 @@
               <a:buNone/>
             </a:pPr>
             <a:r>
-              <a:rPr lang="en-US" sz="1300" dirty="0">
+              <a:rPr lang="en-US" sz="1100" dirty="0">
                 <a:solidFill>
                   <a:srgbClr val="CCCCCC"/>
                 </a:solidFill>
               </a:rPr>
-              <a:t>Arduino .ino  ·  WiFiManager  ·  wttr.in  ·  NTP  ·  DHT11  ·  CDS  ·  date.nager.at</a:t>
-            </a:r>
-            <a:endParaRPr lang="en-US" sz="1300" dirty="0"/>
+              <a:t>Arduino .ino  ·  WiFiManager  ·  ESP8266WiFiMulti  ·  apihub.kma.go.kr  ·  NTP  ·  DHT11  ·  CDS  ·  date.nager.at</a:t>
+            </a:r>
+            <a:endParaRPr lang="en-US" sz="1100" dirty="0"/>
           </a:p>
         </p:txBody>
       </p:sp>
@@ -2615,7 +2615,7 @@
                   <a:srgbClr val="000000"/>
                 </a:solidFill>
               </a:rPr>
-              <a:t>wttr.in</a:t>
+              <a:t>apihub.kma.go.kr</a:t>
             </a:r>
             <a:endParaRPr lang="en-US" sz="1200" dirty="0"/>
           </a:p>
@@ -3057,7 +3057,7 @@
                   <a:srgbClr val="000000"/>
                 </a:solidFill>
               </a:rPr>
-              <a:t>WiFi 자동 설정 (Captive Portal)</a:t>
+              <a:t>WiFi 다중 AP 자동 전환</a:t>
             </a:r>
             <a:endParaRPr lang="en-US" sz="1300" dirty="0"/>
           </a:p>
@@ -3093,7 +3093,7 @@
                   <a:srgbClr val="666666"/>
                 </a:solidFill>
               </a:rPr>
-              <a:t>첫 부팅 시 'IoTClock-Setup' AP 생성</a:t>
+              <a:t>Portal에서 1·2번 SSID 등록</a:t>
             </a:r>
             <a:endParaRPr lang="en-US" sz="1050" dirty="0"/>
           </a:p>
@@ -3107,7 +3107,7 @@
                   <a:srgbClr val="666666"/>
                 </a:solidFill>
               </a:rPr>
-              <a:t>스마트폰으로 접속 → SSID·비밀번호 입력</a:t>
+              <a:t>ESP8266WiFiMulti → 신호 강한 AP 자동 접속</a:t>
             </a:r>
             <a:endParaRPr lang="en-US" sz="1050" dirty="0"/>
           </a:p>
@@ -3437,7 +3437,7 @@
                   <a:srgbClr val="666666"/>
                 </a:solidFill>
               </a:rPr>
-              <a:t>ip-api.com → 접속 IP로 도시명 추출</a:t>
+              <a:t>ip-api.com → 도시명 + 위도/경도 취득</a:t>
             </a:r>
             <a:endParaRPr lang="en-US" sz="1050" dirty="0"/>
           </a:p>
@@ -3451,7 +3451,7 @@
                   <a:srgbClr val="666666"/>
                 </a:solidFill>
               </a:rPr>
-              <a:t>별도 GPS·설정 불필요</a:t>
+              <a:t>격자 변환 없이 기상청 API 직접 활용</a:t>
             </a:r>
             <a:endParaRPr lang="en-US" sz="1050" dirty="0"/>
           </a:p>
@@ -3573,7 +3573,7 @@
                   <a:srgbClr val="000000"/>
                 </a:solidFill>
               </a:rPr>
-              <a:t>실시간 날씨 수신</a:t>
+              <a:t>기상청 동네 날씨 수신</a:t>
             </a:r>
             <a:endParaRPr lang="en-US" sz="1300" dirty="0"/>
           </a:p>
@@ -3609,7 +3609,7 @@
                   <a:srgbClr val="666666"/>
                 </a:solidFill>
               </a:rPr>
-              <a:t>wttr.in HTTPS, 1분마다 갱신</a:t>
+              <a:t>apihub.kma.go.kr 지상관측 API</a:t>
             </a:r>
             <a:endParaRPr lang="en-US" sz="1050" dirty="0"/>
           </a:p>
@@ -3623,7 +3623,7 @@
                   <a:srgbClr val="666666"/>
                 </a:solidFill>
               </a:rPr>
-              <a:t>Sunny·Cloud·Rain·Snow·Fog·Storm</a:t>
+              <a:t>기온(ta)·습도(hm)·현천코드(ww) 1분 갱신</a:t>
             </a:r>
             <a:endParaRPr lang="en-US" sz="1050" dirty="0"/>
           </a:p>
@@ -3781,7 +3781,7 @@
                   <a:srgbClr val="666666"/>
                 </a:solidFill>
               </a:rPr>
-              <a:t>온도: wttr.in 외부 기상값 사용</a:t>
+              <a:t>온도: 기상청 지상관측 (외부 기온)</a:t>
             </a:r>
             <a:endParaRPr lang="en-US" sz="1050" dirty="0"/>
           </a:p>
@@ -3953,7 +3953,7 @@
                   <a:srgbClr val="666666"/>
                 </a:solidFill>
               </a:rPr>
-              <a:t>CDS raw &gt; 920 → 야간 모드: 시계만 표시 + 밝기 1</a:t>
+              <a:t>raw &gt; 960 → 야간 모드 (시계만 + 밝기 1~4)</a:t>
             </a:r>
             <a:endParaRPr lang="en-US" sz="1050" dirty="0"/>
           </a:p>
@@ -3967,7 +3967,7 @@
                   <a:srgbClr val="666666"/>
                 </a:solidFill>
               </a:rPr>
-              <a:t>일반: raw 350~1023 → 밝기 150~5 자동 조절</a:t>
+              <a:t>일반: raw 350~960 → 밝기 150~5 비례 조절</a:t>
             </a:r>
             <a:endParaRPr lang="en-US" sz="1050" dirty="0"/>
           </a:p>
@@ -4203,7 +4203,7 @@
                 <a:ea typeface="Arial Black" pitchFamily="34" charset="-122"/>
                 <a:cs typeface="Arial Black" pitchFamily="34" charset="-120"/>
               </a:rPr>
-              <a:t>WiFi 설정 흐름 (Captive Portal)</a:t>
+              <a:t>WiFi 설정 흐름 (Captive Portal + 다중 AP)</a:t>
             </a:r>
             <a:endParaRPr lang="en-US" sz="3000" dirty="0"/>
           </a:p>
@@ -4242,8 +4242,8 @@
         </p:nvSpPr>
         <p:spPr>
           <a:xfrm>
-            <a:off x="320040" y="1554480"/>
-            <a:ext cx="1371600" cy="1554480"/>
+            <a:off x="320040" y="1188720"/>
+            <a:ext cx="1371600" cy="1371600"/>
           </a:xfrm>
           <a:prstGeom prst="ellipse">
             <a:avLst/>
@@ -4267,8 +4267,8 @@
         </p:nvSpPr>
         <p:spPr>
           <a:xfrm>
-            <a:off x="320040" y="1645920"/>
-            <a:ext cx="1371600" cy="411480"/>
+            <a:off x="320040" y="1261872"/>
+            <a:ext cx="1371600" cy="365760"/>
           </a:xfrm>
           <a:prstGeom prst="rect">
             <a:avLst/>
@@ -4303,8 +4303,8 @@
         </p:nvSpPr>
         <p:spPr>
           <a:xfrm>
-            <a:off x="320040" y="2011680"/>
-            <a:ext cx="1371600" cy="411480"/>
+            <a:off x="320040" y="1572768"/>
+            <a:ext cx="1371600" cy="365760"/>
           </a:xfrm>
           <a:prstGeom prst="rect">
             <a:avLst/>
@@ -4339,8 +4339,8 @@
         </p:nvSpPr>
         <p:spPr>
           <a:xfrm>
-            <a:off x="320040" y="2423160"/>
-            <a:ext cx="1371600" cy="594360"/>
+            <a:off x="320040" y="1938528"/>
+            <a:ext cx="1371600" cy="530352"/>
           </a:xfrm>
           <a:prstGeom prst="rect">
             <a:avLst/>
@@ -4389,14 +4389,14 @@
         </p:nvSpPr>
         <p:spPr>
           <a:xfrm>
-            <a:off x="1691640" y="2331720"/>
+            <a:off x="1691640" y="1874520"/>
             <a:ext cx="320040" cy="0"/>
           </a:xfrm>
           <a:prstGeom prst="line">
             <a:avLst/>
           </a:prstGeom>
           <a:noFill/>
-          <a:ln w="32385">
+          <a:ln w="26035">
             <a:solidFill>
               <a:srgbClr val="000000"/>
             </a:solidFill>
@@ -4413,8 +4413,8 @@
         </p:nvSpPr>
         <p:spPr>
           <a:xfrm>
-            <a:off x="2011680" y="1554480"/>
-            <a:ext cx="1371600" cy="1554480"/>
+            <a:off x="2011680" y="1188720"/>
+            <a:ext cx="1371600" cy="1371600"/>
           </a:xfrm>
           <a:prstGeom prst="ellipse">
             <a:avLst/>
@@ -4438,8 +4438,8 @@
         </p:nvSpPr>
         <p:spPr>
           <a:xfrm>
-            <a:off x="2011680" y="1645920"/>
-            <a:ext cx="1371600" cy="411480"/>
+            <a:off x="2011680" y="1261872"/>
+            <a:ext cx="1371600" cy="365760"/>
           </a:xfrm>
           <a:prstGeom prst="rect">
             <a:avLst/>
@@ -4474,8 +4474,8 @@
         </p:nvSpPr>
         <p:spPr>
           <a:xfrm>
-            <a:off x="2011680" y="2011680"/>
-            <a:ext cx="1371600" cy="411480"/>
+            <a:off x="2011680" y="1572768"/>
+            <a:ext cx="1371600" cy="365760"/>
           </a:xfrm>
           <a:prstGeom prst="rect">
             <a:avLst/>
@@ -4510,8 +4510,8 @@
         </p:nvSpPr>
         <p:spPr>
           <a:xfrm>
-            <a:off x="2011680" y="2423160"/>
-            <a:ext cx="1371600" cy="594360"/>
+            <a:off x="2011680" y="1938528"/>
+            <a:ext cx="1371600" cy="530352"/>
           </a:xfrm>
           <a:prstGeom prst="rect">
             <a:avLst/>
@@ -4560,14 +4560,14 @@
         </p:nvSpPr>
         <p:spPr>
           <a:xfrm>
-            <a:off x="3383280" y="2331720"/>
+            <a:off x="3383280" y="1874520"/>
             <a:ext cx="320040" cy="0"/>
           </a:xfrm>
           <a:prstGeom prst="line">
             <a:avLst/>
           </a:prstGeom>
           <a:noFill/>
-          <a:ln w="32385">
+          <a:ln w="26035">
             <a:solidFill>
               <a:srgbClr val="000000"/>
             </a:solidFill>
@@ -4584,8 +4584,8 @@
         </p:nvSpPr>
         <p:spPr>
           <a:xfrm>
-            <a:off x="3703320" y="1554480"/>
-            <a:ext cx="1371600" cy="1554480"/>
+            <a:off x="3703320" y="1188720"/>
+            <a:ext cx="1371600" cy="1371600"/>
           </a:xfrm>
           <a:prstGeom prst="ellipse">
             <a:avLst/>
@@ -4609,8 +4609,8 @@
         </p:nvSpPr>
         <p:spPr>
           <a:xfrm>
-            <a:off x="3703320" y="1645920"/>
-            <a:ext cx="1371600" cy="411480"/>
+            <a:off x="3703320" y="1261872"/>
+            <a:ext cx="1371600" cy="365760"/>
           </a:xfrm>
           <a:prstGeom prst="rect">
             <a:avLst/>
@@ -4645,8 +4645,8 @@
         </p:nvSpPr>
         <p:spPr>
           <a:xfrm>
-            <a:off x="3703320" y="2011680"/>
-            <a:ext cx="1371600" cy="411480"/>
+            <a:off x="3703320" y="1572768"/>
+            <a:ext cx="1371600" cy="365760"/>
           </a:xfrm>
           <a:prstGeom prst="rect">
             <a:avLst/>
@@ -4681,8 +4681,8 @@
         </p:nvSpPr>
         <p:spPr>
           <a:xfrm>
-            <a:off x="3703320" y="2423160"/>
-            <a:ext cx="1371600" cy="594360"/>
+            <a:off x="3703320" y="1938528"/>
+            <a:ext cx="1371600" cy="530352"/>
           </a:xfrm>
           <a:prstGeom prst="rect">
             <a:avLst/>
@@ -4731,14 +4731,14 @@
         </p:nvSpPr>
         <p:spPr>
           <a:xfrm>
-            <a:off x="5074920" y="2331720"/>
+            <a:off x="5074920" y="1874520"/>
             <a:ext cx="320040" cy="0"/>
           </a:xfrm>
           <a:prstGeom prst="line">
             <a:avLst/>
           </a:prstGeom>
           <a:noFill/>
-          <a:ln w="32385">
+          <a:ln w="26035">
             <a:solidFill>
               <a:srgbClr val="000000"/>
             </a:solidFill>
@@ -4755,8 +4755,8 @@
         </p:nvSpPr>
         <p:spPr>
           <a:xfrm>
-            <a:off x="5394960" y="1554480"/>
-            <a:ext cx="1371600" cy="1554480"/>
+            <a:off x="5394960" y="1188720"/>
+            <a:ext cx="1371600" cy="1371600"/>
           </a:xfrm>
           <a:prstGeom prst="ellipse">
             <a:avLst/>
@@ -4780,8 +4780,8 @@
         </p:nvSpPr>
         <p:spPr>
           <a:xfrm>
-            <a:off x="5394960" y="1645920"/>
-            <a:ext cx="1371600" cy="411480"/>
+            <a:off x="5394960" y="1261872"/>
+            <a:ext cx="1371600" cy="365760"/>
           </a:xfrm>
           <a:prstGeom prst="rect">
             <a:avLst/>
@@ -4816,8 +4816,8 @@
         </p:nvSpPr>
         <p:spPr>
           <a:xfrm>
-            <a:off x="5394960" y="2011680"/>
-            <a:ext cx="1371600" cy="411480"/>
+            <a:off x="5394960" y="1572768"/>
+            <a:ext cx="1371600" cy="365760"/>
           </a:xfrm>
           <a:prstGeom prst="rect">
             <a:avLst/>
@@ -4852,8 +4852,8 @@
         </p:nvSpPr>
         <p:spPr>
           <a:xfrm>
-            <a:off x="5394960" y="2423160"/>
-            <a:ext cx="1371600" cy="594360"/>
+            <a:off x="5394960" y="1938528"/>
+            <a:ext cx="1371600" cy="530352"/>
           </a:xfrm>
           <a:prstGeom prst="rect">
             <a:avLst/>
@@ -4874,7 +4874,7 @@
                   <a:srgbClr val="666666"/>
                 </a:solidFill>
               </a:rPr>
-              <a:t>가정 WiFi</a:t>
+              <a:t>1번+2번 WiFi</a:t>
             </a:r>
             <a:endParaRPr lang="en-US" sz="1000" dirty="0"/>
           </a:p>
@@ -4888,7 +4888,7 @@
                   <a:srgbClr val="666666"/>
                 </a:solidFill>
               </a:rPr>
-              <a:t>SSID + 비밀번호</a:t>
+              <a:t>SSID·비밀번호</a:t>
             </a:r>
             <a:endParaRPr lang="en-US" sz="1000" dirty="0"/>
           </a:p>
@@ -4902,14 +4902,14 @@
         </p:nvSpPr>
         <p:spPr>
           <a:xfrm>
-            <a:off x="6766560" y="2331720"/>
+            <a:off x="6766560" y="1874520"/>
             <a:ext cx="320040" cy="0"/>
           </a:xfrm>
           <a:prstGeom prst="line">
             <a:avLst/>
           </a:prstGeom>
           <a:noFill/>
-          <a:ln w="32385">
+          <a:ln w="26035">
             <a:solidFill>
               <a:srgbClr val="000000"/>
             </a:solidFill>
@@ -4926,8 +4926,8 @@
         </p:nvSpPr>
         <p:spPr>
           <a:xfrm>
-            <a:off x="7086600" y="1554480"/>
-            <a:ext cx="1371600" cy="1554480"/>
+            <a:off x="7086600" y="1188720"/>
+            <a:ext cx="1371600" cy="1371600"/>
           </a:xfrm>
           <a:prstGeom prst="ellipse">
             <a:avLst/>
@@ -4951,8 +4951,8 @@
         </p:nvSpPr>
         <p:spPr>
           <a:xfrm>
-            <a:off x="7086600" y="1645920"/>
-            <a:ext cx="1371600" cy="411480"/>
+            <a:off x="7086600" y="1261872"/>
+            <a:ext cx="1371600" cy="365760"/>
           </a:xfrm>
           <a:prstGeom prst="rect">
             <a:avLst/>
@@ -4987,8 +4987,8 @@
         </p:nvSpPr>
         <p:spPr>
           <a:xfrm>
-            <a:off x="7086600" y="2011680"/>
-            <a:ext cx="1371600" cy="411480"/>
+            <a:off x="7086600" y="1572768"/>
+            <a:ext cx="1371600" cy="365760"/>
           </a:xfrm>
           <a:prstGeom prst="rect">
             <a:avLst/>
@@ -5023,8 +5023,8 @@
         </p:nvSpPr>
         <p:spPr>
           <a:xfrm>
-            <a:off x="7086600" y="2423160"/>
-            <a:ext cx="1371600" cy="594360"/>
+            <a:off x="7086600" y="1938528"/>
+            <a:ext cx="1371600" cy="530352"/>
           </a:xfrm>
           <a:prstGeom prst="rect">
             <a:avLst/>
@@ -5045,7 +5045,7 @@
                   <a:srgbClr val="666666"/>
                 </a:solidFill>
               </a:rPr>
-              <a:t>재시작 후</a:t>
+              <a:t>WiFiMulti 등록</a:t>
             </a:r>
             <a:endParaRPr lang="en-US" sz="1000" dirty="0"/>
           </a:p>
@@ -5059,7 +5059,7 @@
                   <a:srgbClr val="666666"/>
                 </a:solidFill>
               </a:rPr>
-              <a:t>자동 접속</a:t>
+              <a:t>강한 AP 자동 선택</a:t>
             </a:r>
             <a:endParaRPr lang="en-US" sz="1000" dirty="0"/>
           </a:p>
@@ -5073,8 +5073,310 @@
         </p:nvSpPr>
         <p:spPr>
           <a:xfrm>
-            <a:off x="457200" y="3429000"/>
-            <a:ext cx="8229600" cy="685800"/>
+            <a:off x="365760" y="2834640"/>
+            <a:ext cx="8412480" cy="914400"/>
+          </a:xfrm>
+          <a:prstGeom prst="rect">
+            <a:avLst/>
+          </a:prstGeom>
+          <a:solidFill>
+            <a:srgbClr val="FFFFFF"/>
+          </a:solidFill>
+          <a:ln w="19050">
+            <a:solidFill>
+              <a:srgbClr val="000000"/>
+            </a:solidFill>
+            <a:prstDash val="solid"/>
+          </a:ln>
+        </p:spPr>
+      </p:sp>
+      <p:sp>
+        <p:nvSpPr>
+          <p:cNvPr id="29" name="Shape 27"/>
+          <p:cNvSpPr/>
+          <p:nvPr/>
+        </p:nvSpPr>
+        <p:spPr>
+          <a:xfrm>
+            <a:off x="365760" y="2834640"/>
+            <a:ext cx="8412480" cy="347472"/>
+          </a:xfrm>
+          <a:prstGeom prst="rect">
+            <a:avLst/>
+          </a:prstGeom>
+          <a:solidFill>
+            <a:srgbClr val="222222"/>
+          </a:solidFill>
+          <a:ln w="12700">
+            <a:solidFill>
+              <a:srgbClr val="000000"/>
+            </a:solidFill>
+            <a:prstDash val="solid"/>
+          </a:ln>
+        </p:spPr>
+      </p:sp>
+      <p:sp>
+        <p:nvSpPr>
+          <p:cNvPr id="30" name="Text 28"/>
+          <p:cNvSpPr/>
+          <p:nvPr/>
+        </p:nvSpPr>
+        <p:spPr>
+          <a:xfrm>
+            <a:off x="365760" y="2834640"/>
+            <a:ext cx="8412480" cy="347472"/>
+          </a:xfrm>
+          <a:prstGeom prst="rect">
+            <a:avLst/>
+          </a:prstGeom>
+          <a:noFill/>
+          <a:ln/>
+        </p:spPr>
+        <p:txBody>
+          <a:bodyPr wrap="square" rtlCol="0" anchor="ctr"/>
+          <a:lstStyle/>
+          <a:p>
+            <a:pPr algn="ctr" indent="0" marL="0">
+              <a:buNone/>
+            </a:pPr>
+            <a:r>
+              <a:rPr lang="en-US" sz="1300" b="1" dirty="0">
+                <a:solidFill>
+                  <a:srgbClr val="FFFFFF"/>
+                </a:solidFill>
+              </a:rPr>
+              <a:t>ESP8266WiFiMulti  자동 전환 동작</a:t>
+            </a:r>
+            <a:endParaRPr lang="en-US" sz="1300" dirty="0"/>
+          </a:p>
+        </p:txBody>
+      </p:sp>
+      <p:sp>
+        <p:nvSpPr>
+          <p:cNvPr id="31" name="Text 29"/>
+          <p:cNvSpPr/>
+          <p:nvPr/>
+        </p:nvSpPr>
+        <p:spPr>
+          <a:xfrm>
+            <a:off x="548640" y="3218688"/>
+            <a:ext cx="2743200" cy="182880"/>
+          </a:xfrm>
+          <a:prstGeom prst="rect">
+            <a:avLst/>
+          </a:prstGeom>
+          <a:noFill/>
+          <a:ln/>
+        </p:spPr>
+        <p:txBody>
+          <a:bodyPr wrap="square" rtlCol="0" anchor="ctr"/>
+          <a:lstStyle/>
+          <a:p>
+            <a:pPr indent="0" marL="0">
+              <a:buNone/>
+            </a:pPr>
+            <a:r>
+              <a:rPr lang="en-US" sz="1100" b="1" dirty="0">
+                <a:solidFill>
+                  <a:srgbClr val="000000"/>
+                </a:solidFill>
+              </a:rPr>
+              <a:t>▶ AP1 신호 강함</a:t>
+            </a:r>
+            <a:endParaRPr lang="en-US" sz="1100" dirty="0"/>
+          </a:p>
+        </p:txBody>
+      </p:sp>
+      <p:sp>
+        <p:nvSpPr>
+          <p:cNvPr id="32" name="Text 30"/>
+          <p:cNvSpPr/>
+          <p:nvPr/>
+        </p:nvSpPr>
+        <p:spPr>
+          <a:xfrm>
+            <a:off x="3291840" y="3218688"/>
+            <a:ext cx="5303520" cy="182880"/>
+          </a:xfrm>
+          <a:prstGeom prst="rect">
+            <a:avLst/>
+          </a:prstGeom>
+          <a:noFill/>
+          <a:ln/>
+        </p:spPr>
+        <p:txBody>
+          <a:bodyPr wrap="square" rtlCol="0" anchor="ctr"/>
+          <a:lstStyle/>
+          <a:p>
+            <a:pPr indent="0" marL="0">
+              <a:buNone/>
+            </a:pPr>
+            <a:r>
+              <a:rPr lang="en-US" sz="1100" dirty="0">
+                <a:solidFill>
+                  <a:srgbClr val="222222"/>
+                </a:solidFill>
+              </a:rPr>
+              <a:t>→  1번 AP 유지 접속</a:t>
+            </a:r>
+            <a:endParaRPr lang="en-US" sz="1100" dirty="0"/>
+          </a:p>
+        </p:txBody>
+      </p:sp>
+      <p:sp>
+        <p:nvSpPr>
+          <p:cNvPr id="33" name="Text 31"/>
+          <p:cNvSpPr/>
+          <p:nvPr/>
+        </p:nvSpPr>
+        <p:spPr>
+          <a:xfrm>
+            <a:off x="548640" y="3401568"/>
+            <a:ext cx="2743200" cy="182880"/>
+          </a:xfrm>
+          <a:prstGeom prst="rect">
+            <a:avLst/>
+          </a:prstGeom>
+          <a:noFill/>
+          <a:ln/>
+        </p:spPr>
+        <p:txBody>
+          <a:bodyPr wrap="square" rtlCol="0" anchor="ctr"/>
+          <a:lstStyle/>
+          <a:p>
+            <a:pPr indent="0" marL="0">
+              <a:buNone/>
+            </a:pPr>
+            <a:r>
+              <a:rPr lang="en-US" sz="1100" b="1" dirty="0">
+                <a:solidFill>
+                  <a:srgbClr val="000000"/>
+                </a:solidFill>
+              </a:rPr>
+              <a:t>▶ AP1 신호 약화 / 끊김</a:t>
+            </a:r>
+            <a:endParaRPr lang="en-US" sz="1100" dirty="0"/>
+          </a:p>
+        </p:txBody>
+      </p:sp>
+      <p:sp>
+        <p:nvSpPr>
+          <p:cNvPr id="34" name="Text 32"/>
+          <p:cNvSpPr/>
+          <p:nvPr/>
+        </p:nvSpPr>
+        <p:spPr>
+          <a:xfrm>
+            <a:off x="3291840" y="3401568"/>
+            <a:ext cx="5303520" cy="182880"/>
+          </a:xfrm>
+          <a:prstGeom prst="rect">
+            <a:avLst/>
+          </a:prstGeom>
+          <a:noFill/>
+          <a:ln/>
+        </p:spPr>
+        <p:txBody>
+          <a:bodyPr wrap="square" rtlCol="0" anchor="ctr"/>
+          <a:lstStyle/>
+          <a:p>
+            <a:pPr indent="0" marL="0">
+              <a:buNone/>
+            </a:pPr>
+            <a:r>
+              <a:rPr lang="en-US" sz="1100" dirty="0">
+                <a:solidFill>
+                  <a:srgbClr val="222222"/>
+                </a:solidFill>
+              </a:rPr>
+              <a:t>→  5초 이내 재스캔 → 신호 강한 AP 자동 전환</a:t>
+            </a:r>
+            <a:endParaRPr lang="en-US" sz="1100" dirty="0"/>
+          </a:p>
+        </p:txBody>
+      </p:sp>
+      <p:sp>
+        <p:nvSpPr>
+          <p:cNvPr id="35" name="Text 33"/>
+          <p:cNvSpPr/>
+          <p:nvPr/>
+        </p:nvSpPr>
+        <p:spPr>
+          <a:xfrm>
+            <a:off x="548640" y="3584448"/>
+            <a:ext cx="2743200" cy="182880"/>
+          </a:xfrm>
+          <a:prstGeom prst="rect">
+            <a:avLst/>
+          </a:prstGeom>
+          <a:noFill/>
+          <a:ln/>
+        </p:spPr>
+        <p:txBody>
+          <a:bodyPr wrap="square" rtlCol="0" anchor="ctr"/>
+          <a:lstStyle/>
+          <a:p>
+            <a:pPr indent="0" marL="0">
+              <a:buNone/>
+            </a:pPr>
+            <a:r>
+              <a:rPr lang="en-US" sz="1100" b="1" dirty="0">
+                <a:solidFill>
+                  <a:srgbClr val="000000"/>
+                </a:solidFill>
+              </a:rPr>
+              <a:t>▶ 2번 AP 미입력</a:t>
+            </a:r>
+            <a:endParaRPr lang="en-US" sz="1100" dirty="0"/>
+          </a:p>
+        </p:txBody>
+      </p:sp>
+      <p:sp>
+        <p:nvSpPr>
+          <p:cNvPr id="36" name="Text 34"/>
+          <p:cNvSpPr/>
+          <p:nvPr/>
+        </p:nvSpPr>
+        <p:spPr>
+          <a:xfrm>
+            <a:off x="3291840" y="3584448"/>
+            <a:ext cx="5303520" cy="182880"/>
+          </a:xfrm>
+          <a:prstGeom prst="rect">
+            <a:avLst/>
+          </a:prstGeom>
+          <a:noFill/>
+          <a:ln/>
+        </p:spPr>
+        <p:txBody>
+          <a:bodyPr wrap="square" rtlCol="0" anchor="ctr"/>
+          <a:lstStyle/>
+          <a:p>
+            <a:pPr indent="0" marL="0">
+              <a:buNone/>
+            </a:pPr>
+            <a:r>
+              <a:rPr lang="en-US" sz="1100" dirty="0">
+                <a:solidFill>
+                  <a:srgbClr val="222222"/>
+                </a:solidFill>
+              </a:rPr>
+              <a:t>→  1번 AP만으로 정상 동작  (하위 호환)</a:t>
+            </a:r>
+            <a:endParaRPr lang="en-US" sz="1100" dirty="0"/>
+          </a:p>
+        </p:txBody>
+      </p:sp>
+      <p:sp>
+        <p:nvSpPr>
+          <p:cNvPr id="37" name="Shape 35"/>
+          <p:cNvSpPr/>
+          <p:nvPr/>
+        </p:nvSpPr>
+        <p:spPr>
+          <a:xfrm>
+            <a:off x="365760" y="3886200"/>
+            <a:ext cx="8412480" cy="502920"/>
           </a:xfrm>
           <a:prstGeom prst="rect">
             <a:avLst/>
@@ -5092,14 +5394,14 @@
       </p:sp>
       <p:sp>
         <p:nvSpPr>
-          <p:cNvPr id="29" name="Text 27"/>
-          <p:cNvSpPr/>
-          <p:nvPr/>
-        </p:nvSpPr>
-        <p:spPr>
-          <a:xfrm>
-            <a:off x="640080" y="3493008"/>
-            <a:ext cx="7863840" cy="548640"/>
+          <p:cNvPr id="38" name="Text 36"/>
+          <p:cNvSpPr/>
+          <p:nvPr/>
+        </p:nvSpPr>
+        <p:spPr>
+          <a:xfrm>
+            <a:off x="548640" y="3950208"/>
+            <a:ext cx="8046720" cy="365760"/>
           </a:xfrm>
           <a:prstGeom prst="rect">
             <a:avLst/>
@@ -5115,49 +5417,27 @@
               <a:buNone/>
             </a:pPr>
             <a:r>
-              <a:rPr lang="en-US" sz="1200" dirty="0">
+              <a:rPr lang="en-US" sz="1150" dirty="0">
                 <a:solidFill>
                   <a:srgbClr val="666666"/>
                 </a:solidFill>
               </a:rPr>
-              <a:t>3분 안에 설정 없으면 자동 재시작  |  </a:t>
-            </a:r>
-            <a:pPr indent="0" marL="0">
-              <a:buNone/>
-            </a:pPr>
-            <a:r>
-              <a:rPr lang="en-US" sz="1200" dirty="0">
-                <a:solidFill>
-                  <a:srgbClr val="666666"/>
-                </a:solidFill>
-              </a:rPr>
-              <a:t>이미 저장된 SSID 있으면 자동 연결  |  </a:t>
-            </a:r>
-            <a:pPr indent="0" marL="0">
-              <a:buNone/>
-            </a:pPr>
-            <a:r>
-              <a:rPr lang="en-US" sz="1200" dirty="0">
-                <a:solidFill>
-                  <a:srgbClr val="666666"/>
-                </a:solidFill>
-              </a:rPr>
-              <a:t>연결 실패 시 'WiFi ?' 적색 1Hz 깜빡임</a:t>
-            </a:r>
-            <a:endParaRPr lang="en-US" sz="1200" dirty="0"/>
-          </a:p>
-        </p:txBody>
-      </p:sp>
-      <p:sp>
-        <p:nvSpPr>
-          <p:cNvPr id="30" name="Shape 28"/>
-          <p:cNvSpPr/>
-          <p:nvPr/>
-        </p:nvSpPr>
-        <p:spPr>
-          <a:xfrm>
-            <a:off x="2286000" y="4251960"/>
-            <a:ext cx="4572000" cy="685800"/>
+              <a:t>2번째 AP 정보는 EEPROM에 저장  |  전원 재시작 후에도 유지  |  Portal 재접속으로 변경 가능</a:t>
+            </a:r>
+            <a:endParaRPr lang="en-US" sz="1150" dirty="0"/>
+          </a:p>
+        </p:txBody>
+      </p:sp>
+      <p:sp>
+        <p:nvSpPr>
+          <p:cNvPr id="39" name="Shape 37"/>
+          <p:cNvSpPr/>
+          <p:nvPr/>
+        </p:nvSpPr>
+        <p:spPr>
+          <a:xfrm>
+            <a:off x="365760" y="4480560"/>
+            <a:ext cx="8412480" cy="457200"/>
           </a:xfrm>
           <a:prstGeom prst="rect">
             <a:avLst/>
@@ -5165,7 +5445,7 @@
           <a:solidFill>
             <a:srgbClr val="FFFFFF"/>
           </a:solidFill>
-          <a:ln w="25400">
+          <a:ln w="19050">
             <a:solidFill>
               <a:srgbClr val="000000"/>
             </a:solidFill>
@@ -5175,14 +5455,14 @@
       </p:sp>
       <p:sp>
         <p:nvSpPr>
-          <p:cNvPr id="31" name="Text 29"/>
-          <p:cNvSpPr/>
-          <p:nvPr/>
-        </p:nvSpPr>
-        <p:spPr>
-          <a:xfrm>
-            <a:off x="2286000" y="4251960"/>
-            <a:ext cx="4572000" cy="685800"/>
+          <p:cNvPr id="40" name="Text 38"/>
+          <p:cNvSpPr/>
+          <p:nvPr/>
+        </p:nvSpPr>
+        <p:spPr>
+          <a:xfrm>
+            <a:off x="365760" y="4480560"/>
+            <a:ext cx="8412480" cy="457200"/>
           </a:xfrm>
           <a:prstGeom prst="rect">
             <a:avLst/>
@@ -5203,7 +5483,7 @@
                   <a:srgbClr val="000000"/>
                 </a:solidFill>
               </a:rPr>
-              <a:t>LED 표시 →  WiFi ?  (적색 1Hz 깜빡임)</a:t>
+              <a:t>LED 표시 →  WiFi ?  (적색 1Hz 깜빡임)   ←  WiFi 미접속 시</a:t>
             </a:r>
             <a:endParaRPr lang="en-US" sz="1300" dirty="0"/>
           </a:p>
@@ -6016,7 +6296,7 @@
                   <a:srgbClr val="666666"/>
                 </a:solidFill>
               </a:rPr>
-              <a:t>22C  49%  (외부온도+실내습도)</a:t>
+              <a:t>22C  49%  (외부기온+실내습도)</a:t>
             </a:r>
             <a:endParaRPr lang="en-US" sz="1100" dirty="0"/>
           </a:p>
@@ -6124,7 +6404,7 @@
                   <a:srgbClr val="666666"/>
                 </a:solidFill>
               </a:rPr>
-              <a:t>Cloud  Warm</a:t>
+              <a:t>Cloud  Sunny  Rain</a:t>
             </a:r>
             <a:endParaRPr lang="en-US" sz="1100" dirty="0"/>
           </a:p>
@@ -6484,14 +6764,14 @@
               <a:buNone/>
             </a:pPr>
             <a:r>
-              <a:rPr lang="en-US" sz="950" b="1" dirty="0">
+              <a:rPr lang="en-US" sz="900" b="1" dirty="0">
                 <a:solidFill>
                   <a:srgbClr val="000000"/>
                 </a:solidFill>
               </a:rPr>
               <a:t>drawFrame()</a:t>
             </a:r>
-            <a:endParaRPr lang="en-US" sz="950" dirty="0"/>
+            <a:endParaRPr lang="en-US" sz="900" dirty="0"/>
           </a:p>
         </p:txBody>
       </p:sp>
@@ -6618,14 +6898,14 @@
               <a:buNone/>
             </a:pPr>
             <a:r>
-              <a:rPr lang="en-US" sz="950" b="1" dirty="0">
+              <a:rPr lang="en-US" sz="900" b="1" dirty="0">
                 <a:solidFill>
                   <a:srgbClr val="000000"/>
                 </a:solidFill>
               </a:rPr>
               <a:t>readDHT()</a:t>
             </a:r>
-            <a:endParaRPr lang="en-US" sz="950" dirty="0"/>
+            <a:endParaRPr lang="en-US" sz="900" dirty="0"/>
           </a:p>
         </p:txBody>
       </p:sp>
@@ -6673,7 +6953,7 @@
                   <a:srgbClr val="666666"/>
                 </a:solidFill>
               </a:rPr>
-              <a:t>온습도</a:t>
+              <a:t>실내 습도</a:t>
             </a:r>
             <a:endParaRPr lang="en-US" sz="1000" dirty="0"/>
           </a:p>
@@ -6752,14 +7032,14 @@
               <a:buNone/>
             </a:pPr>
             <a:r>
-              <a:rPr lang="en-US" sz="950" b="1" dirty="0">
+              <a:rPr lang="en-US" sz="900" b="1" dirty="0">
                 <a:solidFill>
                   <a:srgbClr val="000000"/>
                 </a:solidFill>
               </a:rPr>
               <a:t>updateBrightness()</a:t>
             </a:r>
-            <a:endParaRPr lang="en-US" sz="950" dirty="0"/>
+            <a:endParaRPr lang="en-US" sz="900" dirty="0"/>
           </a:p>
         </p:txBody>
       </p:sp>
@@ -6807,7 +7087,7 @@
                   <a:srgbClr val="666666"/>
                 </a:solidFill>
               </a:rPr>
-              <a:t>CDS 밝기</a:t>
+              <a:t>CDS 비례밝기</a:t>
             </a:r>
             <a:endParaRPr lang="en-US" sz="1000" dirty="0"/>
           </a:p>
@@ -6821,7 +7101,7 @@
         </p:nvSpPr>
         <p:spPr>
           <a:xfrm>
-            <a:off x="6492240" y="1691640"/>
+            <a:off x="6309360" y="1691640"/>
             <a:ext cx="0" cy="365760"/>
           </a:xfrm>
           <a:prstGeom prst="line">
@@ -6844,7 +7124,7 @@
         </p:nvSpPr>
         <p:spPr>
           <a:xfrm>
-            <a:off x="5669280" y="2057400"/>
+            <a:off x="5486400" y="2057400"/>
             <a:ext cx="1645920" cy="1005840"/>
           </a:xfrm>
           <a:prstGeom prst="rect">
@@ -6869,7 +7149,7 @@
         </p:nvSpPr>
         <p:spPr>
           <a:xfrm>
-            <a:off x="5715000" y="2084832"/>
+            <a:off x="5532120" y="2084832"/>
             <a:ext cx="1554480" cy="411480"/>
           </a:xfrm>
           <a:prstGeom prst="rect">
@@ -6886,14 +7166,14 @@
               <a:buNone/>
             </a:pPr>
             <a:r>
-              <a:rPr lang="en-US" sz="950" b="1" dirty="0">
+              <a:rPr lang="en-US" sz="900" b="1" dirty="0">
                 <a:solidFill>
                   <a:srgbClr val="000000"/>
                 </a:solidFill>
               </a:rPr>
-              <a:t>fetchWeather()</a:t>
-            </a:r>
-            <a:endParaRPr lang="en-US" sz="950" dirty="0"/>
+              <a:t>fetchWeatherKMA()</a:t>
+            </a:r>
+            <a:endParaRPr lang="en-US" sz="900" dirty="0"/>
           </a:p>
         </p:txBody>
       </p:sp>
@@ -6905,7 +7185,7 @@
         </p:nvSpPr>
         <p:spPr>
           <a:xfrm>
-            <a:off x="5715000" y="2496312"/>
+            <a:off x="5532120" y="2496312"/>
             <a:ext cx="1554480" cy="548640"/>
           </a:xfrm>
           <a:prstGeom prst="rect">
@@ -6941,7 +7221,7 @@
                   <a:srgbClr val="666666"/>
                 </a:solidFill>
               </a:rPr>
-              <a:t>날씨 수신</a:t>
+              <a:t>기상청 날씨</a:t>
             </a:r>
             <a:endParaRPr lang="en-US" sz="1000" dirty="0"/>
           </a:p>
@@ -6955,7 +7235,7 @@
         </p:nvSpPr>
         <p:spPr>
           <a:xfrm>
-            <a:off x="8321040" y="1691640"/>
+            <a:off x="8229600" y="1691640"/>
             <a:ext cx="0" cy="365760"/>
           </a:xfrm>
           <a:prstGeom prst="line">
@@ -6978,7 +7258,7 @@
         </p:nvSpPr>
         <p:spPr>
           <a:xfrm>
-            <a:off x="7498080" y="2057400"/>
+            <a:off x="7406640" y="2057400"/>
             <a:ext cx="1645920" cy="1005840"/>
           </a:xfrm>
           <a:prstGeom prst="rect">
@@ -7003,7 +7283,7 @@
         </p:nvSpPr>
         <p:spPr>
           <a:xfrm>
-            <a:off x="7543800" y="2084832"/>
+            <a:off x="7452360" y="2084832"/>
             <a:ext cx="1554480" cy="411480"/>
           </a:xfrm>
           <a:prstGeom prst="rect">
@@ -7020,14 +7300,14 @@
               <a:buNone/>
             </a:pPr>
             <a:r>
-              <a:rPr lang="en-US" sz="950" b="1" dirty="0">
+              <a:rPr lang="en-US" sz="900" b="1" dirty="0">
                 <a:solidFill>
                   <a:srgbClr val="000000"/>
                 </a:solidFill>
               </a:rPr>
               <a:t>WiFi 체크</a:t>
             </a:r>
-            <a:endParaRPr lang="en-US" sz="950" dirty="0"/>
+            <a:endParaRPr lang="en-US" sz="900" dirty="0"/>
           </a:p>
         </p:txBody>
       </p:sp>
@@ -7039,7 +7319,7 @@
         </p:nvSpPr>
         <p:spPr>
           <a:xfrm>
-            <a:off x="7543800" y="2496312"/>
+            <a:off x="7452360" y="2496312"/>
             <a:ext cx="1554480" cy="548640"/>
           </a:xfrm>
           <a:prstGeom prst="rect">
@@ -7075,7 +7355,21 @@
                   <a:srgbClr val="666666"/>
                 </a:solidFill>
               </a:rPr>
-              <a:t>연결 감시</a:t>
+              <a:t>WiFiMulti</a:t>
+            </a:r>
+            <a:endParaRPr lang="en-US" sz="1000" dirty="0"/>
+          </a:p>
+          <a:p>
+            <a:pPr algn="ctr" indent="0" marL="0">
+              <a:buNone/>
+            </a:pPr>
+            <a:r>
+              <a:rPr lang="en-US" sz="1000" dirty="0">
+                <a:solidFill>
+                  <a:srgbClr val="666666"/>
+                </a:solidFill>
+              </a:rPr>
+              <a:t>재접속</a:t>
             </a:r>
             <a:endParaRPr lang="en-US" sz="1000" dirty="0"/>
           </a:p>
@@ -7305,7 +7599,7 @@
                   <a:srgbClr val="222222"/>
                 </a:solidFill>
               </a:rPr>
-              <a:t>→  CDS raw &gt; 920 → 시계만 표시 + 밝기 1 (스크롤 생략)</a:t>
+              <a:t>→  CDS raw &gt; 960 → 시계만 + 밝기 1~4 비례 (스크롤 생략)</a:t>
             </a:r>
             <a:endParaRPr lang="en-US" sz="1100" dirty="0"/>
           </a:p>
@@ -7449,7 +7743,7 @@
                   <a:srgbClr val="222222"/>
                 </a:solidFill>
               </a:rPr>
-              <a:t>→  날짜→온도+습도→날씨+아이콘 통합 스크롤</a:t>
+              <a:t>→  날짜→기온+습도→날씨+아이콘 통합 스크롤</a:t>
             </a:r>
             <a:endParaRPr lang="en-US" sz="1100" dirty="0"/>
           </a:p>
@@ -7585,7 +7879,7 @@
                 <a:ea typeface="Arial Black" pitchFamily="34" charset="-122"/>
                 <a:cs typeface="Arial Black" pitchFamily="34" charset="-120"/>
               </a:rPr>
-              <a:t>날씨 정보 수신 경로</a:t>
+              <a:t>날씨 정보 수신 경로  (기상청 API Hub)</a:t>
             </a:r>
             <a:endParaRPr lang="en-US" sz="3000" dirty="0"/>
           </a:p>
@@ -7650,30 +7944,30 @@
         <p:spPr>
           <a:xfrm>
             <a:off x="274320" y="1554480"/>
-            <a:ext cx="1645920" cy="457200"/>
-          </a:xfrm>
-          <a:prstGeom prst="rect">
-            <a:avLst/>
-          </a:prstGeom>
-          <a:noFill/>
-          <a:ln/>
-        </p:spPr>
-        <p:txBody>
-          <a:bodyPr wrap="square" rtlCol="0" anchor="ctr"/>
-          <a:lstStyle/>
-          <a:p>
-            <a:pPr algn="ctr" indent="0" marL="0">
-              <a:buNone/>
-            </a:pPr>
-            <a:r>
-              <a:rPr lang="en-US" sz="1300" b="1" dirty="0">
+            <a:ext cx="1645920" cy="502920"/>
+          </a:xfrm>
+          <a:prstGeom prst="rect">
+            <a:avLst/>
+          </a:prstGeom>
+          <a:noFill/>
+          <a:ln/>
+        </p:spPr>
+        <p:txBody>
+          <a:bodyPr wrap="square" rtlCol="0" anchor="ctr"/>
+          <a:lstStyle/>
+          <a:p>
+            <a:pPr algn="ctr" indent="0" marL="0">
+              <a:buNone/>
+            </a:pPr>
+            <a:r>
+              <a:rPr lang="en-US" sz="1200" b="1" dirty="0">
                 <a:solidFill>
                   <a:srgbClr val="000000"/>
                 </a:solidFill>
               </a:rPr>
               <a:t>ESP8266</a:t>
             </a:r>
-            <a:endParaRPr lang="en-US" sz="1300" dirty="0"/>
+            <a:endParaRPr lang="en-US" sz="1200" dirty="0"/>
           </a:p>
         </p:txBody>
       </p:sp>
@@ -7685,8 +7979,8 @@
         </p:nvSpPr>
         <p:spPr>
           <a:xfrm>
-            <a:off x="274320" y="2011680"/>
-            <a:ext cx="1645920" cy="777240"/>
+            <a:off x="274320" y="2057400"/>
+            <a:ext cx="1645920" cy="731520"/>
           </a:xfrm>
           <a:prstGeom prst="rect">
             <a:avLst/>
@@ -7785,30 +8079,30 @@
         <p:spPr>
           <a:xfrm>
             <a:off x="2148840" y="1554480"/>
-            <a:ext cx="1645920" cy="457200"/>
-          </a:xfrm>
-          <a:prstGeom prst="rect">
-            <a:avLst/>
-          </a:prstGeom>
-          <a:noFill/>
-          <a:ln/>
-        </p:spPr>
-        <p:txBody>
-          <a:bodyPr wrap="square" rtlCol="0" anchor="ctr"/>
-          <a:lstStyle/>
-          <a:p>
-            <a:pPr algn="ctr" indent="0" marL="0">
-              <a:buNone/>
-            </a:pPr>
-            <a:r>
-              <a:rPr lang="en-US" sz="1300" b="1" dirty="0">
+            <a:ext cx="1645920" cy="502920"/>
+          </a:xfrm>
+          <a:prstGeom prst="rect">
+            <a:avLst/>
+          </a:prstGeom>
+          <a:noFill/>
+          <a:ln/>
+        </p:spPr>
+        <p:txBody>
+          <a:bodyPr wrap="square" rtlCol="0" anchor="ctr"/>
+          <a:lstStyle/>
+          <a:p>
+            <a:pPr algn="ctr" indent="0" marL="0">
+              <a:buNone/>
+            </a:pPr>
+            <a:r>
+              <a:rPr lang="en-US" sz="1200" b="1" dirty="0">
                 <a:solidFill>
                   <a:srgbClr val="000000"/>
                 </a:solidFill>
               </a:rPr>
               <a:t>ip-api.com</a:t>
             </a:r>
-            <a:endParaRPr lang="en-US" sz="1300" dirty="0"/>
+            <a:endParaRPr lang="en-US" sz="1200" dirty="0"/>
           </a:p>
         </p:txBody>
       </p:sp>
@@ -7820,8 +8114,8 @@
         </p:nvSpPr>
         <p:spPr>
           <a:xfrm>
-            <a:off x="2148840" y="2011680"/>
-            <a:ext cx="1645920" cy="777240"/>
+            <a:off x="2148840" y="2057400"/>
+            <a:ext cx="1645920" cy="731520"/>
           </a:xfrm>
           <a:prstGeom prst="rect">
             <a:avLst/>
@@ -7856,7 +8150,7 @@
                   <a:srgbClr val="666666"/>
                 </a:solidFill>
               </a:rPr>
-              <a:t>(Seoul)</a:t>
+              <a:t>위도 / 경도</a:t>
             </a:r>
             <a:endParaRPr lang="en-US" sz="1100" dirty="0"/>
           </a:p>
@@ -7920,30 +8214,44 @@
         <p:spPr>
           <a:xfrm>
             <a:off x="4023360" y="1554480"/>
-            <a:ext cx="1645920" cy="457200"/>
-          </a:xfrm>
-          <a:prstGeom prst="rect">
-            <a:avLst/>
-          </a:prstGeom>
-          <a:noFill/>
-          <a:ln/>
-        </p:spPr>
-        <p:txBody>
-          <a:bodyPr wrap="square" rtlCol="0" anchor="ctr"/>
-          <a:lstStyle/>
-          <a:p>
-            <a:pPr algn="ctr" indent="0" marL="0">
-              <a:buNone/>
-            </a:pPr>
-            <a:r>
-              <a:rPr lang="en-US" sz="1300" b="1" dirty="0">
+            <a:ext cx="1645920" cy="502920"/>
+          </a:xfrm>
+          <a:prstGeom prst="rect">
+            <a:avLst/>
+          </a:prstGeom>
+          <a:noFill/>
+          <a:ln/>
+        </p:spPr>
+        <p:txBody>
+          <a:bodyPr wrap="square" rtlCol="0" anchor="ctr"/>
+          <a:lstStyle/>
+          <a:p>
+            <a:pPr algn="ctr" indent="0" marL="0">
+              <a:buNone/>
+            </a:pPr>
+            <a:r>
+              <a:rPr lang="en-US" sz="1200" b="1" dirty="0">
                 <a:solidFill>
                   <a:srgbClr val="000000"/>
                 </a:solidFill>
               </a:rPr>
-              <a:t>wttr.in</a:t>
-            </a:r>
-            <a:endParaRPr lang="en-US" sz="1300" dirty="0"/>
+              <a:t>apihub.kma</a:t>
+            </a:r>
+            <a:endParaRPr lang="en-US" sz="1200" dirty="0"/>
+          </a:p>
+          <a:p>
+            <a:pPr algn="ctr" indent="0" marL="0">
+              <a:buNone/>
+            </a:pPr>
+            <a:r>
+              <a:rPr lang="en-US" sz="1200" b="1" dirty="0">
+                <a:solidFill>
+                  <a:srgbClr val="000000"/>
+                </a:solidFill>
+              </a:rPr>
+              <a:t>.go.kr</a:t>
+            </a:r>
+            <a:endParaRPr lang="en-US" sz="1200" dirty="0"/>
           </a:p>
         </p:txBody>
       </p:sp>
@@ -7955,8 +8263,8 @@
         </p:nvSpPr>
         <p:spPr>
           <a:xfrm>
-            <a:off x="4023360" y="2011680"/>
-            <a:ext cx="1645920" cy="777240"/>
+            <a:off x="4023360" y="2057400"/>
+            <a:ext cx="1645920" cy="731520"/>
           </a:xfrm>
           <a:prstGeom prst="rect">
             <a:avLst/>
@@ -7977,7 +8285,7 @@
                   <a:srgbClr val="666666"/>
                 </a:solidFill>
               </a:rPr>
-              <a:t>도시 날씨 조회</a:t>
+              <a:t>ta / hm / ww</a:t>
             </a:r>
             <a:endParaRPr lang="en-US" sz="1100" dirty="0"/>
           </a:p>
@@ -7991,7 +8299,7 @@
                   <a:srgbClr val="666666"/>
                 </a:solidFill>
               </a:rPr>
-              <a:t>(HTTPS)</a:t>
+              <a:t>(순차 3회)</a:t>
             </a:r>
             <a:endParaRPr lang="en-US" sz="1100" dirty="0"/>
           </a:p>
@@ -8055,30 +8363,30 @@
         <p:spPr>
           <a:xfrm>
             <a:off x="5897880" y="1554480"/>
-            <a:ext cx="1645920" cy="457200"/>
-          </a:xfrm>
-          <a:prstGeom prst="rect">
-            <a:avLst/>
-          </a:prstGeom>
-          <a:noFill/>
-          <a:ln/>
-        </p:spPr>
-        <p:txBody>
-          <a:bodyPr wrap="square" rtlCol="0" anchor="ctr"/>
-          <a:lstStyle/>
-          <a:p>
-            <a:pPr algn="ctr" indent="0" marL="0">
-              <a:buNone/>
-            </a:pPr>
-            <a:r>
-              <a:rPr lang="en-US" sz="1300" b="1" dirty="0">
+            <a:ext cx="1645920" cy="502920"/>
+          </a:xfrm>
+          <a:prstGeom prst="rect">
+            <a:avLst/>
+          </a:prstGeom>
+          <a:noFill/>
+          <a:ln/>
+        </p:spPr>
+        <p:txBody>
+          <a:bodyPr wrap="square" rtlCol="0" anchor="ctr"/>
+          <a:lstStyle/>
+          <a:p>
+            <a:pPr algn="ctr" indent="0" marL="0">
+              <a:buNone/>
+            </a:pPr>
+            <a:r>
+              <a:rPr lang="en-US" sz="1200" b="1" dirty="0">
                 <a:solidFill>
                   <a:srgbClr val="000000"/>
                 </a:solidFill>
               </a:rPr>
-              <a:t>텍스트 파싱</a:t>
-            </a:r>
-            <a:endParaRPr lang="en-US" sz="1300" dirty="0"/>
+              <a:t>ww 코드 변환</a:t>
+            </a:r>
+            <a:endParaRPr lang="en-US" sz="1200" dirty="0"/>
           </a:p>
         </p:txBody>
       </p:sp>
@@ -8090,8 +8398,8 @@
         </p:nvSpPr>
         <p:spPr>
           <a:xfrm>
-            <a:off x="5897880" y="2011680"/>
-            <a:ext cx="1645920" cy="777240"/>
+            <a:off x="5897880" y="2057400"/>
+            <a:ext cx="1645920" cy="731520"/>
           </a:xfrm>
           <a:prstGeom prst="rect">
             <a:avLst/>
@@ -8112,7 +8420,7 @@
                   <a:srgbClr val="666666"/>
                 </a:solidFill>
               </a:rPr>
-              <a:t>Sunny/Cloud</a:t>
+              <a:t>WMO 코드</a:t>
             </a:r>
             <a:endParaRPr lang="en-US" sz="1100" dirty="0"/>
           </a:p>
@@ -8126,7 +8434,7 @@
                   <a:srgbClr val="666666"/>
                 </a:solidFill>
               </a:rPr>
-              <a:t>/Rain/Snow...</a:t>
+              <a:t>→ 조건 문자열</a:t>
             </a:r>
             <a:endParaRPr lang="en-US" sz="1100" dirty="0"/>
           </a:p>
@@ -8190,30 +8498,30 @@
         <p:spPr>
           <a:xfrm>
             <a:off x="7772400" y="1554480"/>
-            <a:ext cx="1645920" cy="457200"/>
-          </a:xfrm>
-          <a:prstGeom prst="rect">
-            <a:avLst/>
-          </a:prstGeom>
-          <a:noFill/>
-          <a:ln/>
-        </p:spPr>
-        <p:txBody>
-          <a:bodyPr wrap="square" rtlCol="0" anchor="ctr"/>
-          <a:lstStyle/>
-          <a:p>
-            <a:pPr algn="ctr" indent="0" marL="0">
-              <a:buNone/>
-            </a:pPr>
-            <a:r>
-              <a:rPr lang="en-US" sz="1300" b="1" dirty="0">
+            <a:ext cx="1645920" cy="502920"/>
+          </a:xfrm>
+          <a:prstGeom prst="rect">
+            <a:avLst/>
+          </a:prstGeom>
+          <a:noFill/>
+          <a:ln/>
+        </p:spPr>
+        <p:txBody>
+          <a:bodyPr wrap="square" rtlCol="0" anchor="ctr"/>
+          <a:lstStyle/>
+          <a:p>
+            <a:pPr algn="ctr" indent="0" marL="0">
+              <a:buNone/>
+            </a:pPr>
+            <a:r>
+              <a:rPr lang="en-US" sz="1200" b="1" dirty="0">
                 <a:solidFill>
                   <a:srgbClr val="000000"/>
                 </a:solidFill>
               </a:rPr>
               <a:t>LED 표시</a:t>
             </a:r>
-            <a:endParaRPr lang="en-US" sz="1300" dirty="0"/>
+            <a:endParaRPr lang="en-US" sz="1200" dirty="0"/>
           </a:p>
         </p:txBody>
       </p:sp>
@@ -8225,8 +8533,8 @@
         </p:nvSpPr>
         <p:spPr>
           <a:xfrm>
-            <a:off x="7772400" y="2011680"/>
-            <a:ext cx="1645920" cy="777240"/>
+            <a:off x="7772400" y="2057400"/>
+            <a:ext cx="1645920" cy="731520"/>
           </a:xfrm>
           <a:prstGeom prst="rect">
             <a:avLst/>
@@ -8275,8 +8583,267 @@
         </p:nvSpPr>
         <p:spPr>
           <a:xfrm>
+            <a:off x="5897880" y="3017520"/>
+            <a:ext cx="1645920" cy="1417320"/>
+          </a:xfrm>
+          <a:prstGeom prst="rect">
+            <a:avLst/>
+          </a:prstGeom>
+          <a:solidFill>
+            <a:srgbClr val="FFFFFF"/>
+          </a:solidFill>
+          <a:ln w="12700">
+            <a:solidFill>
+              <a:srgbClr val="000000"/>
+            </a:solidFill>
+            <a:prstDash val="solid"/>
+          </a:ln>
+        </p:spPr>
+      </p:sp>
+      <p:sp>
+        <p:nvSpPr>
+          <p:cNvPr id="24" name="Text 22"/>
+          <p:cNvSpPr/>
+          <p:nvPr/>
+        </p:nvSpPr>
+        <p:spPr>
+          <a:xfrm>
+            <a:off x="5989320" y="3090672"/>
+            <a:ext cx="1463040" cy="201168"/>
+          </a:xfrm>
+          <a:prstGeom prst="rect">
+            <a:avLst/>
+          </a:prstGeom>
+          <a:noFill/>
+          <a:ln/>
+        </p:spPr>
+        <p:txBody>
+          <a:bodyPr wrap="square" rtlCol="0" anchor="ctr"/>
+          <a:lstStyle/>
+          <a:p>
+            <a:pPr indent="0" marL="0">
+              <a:buNone/>
+            </a:pPr>
+            <a:r>
+              <a:rPr lang="en-US" sz="900" dirty="0">
+                <a:solidFill>
+                  <a:srgbClr val="222222"/>
+                </a:solidFill>
+                <a:latin typeface="Consolas" pitchFamily="34" charset="0"/>
+                <a:ea typeface="Consolas" pitchFamily="34" charset="-122"/>
+                <a:cs typeface="Consolas" pitchFamily="34" charset="-120"/>
+              </a:rPr>
+              <a:t>ww 0~2  : Sunny (맑음)</a:t>
+            </a:r>
+            <a:endParaRPr lang="en-US" sz="900" dirty="0"/>
+          </a:p>
+        </p:txBody>
+      </p:sp>
+      <p:sp>
+        <p:nvSpPr>
+          <p:cNvPr id="25" name="Text 23"/>
+          <p:cNvSpPr/>
+          <p:nvPr/>
+        </p:nvSpPr>
+        <p:spPr>
+          <a:xfrm>
+            <a:off x="5989320" y="3310128"/>
+            <a:ext cx="1463040" cy="201168"/>
+          </a:xfrm>
+          <a:prstGeom prst="rect">
+            <a:avLst/>
+          </a:prstGeom>
+          <a:noFill/>
+          <a:ln/>
+        </p:spPr>
+        <p:txBody>
+          <a:bodyPr wrap="square" rtlCol="0" anchor="ctr"/>
+          <a:lstStyle/>
+          <a:p>
+            <a:pPr indent="0" marL="0">
+              <a:buNone/>
+            </a:pPr>
+            <a:r>
+              <a:rPr lang="en-US" sz="900" dirty="0">
+                <a:solidFill>
+                  <a:srgbClr val="222222"/>
+                </a:solidFill>
+                <a:latin typeface="Consolas" pitchFamily="34" charset="0"/>
+                <a:ea typeface="Consolas" pitchFamily="34" charset="-122"/>
+                <a:cs typeface="Consolas" pitchFamily="34" charset="-120"/>
+              </a:rPr>
+              <a:t>ww 3~9  : Cloud (구름)</a:t>
+            </a:r>
+            <a:endParaRPr lang="en-US" sz="900" dirty="0"/>
+          </a:p>
+        </p:txBody>
+      </p:sp>
+      <p:sp>
+        <p:nvSpPr>
+          <p:cNvPr id="26" name="Text 24"/>
+          <p:cNvSpPr/>
+          <p:nvPr/>
+        </p:nvSpPr>
+        <p:spPr>
+          <a:xfrm>
+            <a:off x="5989320" y="3529584"/>
+            <a:ext cx="1463040" cy="201168"/>
+          </a:xfrm>
+          <a:prstGeom prst="rect">
+            <a:avLst/>
+          </a:prstGeom>
+          <a:noFill/>
+          <a:ln/>
+        </p:spPr>
+        <p:txBody>
+          <a:bodyPr wrap="square" rtlCol="0" anchor="ctr"/>
+          <a:lstStyle/>
+          <a:p>
+            <a:pPr indent="0" marL="0">
+              <a:buNone/>
+            </a:pPr>
+            <a:r>
+              <a:rPr lang="en-US" sz="900" dirty="0">
+                <a:solidFill>
+                  <a:srgbClr val="222222"/>
+                </a:solidFill>
+                <a:latin typeface="Consolas" pitchFamily="34" charset="0"/>
+                <a:ea typeface="Consolas" pitchFamily="34" charset="-122"/>
+                <a:cs typeface="Consolas" pitchFamily="34" charset="-120"/>
+              </a:rPr>
+              <a:t>ww 40~49: Fog   (안개)</a:t>
+            </a:r>
+            <a:endParaRPr lang="en-US" sz="900" dirty="0"/>
+          </a:p>
+        </p:txBody>
+      </p:sp>
+      <p:sp>
+        <p:nvSpPr>
+          <p:cNvPr id="27" name="Text 25"/>
+          <p:cNvSpPr/>
+          <p:nvPr/>
+        </p:nvSpPr>
+        <p:spPr>
+          <a:xfrm>
+            <a:off x="5989320" y="3749040"/>
+            <a:ext cx="1463040" cy="201168"/>
+          </a:xfrm>
+          <a:prstGeom prst="rect">
+            <a:avLst/>
+          </a:prstGeom>
+          <a:noFill/>
+          <a:ln/>
+        </p:spPr>
+        <p:txBody>
+          <a:bodyPr wrap="square" rtlCol="0" anchor="ctr"/>
+          <a:lstStyle/>
+          <a:p>
+            <a:pPr indent="0" marL="0">
+              <a:buNone/>
+            </a:pPr>
+            <a:r>
+              <a:rPr lang="en-US" sz="900" dirty="0">
+                <a:solidFill>
+                  <a:srgbClr val="222222"/>
+                </a:solidFill>
+                <a:latin typeface="Consolas" pitchFamily="34" charset="0"/>
+                <a:ea typeface="Consolas" pitchFamily="34" charset="-122"/>
+                <a:cs typeface="Consolas" pitchFamily="34" charset="-120"/>
+              </a:rPr>
+              <a:t>ww 50~69: Rain  (비)</a:t>
+            </a:r>
+            <a:endParaRPr lang="en-US" sz="900" dirty="0"/>
+          </a:p>
+        </p:txBody>
+      </p:sp>
+      <p:sp>
+        <p:nvSpPr>
+          <p:cNvPr id="28" name="Text 26"/>
+          <p:cNvSpPr/>
+          <p:nvPr/>
+        </p:nvSpPr>
+        <p:spPr>
+          <a:xfrm>
+            <a:off x="5989320" y="3968496"/>
+            <a:ext cx="1463040" cy="201168"/>
+          </a:xfrm>
+          <a:prstGeom prst="rect">
+            <a:avLst/>
+          </a:prstGeom>
+          <a:noFill/>
+          <a:ln/>
+        </p:spPr>
+        <p:txBody>
+          <a:bodyPr wrap="square" rtlCol="0" anchor="ctr"/>
+          <a:lstStyle/>
+          <a:p>
+            <a:pPr indent="0" marL="0">
+              <a:buNone/>
+            </a:pPr>
+            <a:r>
+              <a:rPr lang="en-US" sz="900" dirty="0">
+                <a:solidFill>
+                  <a:srgbClr val="222222"/>
+                </a:solidFill>
+                <a:latin typeface="Consolas" pitchFamily="34" charset="0"/>
+                <a:ea typeface="Consolas" pitchFamily="34" charset="-122"/>
+                <a:cs typeface="Consolas" pitchFamily="34" charset="-120"/>
+              </a:rPr>
+              <a:t>ww 70~79: Snow  (눈)</a:t>
+            </a:r>
+            <a:endParaRPr lang="en-US" sz="900" dirty="0"/>
+          </a:p>
+        </p:txBody>
+      </p:sp>
+      <p:sp>
+        <p:nvSpPr>
+          <p:cNvPr id="29" name="Text 27"/>
+          <p:cNvSpPr/>
+          <p:nvPr/>
+        </p:nvSpPr>
+        <p:spPr>
+          <a:xfrm>
+            <a:off x="5989320" y="4187952"/>
+            <a:ext cx="1463040" cy="201168"/>
+          </a:xfrm>
+          <a:prstGeom prst="rect">
+            <a:avLst/>
+          </a:prstGeom>
+          <a:noFill/>
+          <a:ln/>
+        </p:spPr>
+        <p:txBody>
+          <a:bodyPr wrap="square" rtlCol="0" anchor="ctr"/>
+          <a:lstStyle/>
+          <a:p>
+            <a:pPr indent="0" marL="0">
+              <a:buNone/>
+            </a:pPr>
+            <a:r>
+              <a:rPr lang="en-US" sz="900" dirty="0">
+                <a:solidFill>
+                  <a:srgbClr val="222222"/>
+                </a:solidFill>
+                <a:latin typeface="Consolas" pitchFamily="34" charset="0"/>
+                <a:ea typeface="Consolas" pitchFamily="34" charset="-122"/>
+                <a:cs typeface="Consolas" pitchFamily="34" charset="-120"/>
+              </a:rPr>
+              <a:t>ww 95~99: Storm (뇌우)</a:t>
+            </a:r>
+            <a:endParaRPr lang="en-US" sz="900" dirty="0"/>
+          </a:p>
+        </p:txBody>
+      </p:sp>
+      <p:sp>
+        <p:nvSpPr>
+          <p:cNvPr id="30" name="Shape 28"/>
+          <p:cNvSpPr/>
+          <p:nvPr/>
+        </p:nvSpPr>
+        <p:spPr>
+          <a:xfrm>
             <a:off x="365760" y="3200400"/>
-            <a:ext cx="2011680" cy="1691640"/>
+            <a:ext cx="2011680" cy="1737360"/>
           </a:xfrm>
           <a:prstGeom prst="rect">
             <a:avLst/>
@@ -8294,7 +8861,7 @@
       </p:sp>
       <p:sp>
         <p:nvSpPr>
-          <p:cNvPr id="24" name="Shape 22"/>
+          <p:cNvPr id="31" name="Shape 29"/>
           <p:cNvSpPr/>
           <p:nvPr/>
         </p:nvSpPr>
@@ -8319,7 +8886,7 @@
       </p:sp>
       <p:sp>
         <p:nvSpPr>
-          <p:cNvPr id="25" name="Text 23"/>
+          <p:cNvPr id="32" name="Text 30"/>
           <p:cNvSpPr/>
           <p:nvPr/>
         </p:nvSpPr>
@@ -8355,14 +8922,14 @@
       </p:sp>
       <p:sp>
         <p:nvSpPr>
-          <p:cNvPr id="26" name="Text 24"/>
+          <p:cNvPr id="33" name="Text 31"/>
           <p:cNvSpPr/>
           <p:nvPr/>
         </p:nvSpPr>
         <p:spPr>
           <a:xfrm>
             <a:off x="457200" y="3611880"/>
-            <a:ext cx="1828800" cy="1234440"/>
+            <a:ext cx="1828800" cy="1280160"/>
           </a:xfrm>
           <a:prstGeom prst="rect">
             <a:avLst/>
@@ -8397,7 +8964,7 @@
                   <a:srgbClr val="222222"/>
                 </a:solidFill>
               </a:rPr>
-              <a:t>BearSSL 버퍼 512 bytes</a:t>
+              <a:t>BearSSL RX 1024 / TX 512 bytes</a:t>
             </a:r>
             <a:endParaRPr lang="en-US" sz="1100" dirty="0"/>
           </a:p>
@@ -8405,14 +8972,14 @@
       </p:sp>
       <p:sp>
         <p:nvSpPr>
-          <p:cNvPr id="27" name="Shape 25"/>
+          <p:cNvPr id="34" name="Shape 32"/>
           <p:cNvSpPr/>
           <p:nvPr/>
         </p:nvSpPr>
         <p:spPr>
           <a:xfrm>
             <a:off x="2560320" y="3200400"/>
-            <a:ext cx="2011680" cy="1691640"/>
+            <a:ext cx="2011680" cy="1737360"/>
           </a:xfrm>
           <a:prstGeom prst="rect">
             <a:avLst/>
@@ -8430,7 +8997,7 @@
       </p:sp>
       <p:sp>
         <p:nvSpPr>
-          <p:cNvPr id="28" name="Shape 26"/>
+          <p:cNvPr id="35" name="Shape 33"/>
           <p:cNvSpPr/>
           <p:nvPr/>
         </p:nvSpPr>
@@ -8455,7 +9022,7 @@
       </p:sp>
       <p:sp>
         <p:nvSpPr>
-          <p:cNvPr id="29" name="Text 27"/>
+          <p:cNvPr id="36" name="Text 34"/>
           <p:cNvSpPr/>
           <p:nvPr/>
         </p:nvSpPr>
@@ -8483,7 +9050,7 @@
                   <a:srgbClr val="FFFFFF"/>
                 </a:solidFill>
               </a:rPr>
-              <a:t>응답 포맷</a:t>
+              <a:t>관측 요소</a:t>
             </a:r>
             <a:endParaRPr lang="en-US" sz="1200" dirty="0"/>
           </a:p>
@@ -8491,14 +9058,14 @@
       </p:sp>
       <p:sp>
         <p:nvSpPr>
-          <p:cNvPr id="30" name="Text 28"/>
+          <p:cNvPr id="37" name="Text 35"/>
           <p:cNvSpPr/>
           <p:nvPr/>
         </p:nvSpPr>
         <p:spPr>
           <a:xfrm>
             <a:off x="2651760" y="3611880"/>
-            <a:ext cx="1828800" cy="1234440"/>
+            <a:ext cx="1828800" cy="1280160"/>
           </a:xfrm>
           <a:prstGeom prst="rect">
             <a:avLst/>
@@ -8519,7 +9086,7 @@
                   <a:srgbClr val="222222"/>
                 </a:solidFill>
               </a:rPr>
-              <a:t>wttr.in ?format=%C/%t/%h</a:t>
+              <a:t>ta: 기온(°C)</a:t>
             </a:r>
             <a:endParaRPr lang="en-US" sz="1100" dirty="0"/>
           </a:p>
@@ -8533,22 +9100,36 @@
                   <a:srgbClr val="222222"/>
                 </a:solidFill>
               </a:rPr>
-              <a:t>예) Partly cloudy/+22°C/55%</a:t>
+              <a:t>hm: 습도(%)</a:t>
             </a:r>
             <a:endParaRPr lang="en-US" sz="1100" dirty="0"/>
           </a:p>
-        </p:txBody>
-      </p:sp>
-      <p:sp>
-        <p:nvSpPr>
-          <p:cNvPr id="31" name="Shape 29"/>
+          <a:p>
+            <a:pPr indent="0" marL="0">
+              <a:buNone/>
+            </a:pPr>
+            <a:r>
+              <a:rPr lang="en-US" sz="1100" dirty="0">
+                <a:solidFill>
+                  <a:srgbClr val="222222"/>
+                </a:solidFill>
+              </a:rPr>
+              <a:t>ww: 현천코드(WMO)</a:t>
+            </a:r>
+            <a:endParaRPr lang="en-US" sz="1100" dirty="0"/>
+          </a:p>
+        </p:txBody>
+      </p:sp>
+      <p:sp>
+        <p:nvSpPr>
+          <p:cNvPr id="38" name="Shape 36"/>
           <p:cNvSpPr/>
           <p:nvPr/>
         </p:nvSpPr>
         <p:spPr>
           <a:xfrm>
             <a:off x="4754880" y="3200400"/>
-            <a:ext cx="2011680" cy="1691640"/>
+            <a:ext cx="2011680" cy="1737360"/>
           </a:xfrm>
           <a:prstGeom prst="rect">
             <a:avLst/>
@@ -8566,7 +9147,7 @@
       </p:sp>
       <p:sp>
         <p:nvSpPr>
-          <p:cNvPr id="32" name="Shape 30"/>
+          <p:cNvPr id="39" name="Shape 37"/>
           <p:cNvSpPr/>
           <p:nvPr/>
         </p:nvSpPr>
@@ -8591,7 +9172,7 @@
       </p:sp>
       <p:sp>
         <p:nvSpPr>
-          <p:cNvPr id="33" name="Text 31"/>
+          <p:cNvPr id="40" name="Text 38"/>
           <p:cNvSpPr/>
           <p:nvPr/>
         </p:nvSpPr>
@@ -8627,14 +9208,14 @@
       </p:sp>
       <p:sp>
         <p:nvSpPr>
-          <p:cNvPr id="34" name="Text 32"/>
+          <p:cNvPr id="41" name="Text 39"/>
           <p:cNvSpPr/>
           <p:nvPr/>
         </p:nvSpPr>
         <p:spPr>
           <a:xfrm>
             <a:off x="4846320" y="3611880"/>
-            <a:ext cx="1828800" cy="1234440"/>
+            <a:ext cx="1828800" cy="1280160"/>
           </a:xfrm>
           <a:prstGeom prst="rect">
             <a:avLst/>
@@ -8655,7 +9236,7 @@
                   <a:srgbClr val="222222"/>
                 </a:solidFill>
               </a:rPr>
-              <a:t>1분 (WEATHER_INTERVAL_MS)</a:t>
+              <a:t>1분 (3회 순차 요청)</a:t>
             </a:r>
             <a:endParaRPr lang="en-US" sz="1100" dirty="0"/>
           </a:p>
@@ -8669,7 +9250,7 @@
                   <a:srgbClr val="222222"/>
                 </a:solidFill>
               </a:rPr>
-              <a:t>10분으로 원복 가능</a:t>
+              <a:t>결측(-9999) 시 이전값 유지</a:t>
             </a:r>
             <a:endParaRPr lang="en-US" sz="1100" dirty="0"/>
           </a:p>
@@ -8677,14 +9258,14 @@
       </p:sp>
       <p:sp>
         <p:nvSpPr>
-          <p:cNvPr id="35" name="Shape 33"/>
+          <p:cNvPr id="42" name="Shape 40"/>
           <p:cNvSpPr/>
           <p:nvPr/>
         </p:nvSpPr>
         <p:spPr>
           <a:xfrm>
             <a:off x="6949440" y="3200400"/>
-            <a:ext cx="2011680" cy="1691640"/>
+            <a:ext cx="2011680" cy="1737360"/>
           </a:xfrm>
           <a:prstGeom prst="rect">
             <a:avLst/>
@@ -8702,7 +9283,7 @@
       </p:sp>
       <p:sp>
         <p:nvSpPr>
-          <p:cNvPr id="36" name="Shape 34"/>
+          <p:cNvPr id="43" name="Shape 41"/>
           <p:cNvSpPr/>
           <p:nvPr/>
         </p:nvSpPr>
@@ -8727,7 +9308,7 @@
       </p:sp>
       <p:sp>
         <p:nvSpPr>
-          <p:cNvPr id="37" name="Text 35"/>
+          <p:cNvPr id="44" name="Text 42"/>
           <p:cNvSpPr/>
           <p:nvPr/>
         </p:nvSpPr>
@@ -8755,7 +9336,7 @@
                   <a:srgbClr val="FFFFFF"/>
                 </a:solidFill>
               </a:rPr>
-              <a:t>오류 처리</a:t>
+              <a:t>위치 정밀도</a:t>
             </a:r>
             <a:endParaRPr lang="en-US" sz="1200" dirty="0"/>
           </a:p>
@@ -8763,14 +9344,14 @@
       </p:sp>
       <p:sp>
         <p:nvSpPr>
-          <p:cNvPr id="38" name="Text 36"/>
+          <p:cNvPr id="45" name="Text 43"/>
           <p:cNvSpPr/>
           <p:nvPr/>
         </p:nvSpPr>
         <p:spPr>
           <a:xfrm>
             <a:off x="7040880" y="3611880"/>
-            <a:ext cx="1828800" cy="1234440"/>
+            <a:ext cx="1828800" cy="1280160"/>
           </a:xfrm>
           <a:prstGeom prst="rect">
             <a:avLst/>
@@ -8791,7 +9372,7 @@
                   <a:srgbClr val="222222"/>
                 </a:solidFill>
               </a:rPr>
-              <a:t>HTTP 실패 시 이전 값 유지</a:t>
+              <a:t>IP → 위도/경도 직접 활용</a:t>
             </a:r>
             <a:endParaRPr lang="en-US" sz="1100" dirty="0"/>
           </a:p>
@@ -8805,7 +9386,7 @@
                   <a:srgbClr val="222222"/>
                 </a:solidFill>
               </a:rPr>
-              <a:t>'---' 으로 표시</a:t>
+              <a:t>기상청 격자 변환 불필요</a:t>
             </a:r>
             <a:endParaRPr lang="en-US" sz="1100" dirty="0"/>
           </a:p>

--- a/IoT_WallClock_설명.pptx
+++ b/IoT_WallClock_설명.pptx
@@ -1704,7 +1704,7 @@
                   <a:srgbClr val="000000"/>
                 </a:solidFill>
               </a:rPr>
-              <a:t>기상청날씨</a:t>
+              <a:t>wttr.in날씨</a:t>
             </a:r>
             <a:endParaRPr lang="en-US" sz="1200" dirty="0"/>
           </a:p>
@@ -1862,7 +1862,7 @@
                   <a:srgbClr val="CCCCCC"/>
                 </a:solidFill>
               </a:rPr>
-              <a:t>Arduino .ino  ·  WiFiManager  ·  ESP8266WiFiMulti  ·  apihub.kma.go.kr  ·  NTP  ·  DHT11  ·  CDS  ·  date.nager.at</a:t>
+              <a:t>Arduino .ino  ·  WiFiManager  ·  ESP8266WiFiMulti  ·  wttr.in  ·  NTP  ·  DHT11  ·  CDS  ·  date.nager.at</a:t>
             </a:r>
             <a:endParaRPr lang="en-US" sz="1100" dirty="0"/>
           </a:p>
@@ -2615,7 +2615,7 @@
                   <a:srgbClr val="000000"/>
                 </a:solidFill>
               </a:rPr>
-              <a:t>apihub.kma.go.kr</a:t>
+              <a:t>wttr.in</a:t>
             </a:r>
             <a:endParaRPr lang="en-US" sz="1200" dirty="0"/>
           </a:p>
@@ -3573,7 +3573,7 @@
                   <a:srgbClr val="000000"/>
                 </a:solidFill>
               </a:rPr>
-              <a:t>기상청 동네 날씨 수신</a:t>
+              <a:t>외부 날씨 수신 (wttr.in HTTPS)</a:t>
             </a:r>
             <a:endParaRPr lang="en-US" sz="1300" dirty="0"/>
           </a:p>
@@ -3609,7 +3609,7 @@
                   <a:srgbClr val="666666"/>
                 </a:solidFill>
               </a:rPr>
-              <a:t>apihub.kma.go.kr 지상관측 API</a:t>
+              <a:t>fetchWeatherWttr() — 실패시 60초/성공시 5분</a:t>
             </a:r>
             <a:endParaRPr lang="en-US" sz="1050" dirty="0"/>
           </a:p>
@@ -3623,7 +3623,7 @@
                   <a:srgbClr val="666666"/>
                 </a:solidFill>
               </a:rPr>
-              <a:t>기온(ta)·습도(hm)·현천코드(ww) 1분 갱신</a:t>
+              <a:t>텍스트 포맷 (%t|%C) → 기온+날씨조건</a:t>
             </a:r>
             <a:endParaRPr lang="en-US" sz="1050" dirty="0"/>
           </a:p>
@@ -3781,7 +3781,7 @@
                   <a:srgbClr val="666666"/>
                 </a:solidFill>
               </a:rPr>
-              <a:t>온도: 기상청 지상관측 (외부 기온)</a:t>
+              <a:t>온도: wttr.in 외부 기온 (1~5분 갱신)</a:t>
             </a:r>
             <a:endParaRPr lang="en-US" sz="1050" dirty="0"/>
           </a:p>
@@ -6699,7 +6699,7 @@
         </p:nvSpPr>
         <p:spPr>
           <a:xfrm>
-            <a:off x="1097280" y="1691640"/>
+            <a:off x="845820" y="1691640"/>
             <a:ext cx="0" cy="365760"/>
           </a:xfrm>
           <a:prstGeom prst="line">
@@ -6722,8 +6722,8 @@
         </p:nvSpPr>
         <p:spPr>
           <a:xfrm>
-            <a:off x="274320" y="2057400"/>
-            <a:ext cx="1645920" cy="1005840"/>
+            <a:off x="182880" y="2057400"/>
+            <a:ext cx="1325880" cy="1005840"/>
           </a:xfrm>
           <a:prstGeom prst="rect">
             <a:avLst/>
@@ -6747,31 +6747,31 @@
         </p:nvSpPr>
         <p:spPr>
           <a:xfrm>
-            <a:off x="320040" y="2084832"/>
-            <a:ext cx="1554480" cy="411480"/>
-          </a:xfrm>
-          <a:prstGeom prst="rect">
-            <a:avLst/>
-          </a:prstGeom>
-          <a:noFill/>
-          <a:ln/>
-        </p:spPr>
-        <p:txBody>
-          <a:bodyPr wrap="square" rtlCol="0" anchor="ctr"/>
-          <a:lstStyle/>
-          <a:p>
-            <a:pPr algn="ctr" indent="0" marL="0">
-              <a:buNone/>
-            </a:pPr>
-            <a:r>
-              <a:rPr lang="en-US" sz="900" b="1" dirty="0">
+            <a:off x="219456" y="2084832"/>
+            <a:ext cx="1252728" cy="411480"/>
+          </a:xfrm>
+          <a:prstGeom prst="rect">
+            <a:avLst/>
+          </a:prstGeom>
+          <a:noFill/>
+          <a:ln/>
+        </p:spPr>
+        <p:txBody>
+          <a:bodyPr wrap="square" rtlCol="0" anchor="ctr"/>
+          <a:lstStyle/>
+          <a:p>
+            <a:pPr algn="ctr" indent="0" marL="0">
+              <a:buNone/>
+            </a:pPr>
+            <a:r>
+              <a:rPr lang="en-US" sz="850" b="1" dirty="0">
                 <a:solidFill>
                   <a:srgbClr val="000000"/>
                 </a:solidFill>
               </a:rPr>
               <a:t>drawFrame()</a:t>
             </a:r>
-            <a:endParaRPr lang="en-US" sz="900" dirty="0"/>
+            <a:endParaRPr lang="en-US" sz="850" dirty="0"/>
           </a:p>
         </p:txBody>
       </p:sp>
@@ -6783,45 +6783,45 @@
         </p:nvSpPr>
         <p:spPr>
           <a:xfrm>
-            <a:off x="320040" y="2496312"/>
-            <a:ext cx="1554480" cy="548640"/>
-          </a:xfrm>
-          <a:prstGeom prst="rect">
-            <a:avLst/>
-          </a:prstGeom>
-          <a:noFill/>
-          <a:ln/>
-        </p:spPr>
-        <p:txBody>
-          <a:bodyPr wrap="square" rtlCol="0" anchor="ctr"/>
-          <a:lstStyle/>
-          <a:p>
-            <a:pPr algn="ctr" indent="0" marL="0">
-              <a:buNone/>
-            </a:pPr>
-            <a:r>
-              <a:rPr lang="en-US" sz="1000" dirty="0">
+            <a:off x="219456" y="2496312"/>
+            <a:ext cx="1252728" cy="548640"/>
+          </a:xfrm>
+          <a:prstGeom prst="rect">
+            <a:avLst/>
+          </a:prstGeom>
+          <a:noFill/>
+          <a:ln/>
+        </p:spPr>
+        <p:txBody>
+          <a:bodyPr wrap="square" rtlCol="0" anchor="ctr"/>
+          <a:lstStyle/>
+          <a:p>
+            <a:pPr algn="ctr" indent="0" marL="0">
+              <a:buNone/>
+            </a:pPr>
+            <a:r>
+              <a:rPr lang="en-US" sz="950" dirty="0">
                 <a:solidFill>
                   <a:srgbClr val="666666"/>
                 </a:solidFill>
               </a:rPr>
               <a:t>50 ms</a:t>
             </a:r>
-            <a:endParaRPr lang="en-US" sz="1000" dirty="0"/>
-          </a:p>
-          <a:p>
-            <a:pPr algn="ctr" indent="0" marL="0">
-              <a:buNone/>
-            </a:pPr>
-            <a:r>
-              <a:rPr lang="en-US" sz="1000" dirty="0">
+            <a:endParaRPr lang="en-US" sz="950" dirty="0"/>
+          </a:p>
+          <a:p>
+            <a:pPr algn="ctr" indent="0" marL="0">
+              <a:buNone/>
+            </a:pPr>
+            <a:r>
+              <a:rPr lang="en-US" sz="950" dirty="0">
                 <a:solidFill>
                   <a:srgbClr val="666666"/>
                 </a:solidFill>
               </a:rPr>
               <a:t>화면 갱신 (20fps)</a:t>
             </a:r>
-            <a:endParaRPr lang="en-US" sz="1000" dirty="0"/>
+            <a:endParaRPr lang="en-US" sz="950" dirty="0"/>
           </a:p>
         </p:txBody>
       </p:sp>
@@ -6833,7 +6833,7 @@
         </p:nvSpPr>
         <p:spPr>
           <a:xfrm>
-            <a:off x="2834640" y="1691640"/>
+            <a:off x="2354580" y="1691640"/>
             <a:ext cx="0" cy="365760"/>
           </a:xfrm>
           <a:prstGeom prst="line">
@@ -6856,8 +6856,8 @@
         </p:nvSpPr>
         <p:spPr>
           <a:xfrm>
-            <a:off x="2011680" y="2057400"/>
-            <a:ext cx="1645920" cy="1005840"/>
+            <a:off x="1691640" y="2057400"/>
+            <a:ext cx="1325880" cy="1005840"/>
           </a:xfrm>
           <a:prstGeom prst="rect">
             <a:avLst/>
@@ -6881,31 +6881,31 @@
         </p:nvSpPr>
         <p:spPr>
           <a:xfrm>
-            <a:off x="2057400" y="2084832"/>
-            <a:ext cx="1554480" cy="411480"/>
-          </a:xfrm>
-          <a:prstGeom prst="rect">
-            <a:avLst/>
-          </a:prstGeom>
-          <a:noFill/>
-          <a:ln/>
-        </p:spPr>
-        <p:txBody>
-          <a:bodyPr wrap="square" rtlCol="0" anchor="ctr"/>
-          <a:lstStyle/>
-          <a:p>
-            <a:pPr algn="ctr" indent="0" marL="0">
-              <a:buNone/>
-            </a:pPr>
-            <a:r>
-              <a:rPr lang="en-US" sz="900" b="1" dirty="0">
+            <a:off x="1728216" y="2084832"/>
+            <a:ext cx="1252728" cy="411480"/>
+          </a:xfrm>
+          <a:prstGeom prst="rect">
+            <a:avLst/>
+          </a:prstGeom>
+          <a:noFill/>
+          <a:ln/>
+        </p:spPr>
+        <p:txBody>
+          <a:bodyPr wrap="square" rtlCol="0" anchor="ctr"/>
+          <a:lstStyle/>
+          <a:p>
+            <a:pPr algn="ctr" indent="0" marL="0">
+              <a:buNone/>
+            </a:pPr>
+            <a:r>
+              <a:rPr lang="en-US" sz="850" b="1" dirty="0">
                 <a:solidFill>
                   <a:srgbClr val="000000"/>
                 </a:solidFill>
               </a:rPr>
               <a:t>readDHT()</a:t>
             </a:r>
-            <a:endParaRPr lang="en-US" sz="900" dirty="0"/>
+            <a:endParaRPr lang="en-US" sz="850" dirty="0"/>
           </a:p>
         </p:txBody>
       </p:sp>
@@ -6917,45 +6917,45 @@
         </p:nvSpPr>
         <p:spPr>
           <a:xfrm>
-            <a:off x="2057400" y="2496312"/>
-            <a:ext cx="1554480" cy="548640"/>
-          </a:xfrm>
-          <a:prstGeom prst="rect">
-            <a:avLst/>
-          </a:prstGeom>
-          <a:noFill/>
-          <a:ln/>
-        </p:spPr>
-        <p:txBody>
-          <a:bodyPr wrap="square" rtlCol="0" anchor="ctr"/>
-          <a:lstStyle/>
-          <a:p>
-            <a:pPr algn="ctr" indent="0" marL="0">
-              <a:buNone/>
-            </a:pPr>
-            <a:r>
-              <a:rPr lang="en-US" sz="1000" dirty="0">
+            <a:off x="1728216" y="2496312"/>
+            <a:ext cx="1252728" cy="548640"/>
+          </a:xfrm>
+          <a:prstGeom prst="rect">
+            <a:avLst/>
+          </a:prstGeom>
+          <a:noFill/>
+          <a:ln/>
+        </p:spPr>
+        <p:txBody>
+          <a:bodyPr wrap="square" rtlCol="0" anchor="ctr"/>
+          <a:lstStyle/>
+          <a:p>
+            <a:pPr algn="ctr" indent="0" marL="0">
+              <a:buNone/>
+            </a:pPr>
+            <a:r>
+              <a:rPr lang="en-US" sz="950" dirty="0">
                 <a:solidFill>
                   <a:srgbClr val="666666"/>
                 </a:solidFill>
               </a:rPr>
               <a:t>2.5 s</a:t>
             </a:r>
-            <a:endParaRPr lang="en-US" sz="1000" dirty="0"/>
-          </a:p>
-          <a:p>
-            <a:pPr algn="ctr" indent="0" marL="0">
-              <a:buNone/>
-            </a:pPr>
-            <a:r>
-              <a:rPr lang="en-US" sz="1000" dirty="0">
+            <a:endParaRPr lang="en-US" sz="950" dirty="0"/>
+          </a:p>
+          <a:p>
+            <a:pPr algn="ctr" indent="0" marL="0">
+              <a:buNone/>
+            </a:pPr>
+            <a:r>
+              <a:rPr lang="en-US" sz="950" dirty="0">
                 <a:solidFill>
                   <a:srgbClr val="666666"/>
                 </a:solidFill>
               </a:rPr>
               <a:t>실내 습도</a:t>
             </a:r>
-            <a:endParaRPr lang="en-US" sz="1000" dirty="0"/>
+            <a:endParaRPr lang="en-US" sz="950" dirty="0"/>
           </a:p>
         </p:txBody>
       </p:sp>
@@ -6967,7 +6967,7 @@
         </p:nvSpPr>
         <p:spPr>
           <a:xfrm>
-            <a:off x="4480560" y="1691640"/>
+            <a:off x="3863340" y="1691640"/>
             <a:ext cx="0" cy="365760"/>
           </a:xfrm>
           <a:prstGeom prst="line">
@@ -6990,8 +6990,8 @@
         </p:nvSpPr>
         <p:spPr>
           <a:xfrm>
-            <a:off x="3657600" y="2057400"/>
-            <a:ext cx="1645920" cy="1005840"/>
+            <a:off x="3200400" y="2057400"/>
+            <a:ext cx="1325880" cy="1005840"/>
           </a:xfrm>
           <a:prstGeom prst="rect">
             <a:avLst/>
@@ -7015,31 +7015,31 @@
         </p:nvSpPr>
         <p:spPr>
           <a:xfrm>
-            <a:off x="3703320" y="2084832"/>
-            <a:ext cx="1554480" cy="411480"/>
-          </a:xfrm>
-          <a:prstGeom prst="rect">
-            <a:avLst/>
-          </a:prstGeom>
-          <a:noFill/>
-          <a:ln/>
-        </p:spPr>
-        <p:txBody>
-          <a:bodyPr wrap="square" rtlCol="0" anchor="ctr"/>
-          <a:lstStyle/>
-          <a:p>
-            <a:pPr algn="ctr" indent="0" marL="0">
-              <a:buNone/>
-            </a:pPr>
-            <a:r>
-              <a:rPr lang="en-US" sz="900" b="1" dirty="0">
+            <a:off x="3236976" y="2084832"/>
+            <a:ext cx="1252728" cy="411480"/>
+          </a:xfrm>
+          <a:prstGeom prst="rect">
+            <a:avLst/>
+          </a:prstGeom>
+          <a:noFill/>
+          <a:ln/>
+        </p:spPr>
+        <p:txBody>
+          <a:bodyPr wrap="square" rtlCol="0" anchor="ctr"/>
+          <a:lstStyle/>
+          <a:p>
+            <a:pPr algn="ctr" indent="0" marL="0">
+              <a:buNone/>
+            </a:pPr>
+            <a:r>
+              <a:rPr lang="en-US" sz="850" b="1" dirty="0">
                 <a:solidFill>
                   <a:srgbClr val="000000"/>
                 </a:solidFill>
               </a:rPr>
               <a:t>updateBrightness()</a:t>
             </a:r>
-            <a:endParaRPr lang="en-US" sz="900" dirty="0"/>
+            <a:endParaRPr lang="en-US" sz="850" dirty="0"/>
           </a:p>
         </p:txBody>
       </p:sp>
@@ -7051,45 +7051,45 @@
         </p:nvSpPr>
         <p:spPr>
           <a:xfrm>
-            <a:off x="3703320" y="2496312"/>
-            <a:ext cx="1554480" cy="548640"/>
-          </a:xfrm>
-          <a:prstGeom prst="rect">
-            <a:avLst/>
-          </a:prstGeom>
-          <a:noFill/>
-          <a:ln/>
-        </p:spPr>
-        <p:txBody>
-          <a:bodyPr wrap="square" rtlCol="0" anchor="ctr"/>
-          <a:lstStyle/>
-          <a:p>
-            <a:pPr algn="ctr" indent="0" marL="0">
-              <a:buNone/>
-            </a:pPr>
-            <a:r>
-              <a:rPr lang="en-US" sz="1000" dirty="0">
+            <a:off x="3236976" y="2496312"/>
+            <a:ext cx="1252728" cy="548640"/>
+          </a:xfrm>
+          <a:prstGeom prst="rect">
+            <a:avLst/>
+          </a:prstGeom>
+          <a:noFill/>
+          <a:ln/>
+        </p:spPr>
+        <p:txBody>
+          <a:bodyPr wrap="square" rtlCol="0" anchor="ctr"/>
+          <a:lstStyle/>
+          <a:p>
+            <a:pPr algn="ctr" indent="0" marL="0">
+              <a:buNone/>
+            </a:pPr>
+            <a:r>
+              <a:rPr lang="en-US" sz="950" dirty="0">
                 <a:solidFill>
                   <a:srgbClr val="666666"/>
                 </a:solidFill>
               </a:rPr>
               <a:t>500 ms</a:t>
             </a:r>
-            <a:endParaRPr lang="en-US" sz="1000" dirty="0"/>
-          </a:p>
-          <a:p>
-            <a:pPr algn="ctr" indent="0" marL="0">
-              <a:buNone/>
-            </a:pPr>
-            <a:r>
-              <a:rPr lang="en-US" sz="1000" dirty="0">
+            <a:endParaRPr lang="en-US" sz="950" dirty="0"/>
+          </a:p>
+          <a:p>
+            <a:pPr algn="ctr" indent="0" marL="0">
+              <a:buNone/>
+            </a:pPr>
+            <a:r>
+              <a:rPr lang="en-US" sz="950" dirty="0">
                 <a:solidFill>
                   <a:srgbClr val="666666"/>
                 </a:solidFill>
               </a:rPr>
               <a:t>CDS 비례밝기</a:t>
             </a:r>
-            <a:endParaRPr lang="en-US" sz="1000" dirty="0"/>
+            <a:endParaRPr lang="en-US" sz="950" dirty="0"/>
           </a:p>
         </p:txBody>
       </p:sp>
@@ -7101,7 +7101,7 @@
         </p:nvSpPr>
         <p:spPr>
           <a:xfrm>
-            <a:off x="6309360" y="1691640"/>
+            <a:off x="5372100" y="1691640"/>
             <a:ext cx="0" cy="365760"/>
           </a:xfrm>
           <a:prstGeom prst="line">
@@ -7124,8 +7124,8 @@
         </p:nvSpPr>
         <p:spPr>
           <a:xfrm>
-            <a:off x="5486400" y="2057400"/>
-            <a:ext cx="1645920" cy="1005840"/>
+            <a:off x="4709160" y="2057400"/>
+            <a:ext cx="1325880" cy="1005840"/>
           </a:xfrm>
           <a:prstGeom prst="rect">
             <a:avLst/>
@@ -7149,31 +7149,31 @@
         </p:nvSpPr>
         <p:spPr>
           <a:xfrm>
-            <a:off x="5532120" y="2084832"/>
-            <a:ext cx="1554480" cy="411480"/>
-          </a:xfrm>
-          <a:prstGeom prst="rect">
-            <a:avLst/>
-          </a:prstGeom>
-          <a:noFill/>
-          <a:ln/>
-        </p:spPr>
-        <p:txBody>
-          <a:bodyPr wrap="square" rtlCol="0" anchor="ctr"/>
-          <a:lstStyle/>
-          <a:p>
-            <a:pPr algn="ctr" indent="0" marL="0">
-              <a:buNone/>
-            </a:pPr>
-            <a:r>
-              <a:rPr lang="en-US" sz="900" b="1" dirty="0">
+            <a:off x="4745736" y="2084832"/>
+            <a:ext cx="1252728" cy="411480"/>
+          </a:xfrm>
+          <a:prstGeom prst="rect">
+            <a:avLst/>
+          </a:prstGeom>
+          <a:noFill/>
+          <a:ln/>
+        </p:spPr>
+        <p:txBody>
+          <a:bodyPr wrap="square" rtlCol="0" anchor="ctr"/>
+          <a:lstStyle/>
+          <a:p>
+            <a:pPr algn="ctr" indent="0" marL="0">
+              <a:buNone/>
+            </a:pPr>
+            <a:r>
+              <a:rPr lang="en-US" sz="850" b="1" dirty="0">
                 <a:solidFill>
                   <a:srgbClr val="000000"/>
                 </a:solidFill>
               </a:rPr>
-              <a:t>fetchWeatherKMA()</a:t>
-            </a:r>
-            <a:endParaRPr lang="en-US" sz="900" dirty="0"/>
+              <a:t>fetchWeatherWttr()</a:t>
+            </a:r>
+            <a:endParaRPr lang="en-US" sz="850" dirty="0"/>
           </a:p>
         </p:txBody>
       </p:sp>
@@ -7185,45 +7185,45 @@
         </p:nvSpPr>
         <p:spPr>
           <a:xfrm>
-            <a:off x="5532120" y="2496312"/>
-            <a:ext cx="1554480" cy="548640"/>
-          </a:xfrm>
-          <a:prstGeom prst="rect">
-            <a:avLst/>
-          </a:prstGeom>
-          <a:noFill/>
-          <a:ln/>
-        </p:spPr>
-        <p:txBody>
-          <a:bodyPr wrap="square" rtlCol="0" anchor="ctr"/>
-          <a:lstStyle/>
-          <a:p>
-            <a:pPr algn="ctr" indent="0" marL="0">
-              <a:buNone/>
-            </a:pPr>
-            <a:r>
-              <a:rPr lang="en-US" sz="1000" dirty="0">
+            <a:off x="4745736" y="2496312"/>
+            <a:ext cx="1252728" cy="548640"/>
+          </a:xfrm>
+          <a:prstGeom prst="rect">
+            <a:avLst/>
+          </a:prstGeom>
+          <a:noFill/>
+          <a:ln/>
+        </p:spPr>
+        <p:txBody>
+          <a:bodyPr wrap="square" rtlCol="0" anchor="ctr"/>
+          <a:lstStyle/>
+          <a:p>
+            <a:pPr algn="ctr" indent="0" marL="0">
+              <a:buNone/>
+            </a:pPr>
+            <a:r>
+              <a:rPr lang="en-US" sz="950" dirty="0">
                 <a:solidFill>
                   <a:srgbClr val="666666"/>
                 </a:solidFill>
               </a:rPr>
-              <a:t>1 분</a:t>
-            </a:r>
-            <a:endParaRPr lang="en-US" sz="1000" dirty="0"/>
-          </a:p>
-          <a:p>
-            <a:pPr algn="ctr" indent="0" marL="0">
-              <a:buNone/>
-            </a:pPr>
-            <a:r>
-              <a:rPr lang="en-US" sz="1000" dirty="0">
+              <a:t>1~5 분</a:t>
+            </a:r>
+            <a:endParaRPr lang="en-US" sz="950" dirty="0"/>
+          </a:p>
+          <a:p>
+            <a:pPr algn="ctr" indent="0" marL="0">
+              <a:buNone/>
+            </a:pPr>
+            <a:r>
+              <a:rPr lang="en-US" sz="950" dirty="0">
                 <a:solidFill>
                   <a:srgbClr val="666666"/>
                 </a:solidFill>
               </a:rPr>
-              <a:t>기상청 날씨</a:t>
-            </a:r>
-            <a:endParaRPr lang="en-US" sz="1000" dirty="0"/>
+              <a:t>기온+날씨</a:t>
+            </a:r>
+            <a:endParaRPr lang="en-US" sz="950" dirty="0"/>
           </a:p>
         </p:txBody>
       </p:sp>
@@ -7235,7 +7235,7 @@
         </p:nvSpPr>
         <p:spPr>
           <a:xfrm>
-            <a:off x="8229600" y="1691640"/>
+            <a:off x="6880860" y="1691640"/>
             <a:ext cx="0" cy="365760"/>
           </a:xfrm>
           <a:prstGeom prst="line">
@@ -7258,8 +7258,8 @@
         </p:nvSpPr>
         <p:spPr>
           <a:xfrm>
-            <a:off x="7406640" y="2057400"/>
-            <a:ext cx="1645920" cy="1005840"/>
+            <a:off x="6217920" y="2057400"/>
+            <a:ext cx="1325880" cy="1005840"/>
           </a:xfrm>
           <a:prstGeom prst="rect">
             <a:avLst/>
@@ -7283,108 +7283,364 @@
         </p:nvSpPr>
         <p:spPr>
           <a:xfrm>
-            <a:off x="7452360" y="2084832"/>
-            <a:ext cx="1554480" cy="411480"/>
-          </a:xfrm>
-          <a:prstGeom prst="rect">
-            <a:avLst/>
-          </a:prstGeom>
-          <a:noFill/>
-          <a:ln/>
-        </p:spPr>
-        <p:txBody>
-          <a:bodyPr wrap="square" rtlCol="0" anchor="ctr"/>
-          <a:lstStyle/>
-          <a:p>
-            <a:pPr algn="ctr" indent="0" marL="0">
-              <a:buNone/>
-            </a:pPr>
-            <a:r>
-              <a:rPr lang="en-US" sz="900" b="1" dirty="0">
+            <a:off x="6254496" y="2084832"/>
+            <a:ext cx="1252728" cy="411480"/>
+          </a:xfrm>
+          <a:prstGeom prst="rect">
+            <a:avLst/>
+          </a:prstGeom>
+          <a:noFill/>
+          <a:ln/>
+        </p:spPr>
+        <p:txBody>
+          <a:bodyPr wrap="square" rtlCol="0" anchor="ctr"/>
+          <a:lstStyle/>
+          <a:p>
+            <a:pPr algn="ctr" indent="0" marL="0">
+              <a:buNone/>
+            </a:pPr>
+            <a:r>
+              <a:rPr lang="en-US" sz="850" b="1" dirty="0">
                 <a:solidFill>
                   <a:srgbClr val="000000"/>
                 </a:solidFill>
               </a:rPr>
+              <a:t>fetchHolidays()</a:t>
+            </a:r>
+            <a:endParaRPr lang="en-US" sz="850" dirty="0"/>
+          </a:p>
+        </p:txBody>
+      </p:sp>
+      <p:sp>
+        <p:nvSpPr>
+          <p:cNvPr id="26" name="Text 24"/>
+          <p:cNvSpPr/>
+          <p:nvPr/>
+        </p:nvSpPr>
+        <p:spPr>
+          <a:xfrm>
+            <a:off x="6254496" y="2496312"/>
+            <a:ext cx="1252728" cy="548640"/>
+          </a:xfrm>
+          <a:prstGeom prst="rect">
+            <a:avLst/>
+          </a:prstGeom>
+          <a:noFill/>
+          <a:ln/>
+        </p:spPr>
+        <p:txBody>
+          <a:bodyPr wrap="square" rtlCol="0" anchor="ctr"/>
+          <a:lstStyle/>
+          <a:p>
+            <a:pPr algn="ctr" indent="0" marL="0">
+              <a:buNone/>
+            </a:pPr>
+            <a:r>
+              <a:rPr lang="en-US" sz="950" dirty="0">
+                <a:solidFill>
+                  <a:srgbClr val="666666"/>
+                </a:solidFill>
+              </a:rPr>
+              <a:t>1 시간</a:t>
+            </a:r>
+            <a:endParaRPr lang="en-US" sz="950" dirty="0"/>
+          </a:p>
+          <a:p>
+            <a:pPr algn="ctr" indent="0" marL="0">
+              <a:buNone/>
+            </a:pPr>
+            <a:r>
+              <a:rPr lang="en-US" sz="950" dirty="0">
+                <a:solidFill>
+                  <a:srgbClr val="666666"/>
+                </a:solidFill>
+              </a:rPr>
+              <a:t>공휴일 갱신</a:t>
+            </a:r>
+            <a:endParaRPr lang="en-US" sz="950" dirty="0"/>
+          </a:p>
+        </p:txBody>
+      </p:sp>
+      <p:sp>
+        <p:nvSpPr>
+          <p:cNvPr id="27" name="Shape 25"/>
+          <p:cNvSpPr/>
+          <p:nvPr/>
+        </p:nvSpPr>
+        <p:spPr>
+          <a:xfrm>
+            <a:off x="8389620" y="1691640"/>
+            <a:ext cx="0" cy="365760"/>
+          </a:xfrm>
+          <a:prstGeom prst="line">
+            <a:avLst/>
+          </a:prstGeom>
+          <a:noFill/>
+          <a:ln w="15240">
+            <a:solidFill>
+              <a:srgbClr val="000000"/>
+            </a:solidFill>
+            <a:prstDash val="solid"/>
+          </a:ln>
+        </p:spPr>
+      </p:sp>
+      <p:sp>
+        <p:nvSpPr>
+          <p:cNvPr id="28" name="Shape 26"/>
+          <p:cNvSpPr/>
+          <p:nvPr/>
+        </p:nvSpPr>
+        <p:spPr>
+          <a:xfrm>
+            <a:off x="7726680" y="2057400"/>
+            <a:ext cx="1325880" cy="1005840"/>
+          </a:xfrm>
+          <a:prstGeom prst="rect">
+            <a:avLst/>
+          </a:prstGeom>
+          <a:solidFill>
+            <a:srgbClr val="FFFFFF"/>
+          </a:solidFill>
+          <a:ln w="19050">
+            <a:solidFill>
+              <a:srgbClr val="000000"/>
+            </a:solidFill>
+            <a:prstDash val="solid"/>
+          </a:ln>
+        </p:spPr>
+      </p:sp>
+      <p:sp>
+        <p:nvSpPr>
+          <p:cNvPr id="29" name="Text 27"/>
+          <p:cNvSpPr/>
+          <p:nvPr/>
+        </p:nvSpPr>
+        <p:spPr>
+          <a:xfrm>
+            <a:off x="7763256" y="2084832"/>
+            <a:ext cx="1252728" cy="411480"/>
+          </a:xfrm>
+          <a:prstGeom prst="rect">
+            <a:avLst/>
+          </a:prstGeom>
+          <a:noFill/>
+          <a:ln/>
+        </p:spPr>
+        <p:txBody>
+          <a:bodyPr wrap="square" rtlCol="0" anchor="ctr"/>
+          <a:lstStyle/>
+          <a:p>
+            <a:pPr algn="ctr" indent="0" marL="0">
+              <a:buNone/>
+            </a:pPr>
+            <a:r>
+              <a:rPr lang="en-US" sz="850" b="1" dirty="0">
+                <a:solidFill>
+                  <a:srgbClr val="000000"/>
+                </a:solidFill>
+              </a:rPr>
               <a:t>WiFi 체크</a:t>
             </a:r>
-            <a:endParaRPr lang="en-US" sz="900" dirty="0"/>
-          </a:p>
-        </p:txBody>
-      </p:sp>
-      <p:sp>
-        <p:nvSpPr>
-          <p:cNvPr id="26" name="Text 24"/>
-          <p:cNvSpPr/>
-          <p:nvPr/>
-        </p:nvSpPr>
-        <p:spPr>
-          <a:xfrm>
-            <a:off x="7452360" y="2496312"/>
-            <a:ext cx="1554480" cy="548640"/>
-          </a:xfrm>
-          <a:prstGeom prst="rect">
-            <a:avLst/>
-          </a:prstGeom>
-          <a:noFill/>
-          <a:ln/>
-        </p:spPr>
-        <p:txBody>
-          <a:bodyPr wrap="square" rtlCol="0" anchor="ctr"/>
-          <a:lstStyle/>
-          <a:p>
-            <a:pPr algn="ctr" indent="0" marL="0">
+            <a:endParaRPr lang="en-US" sz="850" dirty="0"/>
+          </a:p>
+        </p:txBody>
+      </p:sp>
+      <p:sp>
+        <p:nvSpPr>
+          <p:cNvPr id="30" name="Text 28"/>
+          <p:cNvSpPr/>
+          <p:nvPr/>
+        </p:nvSpPr>
+        <p:spPr>
+          <a:xfrm>
+            <a:off x="7763256" y="2496312"/>
+            <a:ext cx="1252728" cy="548640"/>
+          </a:xfrm>
+          <a:prstGeom prst="rect">
+            <a:avLst/>
+          </a:prstGeom>
+          <a:noFill/>
+          <a:ln/>
+        </p:spPr>
+        <p:txBody>
+          <a:bodyPr wrap="square" rtlCol="0" anchor="ctr"/>
+          <a:lstStyle/>
+          <a:p>
+            <a:pPr algn="ctr" indent="0" marL="0">
+              <a:buNone/>
+            </a:pPr>
+            <a:r>
+              <a:rPr lang="en-US" sz="950" dirty="0">
+                <a:solidFill>
+                  <a:srgbClr val="666666"/>
+                </a:solidFill>
+              </a:rPr>
+              <a:t>5 s</a:t>
+            </a:r>
+            <a:endParaRPr lang="en-US" sz="950" dirty="0"/>
+          </a:p>
+          <a:p>
+            <a:pPr algn="ctr" indent="0" marL="0">
+              <a:buNone/>
+            </a:pPr>
+            <a:r>
+              <a:rPr lang="en-US" sz="950" dirty="0">
+                <a:solidFill>
+                  <a:srgbClr val="666666"/>
+                </a:solidFill>
+              </a:rPr>
+              <a:t>WiFiMulti</a:t>
+            </a:r>
+            <a:endParaRPr lang="en-US" sz="950" dirty="0"/>
+          </a:p>
+          <a:p>
+            <a:pPr algn="ctr" indent="0" marL="0">
+              <a:buNone/>
+            </a:pPr>
+            <a:r>
+              <a:rPr lang="en-US" sz="950" dirty="0">
+                <a:solidFill>
+                  <a:srgbClr val="666666"/>
+                </a:solidFill>
+              </a:rPr>
+              <a:t>재접속</a:t>
+            </a:r>
+            <a:endParaRPr lang="en-US" sz="950" dirty="0"/>
+          </a:p>
+        </p:txBody>
+      </p:sp>
+      <p:sp>
+        <p:nvSpPr>
+          <p:cNvPr id="31" name="Shape 29"/>
+          <p:cNvSpPr/>
+          <p:nvPr/>
+        </p:nvSpPr>
+        <p:spPr>
+          <a:xfrm>
+            <a:off x="274320" y="3154680"/>
+            <a:ext cx="8595360" cy="457200"/>
+          </a:xfrm>
+          <a:prstGeom prst="rect">
+            <a:avLst/>
+          </a:prstGeom>
+          <a:solidFill>
+            <a:srgbClr val="FFFFFF"/>
+          </a:solidFill>
+          <a:ln w="12700">
+            <a:solidFill>
+              <a:srgbClr val="000000"/>
+            </a:solidFill>
+            <a:prstDash val="solid"/>
+          </a:ln>
+        </p:spPr>
+      </p:sp>
+      <p:sp>
+        <p:nvSpPr>
+          <p:cNvPr id="32" name="Shape 30"/>
+          <p:cNvSpPr/>
+          <p:nvPr/>
+        </p:nvSpPr>
+        <p:spPr>
+          <a:xfrm>
+            <a:off x="274320" y="3154680"/>
+            <a:ext cx="2560320" cy="457200"/>
+          </a:xfrm>
+          <a:prstGeom prst="rect">
+            <a:avLst/>
+          </a:prstGeom>
+          <a:solidFill>
+            <a:srgbClr val="222222"/>
+          </a:solidFill>
+          <a:ln w="12700">
+            <a:solidFill>
+              <a:srgbClr val="000000"/>
+            </a:solidFill>
+            <a:prstDash val="solid"/>
+          </a:ln>
+        </p:spPr>
+      </p:sp>
+      <p:sp>
+        <p:nvSpPr>
+          <p:cNvPr id="33" name="Text 31"/>
+          <p:cNvSpPr/>
+          <p:nvPr/>
+        </p:nvSpPr>
+        <p:spPr>
+          <a:xfrm>
+            <a:off x="274320" y="3154680"/>
+            <a:ext cx="2560320" cy="457200"/>
+          </a:xfrm>
+          <a:prstGeom prst="rect">
+            <a:avLst/>
+          </a:prstGeom>
+          <a:noFill/>
+          <a:ln/>
+        </p:spPr>
+        <p:txBody>
+          <a:bodyPr wrap="square" rtlCol="0" anchor="ctr"/>
+          <a:lstStyle/>
+          <a:p>
+            <a:pPr algn="ctr" indent="0" marL="0">
+              <a:buNone/>
+            </a:pPr>
+            <a:r>
+              <a:rPr lang="en-US" sz="1200" b="1" dirty="0">
+                <a:solidFill>
+                  <a:srgbClr val="FFFFFF"/>
+                </a:solidFill>
+              </a:rPr>
+              <a:t>날씨 갱신 전략</a:t>
+            </a:r>
+            <a:endParaRPr lang="en-US" sz="1200" dirty="0"/>
+          </a:p>
+        </p:txBody>
+      </p:sp>
+      <p:sp>
+        <p:nvSpPr>
+          <p:cNvPr id="34" name="Text 32"/>
+          <p:cNvSpPr/>
+          <p:nvPr/>
+        </p:nvSpPr>
+        <p:spPr>
+          <a:xfrm>
+            <a:off x="2926080" y="3172968"/>
+            <a:ext cx="5760720" cy="411480"/>
+          </a:xfrm>
+          <a:prstGeom prst="rect">
+            <a:avLst/>
+          </a:prstGeom>
+          <a:noFill/>
+          <a:ln/>
+        </p:spPr>
+        <p:txBody>
+          <a:bodyPr wrap="square" rtlCol="0" anchor="ctr"/>
+          <a:lstStyle/>
+          <a:p>
+            <a:pPr indent="0" marL="0">
               <a:buNone/>
             </a:pPr>
             <a:r>
               <a:rPr lang="en-US" sz="1000" dirty="0">
                 <a:solidFill>
-                  <a:srgbClr val="666666"/>
-                </a:solidFill>
-              </a:rPr>
-              <a:t>5 s</a:t>
+                  <a:srgbClr val="222222"/>
+                </a:solidFill>
+              </a:rPr>
+              <a:t>fetchWeatherWttr() — wValid=false 60초 재시도 / wValid=true 5분 정기 갱신  |  wttr.in HTTPS + 텍스트 포맷 (?format=%t|%C)  |  온도=wttr.in / 습도=DHT11 실내 센서</a:t>
             </a:r>
             <a:endParaRPr lang="en-US" sz="1000" dirty="0"/>
           </a:p>
-          <a:p>
-            <a:pPr algn="ctr" indent="0" marL="0">
-              <a:buNone/>
-            </a:pPr>
-            <a:r>
-              <a:rPr lang="en-US" sz="1000" dirty="0">
-                <a:solidFill>
-                  <a:srgbClr val="666666"/>
-                </a:solidFill>
-              </a:rPr>
-              <a:t>WiFiMulti</a:t>
-            </a:r>
-            <a:endParaRPr lang="en-US" sz="1000" dirty="0"/>
-          </a:p>
-          <a:p>
-            <a:pPr algn="ctr" indent="0" marL="0">
-              <a:buNone/>
-            </a:pPr>
-            <a:r>
-              <a:rPr lang="en-US" sz="1000" dirty="0">
-                <a:solidFill>
-                  <a:srgbClr val="666666"/>
-                </a:solidFill>
-              </a:rPr>
-              <a:t>재접속</a:t>
-            </a:r>
-            <a:endParaRPr lang="en-US" sz="1000" dirty="0"/>
-          </a:p>
-        </p:txBody>
-      </p:sp>
-      <p:sp>
-        <p:nvSpPr>
-          <p:cNvPr id="27" name="Shape 25"/>
-          <p:cNvSpPr/>
-          <p:nvPr/>
-        </p:nvSpPr>
-        <p:spPr>
-          <a:xfrm>
-            <a:off x="274320" y="3291840"/>
-            <a:ext cx="8595360" cy="1600200"/>
+        </p:txBody>
+      </p:sp>
+      <p:sp>
+        <p:nvSpPr>
+          <p:cNvPr id="35" name="Shape 33"/>
+          <p:cNvSpPr/>
+          <p:nvPr/>
+        </p:nvSpPr>
+        <p:spPr>
+          <a:xfrm>
+            <a:off x="274320" y="3703320"/>
+            <a:ext cx="8595360" cy="1371600"/>
           </a:xfrm>
           <a:prstGeom prst="rect">
             <a:avLst/>
@@ -7402,14 +7658,14 @@
       </p:sp>
       <p:sp>
         <p:nvSpPr>
-          <p:cNvPr id="28" name="Shape 26"/>
-          <p:cNvSpPr/>
-          <p:nvPr/>
-        </p:nvSpPr>
-        <p:spPr>
-          <a:xfrm>
-            <a:off x="274320" y="3291840"/>
-            <a:ext cx="8595360" cy="384048"/>
+          <p:cNvPr id="36" name="Shape 34"/>
+          <p:cNvSpPr/>
+          <p:nvPr/>
+        </p:nvSpPr>
+        <p:spPr>
+          <a:xfrm>
+            <a:off x="274320" y="3703320"/>
+            <a:ext cx="8595360" cy="347472"/>
           </a:xfrm>
           <a:prstGeom prst="rect">
             <a:avLst/>
@@ -7427,50 +7683,50 @@
       </p:sp>
       <p:sp>
         <p:nvSpPr>
-          <p:cNvPr id="29" name="Text 27"/>
-          <p:cNvSpPr/>
-          <p:nvPr/>
-        </p:nvSpPr>
-        <p:spPr>
-          <a:xfrm>
-            <a:off x="274320" y="3291840"/>
-            <a:ext cx="8595360" cy="384048"/>
-          </a:xfrm>
-          <a:prstGeom prst="rect">
-            <a:avLst/>
-          </a:prstGeom>
-          <a:noFill/>
-          <a:ln/>
-        </p:spPr>
-        <p:txBody>
-          <a:bodyPr wrap="square" rtlCol="0" anchor="ctr"/>
-          <a:lstStyle/>
-          <a:p>
-            <a:pPr algn="ctr" indent="0" marL="0">
-              <a:buNone/>
-            </a:pPr>
-            <a:r>
-              <a:rPr lang="en-US" sz="1300" b="1" dirty="0">
+          <p:cNvPr id="37" name="Text 35"/>
+          <p:cNvSpPr/>
+          <p:nvPr/>
+        </p:nvSpPr>
+        <p:spPr>
+          <a:xfrm>
+            <a:off x="274320" y="3703320"/>
+            <a:ext cx="8595360" cy="347472"/>
+          </a:xfrm>
+          <a:prstGeom prst="rect">
+            <a:avLst/>
+          </a:prstGeom>
+          <a:noFill/>
+          <a:ln/>
+        </p:spPr>
+        <p:txBody>
+          <a:bodyPr wrap="square" rtlCol="0" anchor="ctr"/>
+          <a:lstStyle/>
+          <a:p>
+            <a:pPr algn="ctr" indent="0" marL="0">
+              <a:buNone/>
+            </a:pPr>
+            <a:r>
+              <a:rPr lang="en-US" sz="1200" b="1" dirty="0">
                 <a:solidFill>
                   <a:srgbClr val="FFFFFF"/>
                 </a:solidFill>
               </a:rPr>
               <a:t>drawFrame()  내부 분기 흐름</a:t>
             </a:r>
-            <a:endParaRPr lang="en-US" sz="1300" dirty="0"/>
-          </a:p>
-        </p:txBody>
-      </p:sp>
-      <p:sp>
-        <p:nvSpPr>
-          <p:cNvPr id="30" name="Text 28"/>
-          <p:cNvSpPr/>
-          <p:nvPr/>
-        </p:nvSpPr>
-        <p:spPr>
-          <a:xfrm>
-            <a:off x="457200" y="3703320"/>
-            <a:ext cx="2377440" cy="274320"/>
+            <a:endParaRPr lang="en-US" sz="1200" dirty="0"/>
+          </a:p>
+        </p:txBody>
+      </p:sp>
+      <p:sp>
+        <p:nvSpPr>
+          <p:cNvPr id="38" name="Text 36"/>
+          <p:cNvSpPr/>
+          <p:nvPr/>
+        </p:nvSpPr>
+        <p:spPr>
+          <a:xfrm>
+            <a:off x="457200" y="4087368"/>
+            <a:ext cx="2377440" cy="219456"/>
           </a:xfrm>
           <a:prstGeom prst="rect">
             <a:avLst/>
@@ -7486,27 +7742,27 @@
               <a:buNone/>
             </a:pPr>
             <a:r>
-              <a:rPr lang="en-US" sz="1100" b="1" dirty="0">
+              <a:rPr lang="en-US" sz="1050" b="1" dirty="0">
                 <a:solidFill>
                   <a:srgbClr val="000000"/>
                 </a:solidFill>
               </a:rPr>
               <a:t>▶ WiFi 미접속?</a:t>
             </a:r>
-            <a:endParaRPr lang="en-US" sz="1100" dirty="0"/>
-          </a:p>
-        </p:txBody>
-      </p:sp>
-      <p:sp>
-        <p:nvSpPr>
-          <p:cNvPr id="31" name="Text 29"/>
-          <p:cNvSpPr/>
-          <p:nvPr/>
-        </p:nvSpPr>
-        <p:spPr>
-          <a:xfrm>
-            <a:off x="2834640" y="3703320"/>
-            <a:ext cx="5852160" cy="274320"/>
+            <a:endParaRPr lang="en-US" sz="1050" dirty="0"/>
+          </a:p>
+        </p:txBody>
+      </p:sp>
+      <p:sp>
+        <p:nvSpPr>
+          <p:cNvPr id="39" name="Text 37"/>
+          <p:cNvSpPr/>
+          <p:nvPr/>
+        </p:nvSpPr>
+        <p:spPr>
+          <a:xfrm>
+            <a:off x="2834640" y="4087368"/>
+            <a:ext cx="5852160" cy="219456"/>
           </a:xfrm>
           <a:prstGeom prst="rect">
             <a:avLst/>
@@ -7522,27 +7778,27 @@
               <a:buNone/>
             </a:pPr>
             <a:r>
-              <a:rPr lang="en-US" sz="1100" dirty="0">
+              <a:rPr lang="en-US" sz="1050" dirty="0">
                 <a:solidFill>
                   <a:srgbClr val="222222"/>
                 </a:solidFill>
               </a:rPr>
               <a:t>→  'WiFi ?' 적색 1Hz 깜빡임 → return</a:t>
             </a:r>
-            <a:endParaRPr lang="en-US" sz="1100" dirty="0"/>
-          </a:p>
-        </p:txBody>
-      </p:sp>
-      <p:sp>
-        <p:nvSpPr>
-          <p:cNvPr id="32" name="Text 30"/>
-          <p:cNvSpPr/>
-          <p:nvPr/>
-        </p:nvSpPr>
-        <p:spPr>
-          <a:xfrm>
-            <a:off x="457200" y="3968496"/>
-            <a:ext cx="2377440" cy="274320"/>
+            <a:endParaRPr lang="en-US" sz="1050" dirty="0"/>
+          </a:p>
+        </p:txBody>
+      </p:sp>
+      <p:sp>
+        <p:nvSpPr>
+          <p:cNvPr id="40" name="Text 38"/>
+          <p:cNvSpPr/>
+          <p:nvPr/>
+        </p:nvSpPr>
+        <p:spPr>
+          <a:xfrm>
+            <a:off x="457200" y="4288536"/>
+            <a:ext cx="2377440" cy="219456"/>
           </a:xfrm>
           <a:prstGeom prst="rect">
             <a:avLst/>
@@ -7558,27 +7814,27 @@
               <a:buNone/>
             </a:pPr>
             <a:r>
-              <a:rPr lang="en-US" sz="1100" b="1" dirty="0">
+              <a:rPr lang="en-US" sz="1050" b="1" dirty="0">
                 <a:solidFill>
                   <a:srgbClr val="000000"/>
                 </a:solidFill>
               </a:rPr>
               <a:t>▶ 야간 모드?</a:t>
             </a:r>
-            <a:endParaRPr lang="en-US" sz="1100" dirty="0"/>
-          </a:p>
-        </p:txBody>
-      </p:sp>
-      <p:sp>
-        <p:nvSpPr>
-          <p:cNvPr id="33" name="Text 31"/>
-          <p:cNvSpPr/>
-          <p:nvPr/>
-        </p:nvSpPr>
-        <p:spPr>
-          <a:xfrm>
-            <a:off x="2834640" y="3968496"/>
-            <a:ext cx="5852160" cy="274320"/>
+            <a:endParaRPr lang="en-US" sz="1050" dirty="0"/>
+          </a:p>
+        </p:txBody>
+      </p:sp>
+      <p:sp>
+        <p:nvSpPr>
+          <p:cNvPr id="41" name="Text 39"/>
+          <p:cNvSpPr/>
+          <p:nvPr/>
+        </p:nvSpPr>
+        <p:spPr>
+          <a:xfrm>
+            <a:off x="2834640" y="4288536"/>
+            <a:ext cx="5852160" cy="219456"/>
           </a:xfrm>
           <a:prstGeom prst="rect">
             <a:avLst/>
@@ -7594,27 +7850,27 @@
               <a:buNone/>
             </a:pPr>
             <a:r>
-              <a:rPr lang="en-US" sz="1100" dirty="0">
+              <a:rPr lang="en-US" sz="1050" dirty="0">
                 <a:solidFill>
                   <a:srgbClr val="222222"/>
                 </a:solidFill>
               </a:rPr>
               <a:t>→  CDS raw &gt; 960 → 시계만 + 밝기 1~4 비례 (스크롤 생략)</a:t>
             </a:r>
-            <a:endParaRPr lang="en-US" sz="1100" dirty="0"/>
-          </a:p>
-        </p:txBody>
-      </p:sp>
-      <p:sp>
-        <p:nvSpPr>
-          <p:cNvPr id="34" name="Text 32"/>
-          <p:cNvSpPr/>
-          <p:nvPr/>
-        </p:nvSpPr>
-        <p:spPr>
-          <a:xfrm>
-            <a:off x="457200" y="4233672"/>
-            <a:ext cx="2377440" cy="274320"/>
+            <a:endParaRPr lang="en-US" sz="1050" dirty="0"/>
+          </a:p>
+        </p:txBody>
+      </p:sp>
+      <p:sp>
+        <p:nvSpPr>
+          <p:cNvPr id="42" name="Text 40"/>
+          <p:cNvSpPr/>
+          <p:nvPr/>
+        </p:nvSpPr>
+        <p:spPr>
+          <a:xfrm>
+            <a:off x="457200" y="4489704"/>
+            <a:ext cx="2377440" cy="219456"/>
           </a:xfrm>
           <a:prstGeom prst="rect">
             <a:avLst/>
@@ -7630,27 +7886,27 @@
               <a:buNone/>
             </a:pPr>
             <a:r>
-              <a:rPr lang="en-US" sz="1100" b="1" dirty="0">
+              <a:rPr lang="en-US" sz="1050" b="1" dirty="0">
                 <a:solidFill>
                   <a:srgbClr val="000000"/>
                 </a:solidFill>
               </a:rPr>
               <a:t>▶ phase &lt; 15s?</a:t>
             </a:r>
-            <a:endParaRPr lang="en-US" sz="1100" dirty="0"/>
-          </a:p>
-        </p:txBody>
-      </p:sp>
-      <p:sp>
-        <p:nvSpPr>
-          <p:cNvPr id="35" name="Text 33"/>
-          <p:cNvSpPr/>
-          <p:nvPr/>
-        </p:nvSpPr>
-        <p:spPr>
-          <a:xfrm>
-            <a:off x="2834640" y="4233672"/>
-            <a:ext cx="5852160" cy="274320"/>
+            <a:endParaRPr lang="en-US" sz="1050" dirty="0"/>
+          </a:p>
+        </p:txBody>
+      </p:sp>
+      <p:sp>
+        <p:nvSpPr>
+          <p:cNvPr id="43" name="Text 41"/>
+          <p:cNvSpPr/>
+          <p:nvPr/>
+        </p:nvSpPr>
+        <p:spPr>
+          <a:xfrm>
+            <a:off x="2834640" y="4489704"/>
+            <a:ext cx="5852160" cy="219456"/>
           </a:xfrm>
           <a:prstGeom prst="rect">
             <a:avLst/>
@@ -7666,27 +7922,27 @@
               <a:buNone/>
             </a:pPr>
             <a:r>
-              <a:rPr lang="en-US" sz="1100" dirty="0">
+              <a:rPr lang="en-US" sz="1050" dirty="0">
                 <a:solidFill>
                   <a:srgbClr val="222222"/>
                 </a:solidFill>
               </a:rPr>
               <a:t>→  시계 표시  HH:MM  (커스텀 폰트, 콜론 4점 회전)</a:t>
             </a:r>
-            <a:endParaRPr lang="en-US" sz="1100" dirty="0"/>
-          </a:p>
-        </p:txBody>
-      </p:sp>
-      <p:sp>
-        <p:nvSpPr>
-          <p:cNvPr id="36" name="Text 34"/>
-          <p:cNvSpPr/>
-          <p:nvPr/>
-        </p:nvSpPr>
-        <p:spPr>
-          <a:xfrm>
-            <a:off x="457200" y="4498848"/>
-            <a:ext cx="2377440" cy="274320"/>
+            <a:endParaRPr lang="en-US" sz="1050" dirty="0"/>
+          </a:p>
+        </p:txBody>
+      </p:sp>
+      <p:sp>
+        <p:nvSpPr>
+          <p:cNvPr id="44" name="Text 42"/>
+          <p:cNvSpPr/>
+          <p:nvPr/>
+        </p:nvSpPr>
+        <p:spPr>
+          <a:xfrm>
+            <a:off x="457200" y="4690872"/>
+            <a:ext cx="2377440" cy="219456"/>
           </a:xfrm>
           <a:prstGeom prst="rect">
             <a:avLst/>
@@ -7702,27 +7958,27 @@
               <a:buNone/>
             </a:pPr>
             <a:r>
-              <a:rPr lang="en-US" sz="1100" b="1" dirty="0">
+              <a:rPr lang="en-US" sz="1050" b="1" dirty="0">
                 <a:solidFill>
                   <a:srgbClr val="000000"/>
                 </a:solidFill>
               </a:rPr>
               <a:t>▶ phase &gt;= 15s?</a:t>
             </a:r>
-            <a:endParaRPr lang="en-US" sz="1100" dirty="0"/>
-          </a:p>
-        </p:txBody>
-      </p:sp>
-      <p:sp>
-        <p:nvSpPr>
-          <p:cNvPr id="37" name="Text 35"/>
-          <p:cNvSpPr/>
-          <p:nvPr/>
-        </p:nvSpPr>
-        <p:spPr>
-          <a:xfrm>
-            <a:off x="2834640" y="4498848"/>
-            <a:ext cx="5852160" cy="274320"/>
+            <a:endParaRPr lang="en-US" sz="1050" dirty="0"/>
+          </a:p>
+        </p:txBody>
+      </p:sp>
+      <p:sp>
+        <p:nvSpPr>
+          <p:cNvPr id="45" name="Text 43"/>
+          <p:cNvSpPr/>
+          <p:nvPr/>
+        </p:nvSpPr>
+        <p:spPr>
+          <a:xfrm>
+            <a:off x="2834640" y="4690872"/>
+            <a:ext cx="5852160" cy="219456"/>
           </a:xfrm>
           <a:prstGeom prst="rect">
             <a:avLst/>
@@ -7738,27 +7994,27 @@
               <a:buNone/>
             </a:pPr>
             <a:r>
-              <a:rPr lang="en-US" sz="1100" dirty="0">
+              <a:rPr lang="en-US" sz="1050" dirty="0">
                 <a:solidFill>
                   <a:srgbClr val="222222"/>
                 </a:solidFill>
               </a:rPr>
               <a:t>→  날짜→기온+습도→날씨+아이콘 통합 스크롤</a:t>
             </a:r>
-            <a:endParaRPr lang="en-US" sz="1100" dirty="0"/>
-          </a:p>
-        </p:txBody>
-      </p:sp>
-      <p:sp>
-        <p:nvSpPr>
-          <p:cNvPr id="38" name="Text 36"/>
-          <p:cNvSpPr/>
-          <p:nvPr/>
-        </p:nvSpPr>
-        <p:spPr>
-          <a:xfrm>
-            <a:off x="457200" y="4764024"/>
-            <a:ext cx="2377440" cy="274320"/>
+            <a:endParaRPr lang="en-US" sz="1050" dirty="0"/>
+          </a:p>
+        </p:txBody>
+      </p:sp>
+      <p:sp>
+        <p:nvSpPr>
+          <p:cNvPr id="46" name="Text 44"/>
+          <p:cNvSpPr/>
+          <p:nvPr/>
+        </p:nvSpPr>
+        <p:spPr>
+          <a:xfrm>
+            <a:off x="457200" y="4892040"/>
+            <a:ext cx="2377440" cy="219456"/>
           </a:xfrm>
           <a:prstGeom prst="rect">
             <a:avLst/>
@@ -7774,27 +8030,27 @@
               <a:buNone/>
             </a:pPr>
             <a:r>
-              <a:rPr lang="en-US" sz="1100" b="1" dirty="0">
+              <a:rPr lang="en-US" sz="1050" b="1" dirty="0">
                 <a:solidFill>
                   <a:srgbClr val="000000"/>
                 </a:solidFill>
               </a:rPr>
               <a:t>▶ 스크롤 완료?</a:t>
             </a:r>
-            <a:endParaRPr lang="en-US" sz="1100" dirty="0"/>
-          </a:p>
-        </p:txBody>
-      </p:sp>
-      <p:sp>
-        <p:nvSpPr>
-          <p:cNvPr id="39" name="Text 37"/>
-          <p:cNvSpPr/>
-          <p:nvPr/>
-        </p:nvSpPr>
-        <p:spPr>
-          <a:xfrm>
-            <a:off x="2834640" y="4764024"/>
-            <a:ext cx="5852160" cy="274320"/>
+            <a:endParaRPr lang="en-US" sz="1050" dirty="0"/>
+          </a:p>
+        </p:txBody>
+      </p:sp>
+      <p:sp>
+        <p:nvSpPr>
+          <p:cNvPr id="47" name="Text 45"/>
+          <p:cNvSpPr/>
+          <p:nvPr/>
+        </p:nvSpPr>
+        <p:spPr>
+          <a:xfrm>
+            <a:off x="2834640" y="4892040"/>
+            <a:ext cx="5852160" cy="219456"/>
           </a:xfrm>
           <a:prstGeom prst="rect">
             <a:avLst/>
@@ -7810,14 +8066,14 @@
               <a:buNone/>
             </a:pPr>
             <a:r>
-              <a:rPr lang="en-US" sz="1100" dirty="0">
+              <a:rPr lang="en-US" sz="1050" dirty="0">
                 <a:solidFill>
                   <a:srgbClr val="222222"/>
                 </a:solidFill>
               </a:rPr>
               <a:t>→  즉시 시계로 전환 (scrollDone 플래그)</a:t>
             </a:r>
-            <a:endParaRPr lang="en-US" sz="1100" dirty="0"/>
+            <a:endParaRPr lang="en-US" sz="1050" dirty="0"/>
           </a:p>
         </p:txBody>
       </p:sp>
@@ -7879,7 +8135,7 @@
                 <a:ea typeface="Arial Black" pitchFamily="34" charset="-122"/>
                 <a:cs typeface="Arial Black" pitchFamily="34" charset="-120"/>
               </a:rPr>
-              <a:t>날씨 정보 수신 경로  (기상청 API Hub)</a:t>
+              <a:t>날씨 정보 수신 경로  (wttr.in)</a:t>
             </a:r>
             <a:endParaRPr lang="en-US" sz="3000" dirty="0"/>
           </a:p>
@@ -8150,7 +8406,7 @@
                   <a:srgbClr val="666666"/>
                 </a:solidFill>
               </a:rPr>
-              <a:t>위도 / 경도</a:t>
+              <a:t>(Seoul 등)</a:t>
             </a:r>
             <a:endParaRPr lang="en-US" sz="1100" dirty="0"/>
           </a:p>
@@ -8235,7 +8491,7 @@
                   <a:srgbClr val="000000"/>
                 </a:solidFill>
               </a:rPr>
-              <a:t>apihub.kma</a:t>
+              <a:t>wttr.in</a:t>
             </a:r>
             <a:endParaRPr lang="en-US" sz="1200" dirty="0"/>
           </a:p>
@@ -8249,7 +8505,7 @@
                   <a:srgbClr val="000000"/>
                 </a:solidFill>
               </a:rPr>
-              <a:t>.go.kr</a:t>
+              <a:t>(HTTPS)</a:t>
             </a:r>
             <a:endParaRPr lang="en-US" sz="1200" dirty="0"/>
           </a:p>
@@ -8285,7 +8541,7 @@
                   <a:srgbClr val="666666"/>
                 </a:solidFill>
               </a:rPr>
-              <a:t>ta / hm / ww</a:t>
+              <a:t>기온 + 날씨 설명</a:t>
             </a:r>
             <a:endParaRPr lang="en-US" sz="1100" dirty="0"/>
           </a:p>
@@ -8299,7 +8555,7 @@
                   <a:srgbClr val="666666"/>
                 </a:solidFill>
               </a:rPr>
-              <a:t>(순차 3회)</a:t>
+              <a:t>텍스트 포맷</a:t>
             </a:r>
             <a:endParaRPr lang="en-US" sz="1100" dirty="0"/>
           </a:p>
@@ -8384,7 +8640,7 @@
                   <a:srgbClr val="000000"/>
                 </a:solidFill>
               </a:rPr>
-              <a:t>ww 코드 변환</a:t>
+              <a:t>descToCondition()</a:t>
             </a:r>
             <a:endParaRPr lang="en-US" sz="1200" dirty="0"/>
           </a:p>
@@ -8420,7 +8676,7 @@
                   <a:srgbClr val="666666"/>
                 </a:solidFill>
               </a:rPr>
-              <a:t>WMO 코드</a:t>
+              <a:t>영문 설명</a:t>
             </a:r>
             <a:endParaRPr lang="en-US" sz="1100" dirty="0"/>
           </a:p>
@@ -8434,7 +8690,7 @@
                   <a:srgbClr val="666666"/>
                 </a:solidFill>
               </a:rPr>
-              <a:t>→ 조건 문자열</a:t>
+              <a:t>→ 조건 매핑</a:t>
             </a:r>
             <a:endParaRPr lang="en-US" sz="1100" dirty="0"/>
           </a:p>
@@ -8633,7 +8889,7 @@
                 <a:ea typeface="Consolas" pitchFamily="34" charset="-122"/>
                 <a:cs typeface="Consolas" pitchFamily="34" charset="-120"/>
               </a:rPr>
-              <a:t>ww 0~2  : Sunny (맑음)</a:t>
+              <a:t>partly cloudy  → PCloud</a:t>
             </a:r>
             <a:endParaRPr lang="en-US" sz="900" dirty="0"/>
           </a:p>
@@ -8672,7 +8928,7 @@
                 <a:ea typeface="Consolas" pitchFamily="34" charset="-122"/>
                 <a:cs typeface="Consolas" pitchFamily="34" charset="-120"/>
               </a:rPr>
-              <a:t>ww 3~9  : Cloud (구름)</a:t>
+              <a:t>rain/drizzle   → Rain</a:t>
             </a:r>
             <a:endParaRPr lang="en-US" sz="900" dirty="0"/>
           </a:p>
@@ -8711,7 +8967,7 @@
                 <a:ea typeface="Consolas" pitchFamily="34" charset="-122"/>
                 <a:cs typeface="Consolas" pitchFamily="34" charset="-120"/>
               </a:rPr>
-              <a:t>ww 40~49: Fog   (안개)</a:t>
+              <a:t>snow/sleet     → Snow</a:t>
             </a:r>
             <a:endParaRPr lang="en-US" sz="900" dirty="0"/>
           </a:p>
@@ -8750,7 +9006,7 @@
                 <a:ea typeface="Consolas" pitchFamily="34" charset="-122"/>
                 <a:cs typeface="Consolas" pitchFamily="34" charset="-120"/>
               </a:rPr>
-              <a:t>ww 50~69: Rain  (비)</a:t>
+              <a:t>fog/mist/haze  → Fog</a:t>
             </a:r>
             <a:endParaRPr lang="en-US" sz="900" dirty="0"/>
           </a:p>
@@ -8789,7 +9045,7 @@
                 <a:ea typeface="Consolas" pitchFamily="34" charset="-122"/>
                 <a:cs typeface="Consolas" pitchFamily="34" charset="-120"/>
               </a:rPr>
-              <a:t>ww 70~79: Snow  (눈)</a:t>
+              <a:t>thunder/storm  → Storm</a:t>
             </a:r>
             <a:endParaRPr lang="en-US" sz="900" dirty="0"/>
           </a:p>
@@ -8828,7 +9084,7 @@
                 <a:ea typeface="Consolas" pitchFamily="34" charset="-122"/>
                 <a:cs typeface="Consolas" pitchFamily="34" charset="-120"/>
               </a:rPr>
-              <a:t>ww 95~99: Storm (뇌우)</a:t>
+              <a:t>sunny/clear    → Sunny</a:t>
             </a:r>
             <a:endParaRPr lang="en-US" sz="900" dirty="0"/>
           </a:p>
@@ -8914,7 +9170,7 @@
                   <a:srgbClr val="FFFFFF"/>
                 </a:solidFill>
               </a:rPr>
-              <a:t>HTTPS 보안</a:t>
+              <a:t>HTTPS 방식</a:t>
             </a:r>
             <a:endParaRPr lang="en-US" sz="1200" dirty="0"/>
           </a:p>
@@ -8950,7 +9206,7 @@
                   <a:srgbClr val="222222"/>
                 </a:solidFill>
               </a:rPr>
-              <a:t>WiFiClientSecure + setInsecure()</a:t>
+              <a:t>WiFiClientSecure</a:t>
             </a:r>
             <a:endParaRPr lang="en-US" sz="1100" dirty="0"/>
           </a:p>
@@ -8964,7 +9220,35 @@
                   <a:srgbClr val="222222"/>
                 </a:solidFill>
               </a:rPr>
-              <a:t>BearSSL RX 1024 / TX 512 bytes</a:t>
+              <a:t>+ setInsecure()</a:t>
+            </a:r>
+            <a:endParaRPr lang="en-US" sz="1100" dirty="0"/>
+          </a:p>
+          <a:p>
+            <a:pPr indent="0" marL="0">
+              <a:buNone/>
+            </a:pPr>
+            <a:r>
+              <a:rPr lang="en-US" sz="1100" dirty="0">
+                <a:solidFill>
+                  <a:srgbClr val="222222"/>
+                </a:solidFill>
+              </a:rPr>
+              <a:t>Cloudflare MFLN</a:t>
+            </a:r>
+            <a:endParaRPr lang="en-US" sz="1100" dirty="0"/>
+          </a:p>
+          <a:p>
+            <a:pPr indent="0" marL="0">
+              <a:buNone/>
+            </a:pPr>
+            <a:r>
+              <a:rPr lang="en-US" sz="1100" dirty="0">
+                <a:solidFill>
+                  <a:srgbClr val="222222"/>
+                </a:solidFill>
+              </a:rPr>
+              <a:t>→ 4096 RX 버퍼</a:t>
             </a:r>
             <a:endParaRPr lang="en-US" sz="1100" dirty="0"/>
           </a:p>
@@ -9050,7 +9334,7 @@
                   <a:srgbClr val="FFFFFF"/>
                 </a:solidFill>
               </a:rPr>
-              <a:t>관측 요소</a:t>
+              <a:t>텍스트 포맷</a:t>
             </a:r>
             <a:endParaRPr lang="en-US" sz="1200" dirty="0"/>
           </a:p>
@@ -9086,7 +9370,7 @@
                   <a:srgbClr val="222222"/>
                 </a:solidFill>
               </a:rPr>
-              <a:t>ta: 기온(°C)</a:t>
+              <a:t>?format=%t|%C</a:t>
             </a:r>
             <a:endParaRPr lang="en-US" sz="1100" dirty="0"/>
           </a:p>
@@ -9100,7 +9384,7 @@
                   <a:srgbClr val="222222"/>
                 </a:solidFill>
               </a:rPr>
-              <a:t>hm: 습도(%)</a:t>
+              <a:t>응답 ~30 bytes</a:t>
             </a:r>
             <a:endParaRPr lang="en-US" sz="1100" dirty="0"/>
           </a:p>
@@ -9114,7 +9398,21 @@
                   <a:srgbClr val="222222"/>
                 </a:solidFill>
               </a:rPr>
-              <a:t>ww: 현천코드(WMO)</a:t>
+              <a:t>→ split '|'</a:t>
+            </a:r>
+            <a:endParaRPr lang="en-US" sz="1100" dirty="0"/>
+          </a:p>
+          <a:p>
+            <a:pPr indent="0" marL="0">
+              <a:buNone/>
+            </a:pPr>
+            <a:r>
+              <a:rPr lang="en-US" sz="1100" dirty="0">
+                <a:solidFill>
+                  <a:srgbClr val="222222"/>
+                </a:solidFill>
+              </a:rPr>
+              <a:t>JSON 파싱 없음</a:t>
             </a:r>
             <a:endParaRPr lang="en-US" sz="1100" dirty="0"/>
           </a:p>
@@ -9200,7 +9498,7 @@
                   <a:srgbClr val="FFFFFF"/>
                 </a:solidFill>
               </a:rPr>
-              <a:t>갱신 주기</a:t>
+              <a:t>갱신 전략</a:t>
             </a:r>
             <a:endParaRPr lang="en-US" sz="1200" dirty="0"/>
           </a:p>
@@ -9236,7 +9534,7 @@
                   <a:srgbClr val="222222"/>
                 </a:solidFill>
               </a:rPr>
-              <a:t>1분 (3회 순차 요청)</a:t>
+              <a:t>wValid=false:</a:t>
             </a:r>
             <a:endParaRPr lang="en-US" sz="1100" dirty="0"/>
           </a:p>
@@ -9250,7 +9548,35 @@
                   <a:srgbClr val="222222"/>
                 </a:solidFill>
               </a:rPr>
-              <a:t>결측(-9999) 시 이전값 유지</a:t>
+              <a:t>60초 재시도</a:t>
+            </a:r>
+            <a:endParaRPr lang="en-US" sz="1100" dirty="0"/>
+          </a:p>
+          <a:p>
+            <a:pPr indent="0" marL="0">
+              <a:buNone/>
+            </a:pPr>
+            <a:r>
+              <a:rPr lang="en-US" sz="1100" dirty="0">
+                <a:solidFill>
+                  <a:srgbClr val="222222"/>
+                </a:solidFill>
+              </a:rPr>
+              <a:t>wValid=true:</a:t>
+            </a:r>
+            <a:endParaRPr lang="en-US" sz="1100" dirty="0"/>
+          </a:p>
+          <a:p>
+            <a:pPr indent="0" marL="0">
+              <a:buNone/>
+            </a:pPr>
+            <a:r>
+              <a:rPr lang="en-US" sz="1100" dirty="0">
+                <a:solidFill>
+                  <a:srgbClr val="222222"/>
+                </a:solidFill>
+              </a:rPr>
+              <a:t>5분 정기 갱신</a:t>
             </a:r>
             <a:endParaRPr lang="en-US" sz="1100" dirty="0"/>
           </a:p>
@@ -9336,7 +9662,7 @@
                   <a:srgbClr val="FFFFFF"/>
                 </a:solidFill>
               </a:rPr>
-              <a:t>위치 정밀도</a:t>
+              <a:t>온습도 분리</a:t>
             </a:r>
             <a:endParaRPr lang="en-US" sz="1200" dirty="0"/>
           </a:p>
@@ -9372,7 +9698,7 @@
                   <a:srgbClr val="222222"/>
                 </a:solidFill>
               </a:rPr>
-              <a:t>IP → 위도/경도 직접 활용</a:t>
+              <a:t>온도:</a:t>
             </a:r>
             <a:endParaRPr lang="en-US" sz="1100" dirty="0"/>
           </a:p>
@@ -9386,7 +9712,35 @@
                   <a:srgbClr val="222222"/>
                 </a:solidFill>
               </a:rPr>
-              <a:t>기상청 격자 변환 불필요</a:t>
+              <a:t>wttr.in 외부값</a:t>
+            </a:r>
+            <a:endParaRPr lang="en-US" sz="1100" dirty="0"/>
+          </a:p>
+          <a:p>
+            <a:pPr indent="0" marL="0">
+              <a:buNone/>
+            </a:pPr>
+            <a:r>
+              <a:rPr lang="en-US" sz="1100" dirty="0">
+                <a:solidFill>
+                  <a:srgbClr val="222222"/>
+                </a:solidFill>
+              </a:rPr>
+              <a:t>습도:</a:t>
+            </a:r>
+            <a:endParaRPr lang="en-US" sz="1100" dirty="0"/>
+          </a:p>
+          <a:p>
+            <a:pPr indent="0" marL="0">
+              <a:buNone/>
+            </a:pPr>
+            <a:r>
+              <a:rPr lang="en-US" sz="1100" dirty="0">
+                <a:solidFill>
+                  <a:srgbClr val="222222"/>
+                </a:solidFill>
+              </a:rPr>
+              <a:t>DHT11 실내 센서</a:t>
             </a:r>
             <a:endParaRPr lang="en-US" sz="1100" dirty="0"/>
           </a:p>

--- a/IoT_WallClock_설명.pptx
+++ b/IoT_WallClock_설명.pptx
@@ -12,6 +12,8 @@
     <p:sldId id="260" r:id="rId6"/>
     <p:sldId id="261" r:id="rId7"/>
     <p:sldId id="262" r:id="rId8"/>
+    <p:sldId id="263" r:id="rId14"/>
+    <p:sldId id="264" r:id="rId15"/>
   </p:sldIdLst>
   <p:notesMasterIdLst>
     <p:notesMasterId r:id="rId9"/>
@@ -9743,6 +9745,5020 @@
               <a:t>DHT11 실내 센서</a:t>
             </a:r>
             <a:endParaRPr lang="en-US" sz="1100" dirty="0"/>
+          </a:p>
+        </p:txBody>
+      </p:sp>
+    </p:spTree>
+  </p:cSld>
+  <p:clrMapOvr>
+    <a:masterClrMapping/>
+  </p:clrMapOvr>
+</p:sld>
+</file>
+
+<file path=ppt/slides/slide8.xml><?xml version="1.0" encoding="utf-8"?>
+<p:sld xmlns:a="http://schemas.openxmlformats.org/drawingml/2006/main" xmlns:p="http://schemas.openxmlformats.org/presentationml/2006/main" xmlns:r="http://schemas.openxmlformats.org/officeDocument/2006/relationships">
+  <p:cSld>
+    <p:spTree>
+      <p:nvGrpSpPr>
+        <p:cNvPr id="1" name=""/>
+        <p:cNvGrpSpPr/>
+        <p:nvPr/>
+      </p:nvGrpSpPr>
+      <p:grpSpPr/>
+      <p:sp>
+        <p:nvSpPr>
+          <p:cNvPr id="2" name="TextBox 1"/>
+          <p:cNvSpPr txBox="1"/>
+          <p:nvPr/>
+        </p:nvSpPr>
+        <p:spPr>
+          <a:xfrm>
+            <a:off x="365760" y="228600"/>
+            <a:ext cx="8412480" cy="502920"/>
+          </a:xfrm>
+          <a:prstGeom prst="rect">
+            <a:avLst/>
+          </a:prstGeom>
+          <a:noFill/>
+        </p:spPr>
+        <p:txBody>
+          <a:bodyPr wrap="square" anchor="t" lIns="0" rIns="0" tIns="0" bIns="0">
+            <a:spAutoFit/>
+          </a:bodyPr>
+          <a:lstStyle/>
+          <a:p>
+            <a:pPr algn="l"/>
+            <a:r>
+              <a:rPr sz="2400" b="1">
+                <a:solidFill>
+                  <a:srgbClr val="000000"/>
+                </a:solidFill>
+                <a:latin typeface="맑은 고딕"/>
+              </a:rPr>
+              <a:t>폰트 시스템 업그레이드 (5×7 → 5×8 풀-스케일)</a:t>
+            </a:r>
+          </a:p>
+        </p:txBody>
+      </p:sp>
+      <p:cxnSp>
+        <p:nvCxnSpPr>
+          <p:cNvPr id="3" name="Connector 2"/>
+          <p:cNvCxnSpPr/>
+          <p:nvPr/>
+        </p:nvCxnSpPr>
+        <p:spPr>
+          <a:xfrm>
+            <a:off x="365760" y="749808"/>
+            <a:ext cx="8412480" cy="0"/>
+          </a:xfrm>
+          <a:prstGeom prst="line">
+            <a:avLst/>
+          </a:prstGeom>
+          <a:ln w="19050">
+            <a:solidFill>
+              <a:srgbClr val="000000"/>
+            </a:solidFill>
+          </a:ln>
+        </p:spPr>
+        <p:style>
+          <a:lnRef idx="2">
+            <a:schemeClr val="accent1"/>
+          </a:lnRef>
+          <a:fillRef idx="0">
+            <a:schemeClr val="accent1"/>
+          </a:fillRef>
+          <a:effectRef idx="1">
+            <a:schemeClr val="accent1"/>
+          </a:effectRef>
+          <a:fontRef idx="minor">
+            <a:schemeClr val="tx1"/>
+          </a:fontRef>
+        </p:style>
+      </p:cxnSp>
+      <p:sp>
+        <p:nvSpPr>
+          <p:cNvPr id="4" name="Rectangle 3"/>
+          <p:cNvSpPr/>
+          <p:nvPr/>
+        </p:nvSpPr>
+        <p:spPr>
+          <a:xfrm>
+            <a:off x="365760" y="960120"/>
+            <a:ext cx="4023360" cy="3931920"/>
+          </a:xfrm>
+          <a:prstGeom prst="rect">
+            <a:avLst/>
+          </a:prstGeom>
+          <a:noFill/>
+          <a:ln w="12700">
+            <a:solidFill>
+              <a:srgbClr val="000000"/>
+            </a:solidFill>
+          </a:ln>
+          <a:effectLst/>
+        </p:spPr>
+        <p:style>
+          <a:lnRef idx="1">
+            <a:schemeClr val="accent1"/>
+          </a:lnRef>
+          <a:fillRef idx="3">
+            <a:schemeClr val="accent1"/>
+          </a:fillRef>
+          <a:effectRef idx="2">
+            <a:schemeClr val="accent1"/>
+          </a:effectRef>
+          <a:fontRef idx="minor">
+            <a:schemeClr val="lt1"/>
+          </a:fontRef>
+        </p:style>
+        <p:txBody>
+          <a:bodyPr rtlCol="0" anchor="ctr"/>
+          <a:lstStyle/>
+          <a:p>
+            <a:pPr algn="ctr"/>
+          </a:p>
+        </p:txBody>
+      </p:sp>
+      <p:sp>
+        <p:nvSpPr>
+          <p:cNvPr id="5" name="Rectangle 4"/>
+          <p:cNvSpPr/>
+          <p:nvPr/>
+        </p:nvSpPr>
+        <p:spPr>
+          <a:xfrm>
+            <a:off x="365760" y="960120"/>
+            <a:ext cx="4023360" cy="384048"/>
+          </a:xfrm>
+          <a:prstGeom prst="rect">
+            <a:avLst/>
+          </a:prstGeom>
+          <a:solidFill>
+            <a:srgbClr val="000000"/>
+          </a:solidFill>
+          <a:ln w="9525">
+            <a:solidFill>
+              <a:srgbClr val="000000"/>
+            </a:solidFill>
+          </a:ln>
+          <a:effectLst/>
+        </p:spPr>
+        <p:style>
+          <a:lnRef idx="1">
+            <a:schemeClr val="accent1"/>
+          </a:lnRef>
+          <a:fillRef idx="3">
+            <a:schemeClr val="accent1"/>
+          </a:fillRef>
+          <a:effectRef idx="2">
+            <a:schemeClr val="accent1"/>
+          </a:effectRef>
+          <a:fontRef idx="minor">
+            <a:schemeClr val="lt1"/>
+          </a:fontRef>
+        </p:style>
+        <p:txBody>
+          <a:bodyPr rtlCol="0" anchor="ctr"/>
+          <a:lstStyle/>
+          <a:p>
+            <a:pPr algn="ctr"/>
+          </a:p>
+        </p:txBody>
+      </p:sp>
+      <p:sp>
+        <p:nvSpPr>
+          <p:cNvPr id="6" name="TextBox 5"/>
+          <p:cNvSpPr txBox="1"/>
+          <p:nvPr/>
+        </p:nvSpPr>
+        <p:spPr>
+          <a:xfrm>
+            <a:off x="365760" y="960120"/>
+            <a:ext cx="4023360" cy="384048"/>
+          </a:xfrm>
+          <a:prstGeom prst="rect">
+            <a:avLst/>
+          </a:prstGeom>
+          <a:noFill/>
+        </p:spPr>
+        <p:txBody>
+          <a:bodyPr wrap="square" anchor="ctr" lIns="0" rIns="0" tIns="0" bIns="0">
+            <a:spAutoFit/>
+          </a:bodyPr>
+          <a:lstStyle/>
+          <a:p>
+            <a:pPr algn="ctr"/>
+            <a:r>
+              <a:rPr sz="1400" b="1">
+                <a:solidFill>
+                  <a:srgbClr val="FFFFFF"/>
+                </a:solidFill>
+                <a:latin typeface="맑은 고딕"/>
+              </a:rPr>
+              <a:t>BEFORE  ▪  5×7 GFX 기본 폰트</a:t>
+            </a:r>
+          </a:p>
+        </p:txBody>
+      </p:sp>
+      <p:sp>
+        <p:nvSpPr>
+          <p:cNvPr id="7" name="TextBox 6"/>
+          <p:cNvSpPr txBox="1"/>
+          <p:nvPr/>
+        </p:nvSpPr>
+        <p:spPr>
+          <a:xfrm>
+            <a:off x="530352" y="1463040"/>
+            <a:ext cx="3694176" cy="3291840"/>
+          </a:xfrm>
+          <a:prstGeom prst="rect">
+            <a:avLst/>
+          </a:prstGeom>
+          <a:noFill/>
+        </p:spPr>
+        <p:txBody>
+          <a:bodyPr wrap="square" anchor="t" lIns="0" rIns="0" tIns="0" bIns="0">
+            <a:spAutoFit/>
+          </a:bodyPr>
+          <a:lstStyle/>
+          <a:p>
+            <a:pPr algn="l"/>
+            <a:r>
+              <a:rPr sz="1200" b="0">
+                <a:solidFill>
+                  <a:srgbClr val="000000"/>
+                </a:solidFill>
+                <a:latin typeface="맑은 고딕"/>
+              </a:rPr>
+              <a:t>• Adafruit GFX 기본 폰트 (5×7)
+• DIGIT_BMP[10][7]  — 시계 숫자 전용 10글자
+• matrix.setTextColor() + setCursor() + print()
+• 매트릭스 8행 중 7행만 사용 (마지막 행 공백)
+• 시계 숫자 ↔ 스크롤 텍스트 폰트 비일관
+• 분 변경 시 숫자 즉시 점프 (애니메이션 없음)</a:t>
+            </a:r>
+          </a:p>
+        </p:txBody>
+      </p:sp>
+      <p:sp>
+        <p:nvSpPr>
+          <p:cNvPr id="8" name="Rectangle 7"/>
+          <p:cNvSpPr/>
+          <p:nvPr/>
+        </p:nvSpPr>
+        <p:spPr>
+          <a:xfrm>
+            <a:off x="4754880" y="960120"/>
+            <a:ext cx="4023360" cy="3931920"/>
+          </a:xfrm>
+          <a:prstGeom prst="rect">
+            <a:avLst/>
+          </a:prstGeom>
+          <a:noFill/>
+          <a:ln w="19050">
+            <a:solidFill>
+              <a:srgbClr val="000000"/>
+            </a:solidFill>
+          </a:ln>
+          <a:effectLst/>
+        </p:spPr>
+        <p:style>
+          <a:lnRef idx="1">
+            <a:schemeClr val="accent1"/>
+          </a:lnRef>
+          <a:fillRef idx="3">
+            <a:schemeClr val="accent1"/>
+          </a:fillRef>
+          <a:effectRef idx="2">
+            <a:schemeClr val="accent1"/>
+          </a:effectRef>
+          <a:fontRef idx="minor">
+            <a:schemeClr val="lt1"/>
+          </a:fontRef>
+        </p:style>
+        <p:txBody>
+          <a:bodyPr rtlCol="0" anchor="ctr"/>
+          <a:lstStyle/>
+          <a:p>
+            <a:pPr algn="ctr"/>
+          </a:p>
+        </p:txBody>
+      </p:sp>
+      <p:sp>
+        <p:nvSpPr>
+          <p:cNvPr id="9" name="Rectangle 8"/>
+          <p:cNvSpPr/>
+          <p:nvPr/>
+        </p:nvSpPr>
+        <p:spPr>
+          <a:xfrm>
+            <a:off x="4754880" y="960120"/>
+            <a:ext cx="4023360" cy="384048"/>
+          </a:xfrm>
+          <a:prstGeom prst="rect">
+            <a:avLst/>
+          </a:prstGeom>
+          <a:solidFill>
+            <a:srgbClr val="000000"/>
+          </a:solidFill>
+          <a:ln w="9525">
+            <a:solidFill>
+              <a:srgbClr val="000000"/>
+            </a:solidFill>
+          </a:ln>
+          <a:effectLst/>
+        </p:spPr>
+        <p:style>
+          <a:lnRef idx="1">
+            <a:schemeClr val="accent1"/>
+          </a:lnRef>
+          <a:fillRef idx="3">
+            <a:schemeClr val="accent1"/>
+          </a:fillRef>
+          <a:effectRef idx="2">
+            <a:schemeClr val="accent1"/>
+          </a:effectRef>
+          <a:fontRef idx="minor">
+            <a:schemeClr val="lt1"/>
+          </a:fontRef>
+        </p:style>
+        <p:txBody>
+          <a:bodyPr rtlCol="0" anchor="ctr"/>
+          <a:lstStyle/>
+          <a:p>
+            <a:pPr algn="ctr"/>
+          </a:p>
+        </p:txBody>
+      </p:sp>
+      <p:sp>
+        <p:nvSpPr>
+          <p:cNvPr id="10" name="TextBox 9"/>
+          <p:cNvSpPr txBox="1"/>
+          <p:nvPr/>
+        </p:nvSpPr>
+        <p:spPr>
+          <a:xfrm>
+            <a:off x="4754880" y="960120"/>
+            <a:ext cx="4023360" cy="384048"/>
+          </a:xfrm>
+          <a:prstGeom prst="rect">
+            <a:avLst/>
+          </a:prstGeom>
+          <a:noFill/>
+        </p:spPr>
+        <p:txBody>
+          <a:bodyPr wrap="square" anchor="ctr" lIns="0" rIns="0" tIns="0" bIns="0">
+            <a:spAutoFit/>
+          </a:bodyPr>
+          <a:lstStyle/>
+          <a:p>
+            <a:pPr algn="ctr"/>
+            <a:r>
+              <a:rPr sz="1400" b="1">
+                <a:solidFill>
+                  <a:srgbClr val="FFFFFF"/>
+                </a:solidFill>
+                <a:latin typeface="맑은 고딕"/>
+              </a:rPr>
+              <a:t>AFTER  ▪  5×8 HD44780 풀-스케일</a:t>
+            </a:r>
+          </a:p>
+        </p:txBody>
+      </p:sp>
+      <p:sp>
+        <p:nvSpPr>
+          <p:cNvPr id="11" name="TextBox 10"/>
+          <p:cNvSpPr txBox="1"/>
+          <p:nvPr/>
+        </p:nvSpPr>
+        <p:spPr>
+          <a:xfrm>
+            <a:off x="4919472" y="1463040"/>
+            <a:ext cx="3694176" cy="3291840"/>
+          </a:xfrm>
+          <a:prstGeom prst="rect">
+            <a:avLst/>
+          </a:prstGeom>
+          <a:noFill/>
+        </p:spPr>
+        <p:txBody>
+          <a:bodyPr wrap="square" anchor="t" lIns="0" rIns="0" tIns="0" bIns="0">
+            <a:spAutoFit/>
+          </a:bodyPr>
+          <a:lstStyle/>
+          <a:p>
+            <a:pPr algn="l"/>
+            <a:r>
+              <a:rPr sz="1200" b="0">
+                <a:solidFill>
+                  <a:srgbClr val="000000"/>
+                </a:solidFill>
+                <a:latin typeface="맑은 고딕"/>
+              </a:rPr>
+              <a:t>• HD44780 LCD 스타일 5×8 (8행 풀-스케일)
+• FONT_5X8[95][8]  — ASCII 0x20~0x7E 통합
+• drawCharPx() / drawStringPx() 커스텀 렌더링
+• 매트릭스 8행 전체 활용 (디센더 포함)
+• 시계 숫자 ↔ 스크롤 텍스트 단일 폰트 공유
+• 시·분 자리별 슬라이드 다운 애니메이션</a:t>
+            </a:r>
+          </a:p>
+        </p:txBody>
+      </p:sp>
+    </p:spTree>
+  </p:cSld>
+  <p:clrMapOvr>
+    <a:masterClrMapping/>
+  </p:clrMapOvr>
+</p:sld>
+</file>
+
+<file path=ppt/slides/slide9.xml><?xml version="1.0" encoding="utf-8"?>
+<p:sld xmlns:a="http://schemas.openxmlformats.org/drawingml/2006/main" xmlns:p="http://schemas.openxmlformats.org/presentationml/2006/main" xmlns:r="http://schemas.openxmlformats.org/officeDocument/2006/relationships">
+  <p:cSld>
+    <p:spTree>
+      <p:nvGrpSpPr>
+        <p:cNvPr id="1" name=""/>
+        <p:cNvGrpSpPr/>
+        <p:nvPr/>
+      </p:nvGrpSpPr>
+      <p:grpSpPr/>
+      <p:sp>
+        <p:nvSpPr>
+          <p:cNvPr id="2" name="TextBox 1"/>
+          <p:cNvSpPr txBox="1"/>
+          <p:nvPr/>
+        </p:nvSpPr>
+        <p:spPr>
+          <a:xfrm>
+            <a:off x="365760" y="228600"/>
+            <a:ext cx="8412480" cy="502920"/>
+          </a:xfrm>
+          <a:prstGeom prst="rect">
+            <a:avLst/>
+          </a:prstGeom>
+          <a:noFill/>
+        </p:spPr>
+        <p:txBody>
+          <a:bodyPr wrap="square" anchor="t" lIns="0" rIns="0" tIns="0" bIns="0">
+            <a:spAutoFit/>
+          </a:bodyPr>
+          <a:lstStyle/>
+          <a:p>
+            <a:pPr algn="l"/>
+            <a:r>
+              <a:rPr sz="2400" b="1">
+                <a:solidFill>
+                  <a:srgbClr val="000000"/>
+                </a:solidFill>
+                <a:latin typeface="맑은 고딕"/>
+              </a:rPr>
+              <a:t>시·분 숫자 슬라이드 다운 애니메이션</a:t>
+            </a:r>
+          </a:p>
+        </p:txBody>
+      </p:sp>
+      <p:cxnSp>
+        <p:nvCxnSpPr>
+          <p:cNvPr id="3" name="Connector 2"/>
+          <p:cNvCxnSpPr/>
+          <p:nvPr/>
+        </p:nvCxnSpPr>
+        <p:spPr>
+          <a:xfrm>
+            <a:off x="365760" y="749808"/>
+            <a:ext cx="8412480" cy="0"/>
+          </a:xfrm>
+          <a:prstGeom prst="line">
+            <a:avLst/>
+          </a:prstGeom>
+          <a:ln w="19050">
+            <a:solidFill>
+              <a:srgbClr val="000000"/>
+            </a:solidFill>
+          </a:ln>
+        </p:spPr>
+        <p:style>
+          <a:lnRef idx="2">
+            <a:schemeClr val="accent1"/>
+          </a:lnRef>
+          <a:fillRef idx="0">
+            <a:schemeClr val="accent1"/>
+          </a:fillRef>
+          <a:effectRef idx="1">
+            <a:schemeClr val="accent1"/>
+          </a:effectRef>
+          <a:fontRef idx="minor">
+            <a:schemeClr val="tx1"/>
+          </a:fontRef>
+        </p:style>
+      </p:cxnSp>
+      <p:sp>
+        <p:nvSpPr>
+          <p:cNvPr id="4" name="TextBox 3"/>
+          <p:cNvSpPr txBox="1"/>
+          <p:nvPr/>
+        </p:nvSpPr>
+        <p:spPr>
+          <a:xfrm>
+            <a:off x="365760" y="914400"/>
+            <a:ext cx="4572000" cy="320040"/>
+          </a:xfrm>
+          <a:prstGeom prst="rect">
+            <a:avLst/>
+          </a:prstGeom>
+          <a:noFill/>
+        </p:spPr>
+        <p:txBody>
+          <a:bodyPr wrap="square" anchor="t" lIns="0" rIns="0" tIns="0" bIns="0">
+            <a:spAutoFit/>
+          </a:bodyPr>
+          <a:lstStyle/>
+          <a:p>
+            <a:pPr algn="l"/>
+            <a:r>
+              <a:rPr sz="1200" b="1">
+                <a:solidFill>
+                  <a:srgbClr val="000000"/>
+                </a:solidFill>
+                <a:latin typeface="맑은 고딕"/>
+              </a:rPr>
+              <a:t>▪ 8픽셀 슬라이드 (50ms × 8 = 400ms)</a:t>
+            </a:r>
+          </a:p>
+        </p:txBody>
+      </p:sp>
+      <p:sp>
+        <p:nvSpPr>
+          <p:cNvPr id="5" name="Rectangle 4"/>
+          <p:cNvSpPr/>
+          <p:nvPr/>
+        </p:nvSpPr>
+        <p:spPr>
+          <a:xfrm>
+            <a:off x="365760" y="1417320"/>
+            <a:ext cx="250000" cy="400000"/>
+          </a:xfrm>
+          <a:prstGeom prst="rect">
+            <a:avLst/>
+          </a:prstGeom>
+          <a:noFill/>
+          <a:ln w="6350">
+            <a:solidFill>
+              <a:srgbClr val="000000"/>
+            </a:solidFill>
+          </a:ln>
+          <a:effectLst/>
+        </p:spPr>
+        <p:style>
+          <a:lnRef idx="1">
+            <a:schemeClr val="accent1"/>
+          </a:lnRef>
+          <a:fillRef idx="3">
+            <a:schemeClr val="accent1"/>
+          </a:fillRef>
+          <a:effectRef idx="2">
+            <a:schemeClr val="accent1"/>
+          </a:effectRef>
+          <a:fontRef idx="minor">
+            <a:schemeClr val="lt1"/>
+          </a:fontRef>
+        </p:style>
+        <p:txBody>
+          <a:bodyPr rtlCol="0" anchor="ctr"/>
+          <a:lstStyle/>
+          <a:p>
+            <a:pPr algn="ctr"/>
+          </a:p>
+        </p:txBody>
+      </p:sp>
+      <p:sp>
+        <p:nvSpPr>
+          <p:cNvPr id="6" name="Rectangle 5"/>
+          <p:cNvSpPr/>
+          <p:nvPr/>
+        </p:nvSpPr>
+        <p:spPr>
+          <a:xfrm>
+            <a:off x="365760" y="1417320"/>
+            <a:ext cx="50000" cy="50000"/>
+          </a:xfrm>
+          <a:prstGeom prst="rect">
+            <a:avLst/>
+          </a:prstGeom>
+          <a:solidFill>
+            <a:srgbClr val="000000"/>
+          </a:solidFill>
+          <a:ln w="3175">
+            <a:solidFill>
+              <a:srgbClr val="000000"/>
+            </a:solidFill>
+          </a:ln>
+          <a:effectLst/>
+        </p:spPr>
+        <p:style>
+          <a:lnRef idx="1">
+            <a:schemeClr val="accent1"/>
+          </a:lnRef>
+          <a:fillRef idx="3">
+            <a:schemeClr val="accent1"/>
+          </a:fillRef>
+          <a:effectRef idx="2">
+            <a:schemeClr val="accent1"/>
+          </a:effectRef>
+          <a:fontRef idx="minor">
+            <a:schemeClr val="lt1"/>
+          </a:fontRef>
+        </p:style>
+        <p:txBody>
+          <a:bodyPr rtlCol="0" anchor="ctr"/>
+          <a:lstStyle/>
+          <a:p>
+            <a:pPr algn="ctr"/>
+          </a:p>
+        </p:txBody>
+      </p:sp>
+      <p:sp>
+        <p:nvSpPr>
+          <p:cNvPr id="7" name="Rectangle 6"/>
+          <p:cNvSpPr/>
+          <p:nvPr/>
+        </p:nvSpPr>
+        <p:spPr>
+          <a:xfrm>
+            <a:off x="415760" y="1417320"/>
+            <a:ext cx="50000" cy="50000"/>
+          </a:xfrm>
+          <a:prstGeom prst="rect">
+            <a:avLst/>
+          </a:prstGeom>
+          <a:solidFill>
+            <a:srgbClr val="000000"/>
+          </a:solidFill>
+          <a:ln w="3175">
+            <a:solidFill>
+              <a:srgbClr val="000000"/>
+            </a:solidFill>
+          </a:ln>
+          <a:effectLst/>
+        </p:spPr>
+        <p:style>
+          <a:lnRef idx="1">
+            <a:schemeClr val="accent1"/>
+          </a:lnRef>
+          <a:fillRef idx="3">
+            <a:schemeClr val="accent1"/>
+          </a:fillRef>
+          <a:effectRef idx="2">
+            <a:schemeClr val="accent1"/>
+          </a:effectRef>
+          <a:fontRef idx="minor">
+            <a:schemeClr val="lt1"/>
+          </a:fontRef>
+        </p:style>
+        <p:txBody>
+          <a:bodyPr rtlCol="0" anchor="ctr"/>
+          <a:lstStyle/>
+          <a:p>
+            <a:pPr algn="ctr"/>
+          </a:p>
+        </p:txBody>
+      </p:sp>
+      <p:sp>
+        <p:nvSpPr>
+          <p:cNvPr id="8" name="Rectangle 7"/>
+          <p:cNvSpPr/>
+          <p:nvPr/>
+        </p:nvSpPr>
+        <p:spPr>
+          <a:xfrm>
+            <a:off x="465760" y="1417320"/>
+            <a:ext cx="50000" cy="50000"/>
+          </a:xfrm>
+          <a:prstGeom prst="rect">
+            <a:avLst/>
+          </a:prstGeom>
+          <a:solidFill>
+            <a:srgbClr val="000000"/>
+          </a:solidFill>
+          <a:ln w="3175">
+            <a:solidFill>
+              <a:srgbClr val="000000"/>
+            </a:solidFill>
+          </a:ln>
+          <a:effectLst/>
+        </p:spPr>
+        <p:style>
+          <a:lnRef idx="1">
+            <a:schemeClr val="accent1"/>
+          </a:lnRef>
+          <a:fillRef idx="3">
+            <a:schemeClr val="accent1"/>
+          </a:fillRef>
+          <a:effectRef idx="2">
+            <a:schemeClr val="accent1"/>
+          </a:effectRef>
+          <a:fontRef idx="minor">
+            <a:schemeClr val="lt1"/>
+          </a:fontRef>
+        </p:style>
+        <p:txBody>
+          <a:bodyPr rtlCol="0" anchor="ctr"/>
+          <a:lstStyle/>
+          <a:p>
+            <a:pPr algn="ctr"/>
+          </a:p>
+        </p:txBody>
+      </p:sp>
+      <p:sp>
+        <p:nvSpPr>
+          <p:cNvPr id="9" name="Rectangle 8"/>
+          <p:cNvSpPr/>
+          <p:nvPr/>
+        </p:nvSpPr>
+        <p:spPr>
+          <a:xfrm>
+            <a:off x="515760" y="1417320"/>
+            <a:ext cx="50000" cy="50000"/>
+          </a:xfrm>
+          <a:prstGeom prst="rect">
+            <a:avLst/>
+          </a:prstGeom>
+          <a:solidFill>
+            <a:srgbClr val="000000"/>
+          </a:solidFill>
+          <a:ln w="3175">
+            <a:solidFill>
+              <a:srgbClr val="000000"/>
+            </a:solidFill>
+          </a:ln>
+          <a:effectLst/>
+        </p:spPr>
+        <p:style>
+          <a:lnRef idx="1">
+            <a:schemeClr val="accent1"/>
+          </a:lnRef>
+          <a:fillRef idx="3">
+            <a:schemeClr val="accent1"/>
+          </a:fillRef>
+          <a:effectRef idx="2">
+            <a:schemeClr val="accent1"/>
+          </a:effectRef>
+          <a:fontRef idx="minor">
+            <a:schemeClr val="lt1"/>
+          </a:fontRef>
+        </p:style>
+        <p:txBody>
+          <a:bodyPr rtlCol="0" anchor="ctr"/>
+          <a:lstStyle/>
+          <a:p>
+            <a:pPr algn="ctr"/>
+          </a:p>
+        </p:txBody>
+      </p:sp>
+      <p:sp>
+        <p:nvSpPr>
+          <p:cNvPr id="10" name="Rectangle 9"/>
+          <p:cNvSpPr/>
+          <p:nvPr/>
+        </p:nvSpPr>
+        <p:spPr>
+          <a:xfrm>
+            <a:off x="565760" y="1417320"/>
+            <a:ext cx="50000" cy="50000"/>
+          </a:xfrm>
+          <a:prstGeom prst="rect">
+            <a:avLst/>
+          </a:prstGeom>
+          <a:solidFill>
+            <a:srgbClr val="000000"/>
+          </a:solidFill>
+          <a:ln w="3175">
+            <a:solidFill>
+              <a:srgbClr val="000000"/>
+            </a:solidFill>
+          </a:ln>
+          <a:effectLst/>
+        </p:spPr>
+        <p:style>
+          <a:lnRef idx="1">
+            <a:schemeClr val="accent1"/>
+          </a:lnRef>
+          <a:fillRef idx="3">
+            <a:schemeClr val="accent1"/>
+          </a:fillRef>
+          <a:effectRef idx="2">
+            <a:schemeClr val="accent1"/>
+          </a:effectRef>
+          <a:fontRef idx="minor">
+            <a:schemeClr val="lt1"/>
+          </a:fontRef>
+        </p:style>
+        <p:txBody>
+          <a:bodyPr rtlCol="0" anchor="ctr"/>
+          <a:lstStyle/>
+          <a:p>
+            <a:pPr algn="ctr"/>
+          </a:p>
+        </p:txBody>
+      </p:sp>
+      <p:sp>
+        <p:nvSpPr>
+          <p:cNvPr id="11" name="Rectangle 10"/>
+          <p:cNvSpPr/>
+          <p:nvPr/>
+        </p:nvSpPr>
+        <p:spPr>
+          <a:xfrm>
+            <a:off x="365760" y="1467320"/>
+            <a:ext cx="50000" cy="50000"/>
+          </a:xfrm>
+          <a:prstGeom prst="rect">
+            <a:avLst/>
+          </a:prstGeom>
+          <a:solidFill>
+            <a:srgbClr val="000000"/>
+          </a:solidFill>
+          <a:ln w="3175">
+            <a:solidFill>
+              <a:srgbClr val="000000"/>
+            </a:solidFill>
+          </a:ln>
+          <a:effectLst/>
+        </p:spPr>
+        <p:style>
+          <a:lnRef idx="1">
+            <a:schemeClr val="accent1"/>
+          </a:lnRef>
+          <a:fillRef idx="3">
+            <a:schemeClr val="accent1"/>
+          </a:fillRef>
+          <a:effectRef idx="2">
+            <a:schemeClr val="accent1"/>
+          </a:effectRef>
+          <a:fontRef idx="minor">
+            <a:schemeClr val="lt1"/>
+          </a:fontRef>
+        </p:style>
+        <p:txBody>
+          <a:bodyPr rtlCol="0" anchor="ctr"/>
+          <a:lstStyle/>
+          <a:p>
+            <a:pPr algn="ctr"/>
+          </a:p>
+        </p:txBody>
+      </p:sp>
+      <p:sp>
+        <p:nvSpPr>
+          <p:cNvPr id="12" name="Rectangle 11"/>
+          <p:cNvSpPr/>
+          <p:nvPr/>
+        </p:nvSpPr>
+        <p:spPr>
+          <a:xfrm>
+            <a:off x="365760" y="1517320"/>
+            <a:ext cx="50000" cy="50000"/>
+          </a:xfrm>
+          <a:prstGeom prst="rect">
+            <a:avLst/>
+          </a:prstGeom>
+          <a:solidFill>
+            <a:srgbClr val="000000"/>
+          </a:solidFill>
+          <a:ln w="3175">
+            <a:solidFill>
+              <a:srgbClr val="000000"/>
+            </a:solidFill>
+          </a:ln>
+          <a:effectLst/>
+        </p:spPr>
+        <p:style>
+          <a:lnRef idx="1">
+            <a:schemeClr val="accent1"/>
+          </a:lnRef>
+          <a:fillRef idx="3">
+            <a:schemeClr val="accent1"/>
+          </a:fillRef>
+          <a:effectRef idx="2">
+            <a:schemeClr val="accent1"/>
+          </a:effectRef>
+          <a:fontRef idx="minor">
+            <a:schemeClr val="lt1"/>
+          </a:fontRef>
+        </p:style>
+        <p:txBody>
+          <a:bodyPr rtlCol="0" anchor="ctr"/>
+          <a:lstStyle/>
+          <a:p>
+            <a:pPr algn="ctr"/>
+          </a:p>
+        </p:txBody>
+      </p:sp>
+      <p:sp>
+        <p:nvSpPr>
+          <p:cNvPr id="13" name="Rectangle 12"/>
+          <p:cNvSpPr/>
+          <p:nvPr/>
+        </p:nvSpPr>
+        <p:spPr>
+          <a:xfrm>
+            <a:off x="365760" y="1567320"/>
+            <a:ext cx="50000" cy="50000"/>
+          </a:xfrm>
+          <a:prstGeom prst="rect">
+            <a:avLst/>
+          </a:prstGeom>
+          <a:solidFill>
+            <a:srgbClr val="000000"/>
+          </a:solidFill>
+          <a:ln w="3175">
+            <a:solidFill>
+              <a:srgbClr val="000000"/>
+            </a:solidFill>
+          </a:ln>
+          <a:effectLst/>
+        </p:spPr>
+        <p:style>
+          <a:lnRef idx="1">
+            <a:schemeClr val="accent1"/>
+          </a:lnRef>
+          <a:fillRef idx="3">
+            <a:schemeClr val="accent1"/>
+          </a:fillRef>
+          <a:effectRef idx="2">
+            <a:schemeClr val="accent1"/>
+          </a:effectRef>
+          <a:fontRef idx="minor">
+            <a:schemeClr val="lt1"/>
+          </a:fontRef>
+        </p:style>
+        <p:txBody>
+          <a:bodyPr rtlCol="0" anchor="ctr"/>
+          <a:lstStyle/>
+          <a:p>
+            <a:pPr algn="ctr"/>
+          </a:p>
+        </p:txBody>
+      </p:sp>
+      <p:sp>
+        <p:nvSpPr>
+          <p:cNvPr id="14" name="Rectangle 13"/>
+          <p:cNvSpPr/>
+          <p:nvPr/>
+        </p:nvSpPr>
+        <p:spPr>
+          <a:xfrm>
+            <a:off x="415760" y="1567320"/>
+            <a:ext cx="50000" cy="50000"/>
+          </a:xfrm>
+          <a:prstGeom prst="rect">
+            <a:avLst/>
+          </a:prstGeom>
+          <a:solidFill>
+            <a:srgbClr val="000000"/>
+          </a:solidFill>
+          <a:ln w="3175">
+            <a:solidFill>
+              <a:srgbClr val="000000"/>
+            </a:solidFill>
+          </a:ln>
+          <a:effectLst/>
+        </p:spPr>
+        <p:style>
+          <a:lnRef idx="1">
+            <a:schemeClr val="accent1"/>
+          </a:lnRef>
+          <a:fillRef idx="3">
+            <a:schemeClr val="accent1"/>
+          </a:fillRef>
+          <a:effectRef idx="2">
+            <a:schemeClr val="accent1"/>
+          </a:effectRef>
+          <a:fontRef idx="minor">
+            <a:schemeClr val="lt1"/>
+          </a:fontRef>
+        </p:style>
+        <p:txBody>
+          <a:bodyPr rtlCol="0" anchor="ctr"/>
+          <a:lstStyle/>
+          <a:p>
+            <a:pPr algn="ctr"/>
+          </a:p>
+        </p:txBody>
+      </p:sp>
+      <p:sp>
+        <p:nvSpPr>
+          <p:cNvPr id="15" name="Rectangle 14"/>
+          <p:cNvSpPr/>
+          <p:nvPr/>
+        </p:nvSpPr>
+        <p:spPr>
+          <a:xfrm>
+            <a:off x="465760" y="1567320"/>
+            <a:ext cx="50000" cy="50000"/>
+          </a:xfrm>
+          <a:prstGeom prst="rect">
+            <a:avLst/>
+          </a:prstGeom>
+          <a:solidFill>
+            <a:srgbClr val="000000"/>
+          </a:solidFill>
+          <a:ln w="3175">
+            <a:solidFill>
+              <a:srgbClr val="000000"/>
+            </a:solidFill>
+          </a:ln>
+          <a:effectLst/>
+        </p:spPr>
+        <p:style>
+          <a:lnRef idx="1">
+            <a:schemeClr val="accent1"/>
+          </a:lnRef>
+          <a:fillRef idx="3">
+            <a:schemeClr val="accent1"/>
+          </a:fillRef>
+          <a:effectRef idx="2">
+            <a:schemeClr val="accent1"/>
+          </a:effectRef>
+          <a:fontRef idx="minor">
+            <a:schemeClr val="lt1"/>
+          </a:fontRef>
+        </p:style>
+        <p:txBody>
+          <a:bodyPr rtlCol="0" anchor="ctr"/>
+          <a:lstStyle/>
+          <a:p>
+            <a:pPr algn="ctr"/>
+          </a:p>
+        </p:txBody>
+      </p:sp>
+      <p:sp>
+        <p:nvSpPr>
+          <p:cNvPr id="16" name="Rectangle 15"/>
+          <p:cNvSpPr/>
+          <p:nvPr/>
+        </p:nvSpPr>
+        <p:spPr>
+          <a:xfrm>
+            <a:off x="515760" y="1567320"/>
+            <a:ext cx="50000" cy="50000"/>
+          </a:xfrm>
+          <a:prstGeom prst="rect">
+            <a:avLst/>
+          </a:prstGeom>
+          <a:solidFill>
+            <a:srgbClr val="000000"/>
+          </a:solidFill>
+          <a:ln w="3175">
+            <a:solidFill>
+              <a:srgbClr val="000000"/>
+            </a:solidFill>
+          </a:ln>
+          <a:effectLst/>
+        </p:spPr>
+        <p:style>
+          <a:lnRef idx="1">
+            <a:schemeClr val="accent1"/>
+          </a:lnRef>
+          <a:fillRef idx="3">
+            <a:schemeClr val="accent1"/>
+          </a:fillRef>
+          <a:effectRef idx="2">
+            <a:schemeClr val="accent1"/>
+          </a:effectRef>
+          <a:fontRef idx="minor">
+            <a:schemeClr val="lt1"/>
+          </a:fontRef>
+        </p:style>
+        <p:txBody>
+          <a:bodyPr rtlCol="0" anchor="ctr"/>
+          <a:lstStyle/>
+          <a:p>
+            <a:pPr algn="ctr"/>
+          </a:p>
+        </p:txBody>
+      </p:sp>
+      <p:sp>
+        <p:nvSpPr>
+          <p:cNvPr id="17" name="Rectangle 16"/>
+          <p:cNvSpPr/>
+          <p:nvPr/>
+        </p:nvSpPr>
+        <p:spPr>
+          <a:xfrm>
+            <a:off x="565760" y="1617320"/>
+            <a:ext cx="50000" cy="50000"/>
+          </a:xfrm>
+          <a:prstGeom prst="rect">
+            <a:avLst/>
+          </a:prstGeom>
+          <a:solidFill>
+            <a:srgbClr val="000000"/>
+          </a:solidFill>
+          <a:ln w="3175">
+            <a:solidFill>
+              <a:srgbClr val="000000"/>
+            </a:solidFill>
+          </a:ln>
+          <a:effectLst/>
+        </p:spPr>
+        <p:style>
+          <a:lnRef idx="1">
+            <a:schemeClr val="accent1"/>
+          </a:lnRef>
+          <a:fillRef idx="3">
+            <a:schemeClr val="accent1"/>
+          </a:fillRef>
+          <a:effectRef idx="2">
+            <a:schemeClr val="accent1"/>
+          </a:effectRef>
+          <a:fontRef idx="minor">
+            <a:schemeClr val="lt1"/>
+          </a:fontRef>
+        </p:style>
+        <p:txBody>
+          <a:bodyPr rtlCol="0" anchor="ctr"/>
+          <a:lstStyle/>
+          <a:p>
+            <a:pPr algn="ctr"/>
+          </a:p>
+        </p:txBody>
+      </p:sp>
+      <p:sp>
+        <p:nvSpPr>
+          <p:cNvPr id="18" name="Rectangle 17"/>
+          <p:cNvSpPr/>
+          <p:nvPr/>
+        </p:nvSpPr>
+        <p:spPr>
+          <a:xfrm>
+            <a:off x="565760" y="1667320"/>
+            <a:ext cx="50000" cy="50000"/>
+          </a:xfrm>
+          <a:prstGeom prst="rect">
+            <a:avLst/>
+          </a:prstGeom>
+          <a:solidFill>
+            <a:srgbClr val="000000"/>
+          </a:solidFill>
+          <a:ln w="3175">
+            <a:solidFill>
+              <a:srgbClr val="000000"/>
+            </a:solidFill>
+          </a:ln>
+          <a:effectLst/>
+        </p:spPr>
+        <p:style>
+          <a:lnRef idx="1">
+            <a:schemeClr val="accent1"/>
+          </a:lnRef>
+          <a:fillRef idx="3">
+            <a:schemeClr val="accent1"/>
+          </a:fillRef>
+          <a:effectRef idx="2">
+            <a:schemeClr val="accent1"/>
+          </a:effectRef>
+          <a:fontRef idx="minor">
+            <a:schemeClr val="lt1"/>
+          </a:fontRef>
+        </p:style>
+        <p:txBody>
+          <a:bodyPr rtlCol="0" anchor="ctr"/>
+          <a:lstStyle/>
+          <a:p>
+            <a:pPr algn="ctr"/>
+          </a:p>
+        </p:txBody>
+      </p:sp>
+      <p:sp>
+        <p:nvSpPr>
+          <p:cNvPr id="19" name="Rectangle 18"/>
+          <p:cNvSpPr/>
+          <p:nvPr/>
+        </p:nvSpPr>
+        <p:spPr>
+          <a:xfrm>
+            <a:off x="365760" y="1717320"/>
+            <a:ext cx="50000" cy="50000"/>
+          </a:xfrm>
+          <a:prstGeom prst="rect">
+            <a:avLst/>
+          </a:prstGeom>
+          <a:solidFill>
+            <a:srgbClr val="000000"/>
+          </a:solidFill>
+          <a:ln w="3175">
+            <a:solidFill>
+              <a:srgbClr val="000000"/>
+            </a:solidFill>
+          </a:ln>
+          <a:effectLst/>
+        </p:spPr>
+        <p:style>
+          <a:lnRef idx="1">
+            <a:schemeClr val="accent1"/>
+          </a:lnRef>
+          <a:fillRef idx="3">
+            <a:schemeClr val="accent1"/>
+          </a:fillRef>
+          <a:effectRef idx="2">
+            <a:schemeClr val="accent1"/>
+          </a:effectRef>
+          <a:fontRef idx="minor">
+            <a:schemeClr val="lt1"/>
+          </a:fontRef>
+        </p:style>
+        <p:txBody>
+          <a:bodyPr rtlCol="0" anchor="ctr"/>
+          <a:lstStyle/>
+          <a:p>
+            <a:pPr algn="ctr"/>
+          </a:p>
+        </p:txBody>
+      </p:sp>
+      <p:sp>
+        <p:nvSpPr>
+          <p:cNvPr id="20" name="Rectangle 19"/>
+          <p:cNvSpPr/>
+          <p:nvPr/>
+        </p:nvSpPr>
+        <p:spPr>
+          <a:xfrm>
+            <a:off x="565760" y="1717320"/>
+            <a:ext cx="50000" cy="50000"/>
+          </a:xfrm>
+          <a:prstGeom prst="rect">
+            <a:avLst/>
+          </a:prstGeom>
+          <a:solidFill>
+            <a:srgbClr val="000000"/>
+          </a:solidFill>
+          <a:ln w="3175">
+            <a:solidFill>
+              <a:srgbClr val="000000"/>
+            </a:solidFill>
+          </a:ln>
+          <a:effectLst/>
+        </p:spPr>
+        <p:style>
+          <a:lnRef idx="1">
+            <a:schemeClr val="accent1"/>
+          </a:lnRef>
+          <a:fillRef idx="3">
+            <a:schemeClr val="accent1"/>
+          </a:fillRef>
+          <a:effectRef idx="2">
+            <a:schemeClr val="accent1"/>
+          </a:effectRef>
+          <a:fontRef idx="minor">
+            <a:schemeClr val="lt1"/>
+          </a:fontRef>
+        </p:style>
+        <p:txBody>
+          <a:bodyPr rtlCol="0" anchor="ctr"/>
+          <a:lstStyle/>
+          <a:p>
+            <a:pPr algn="ctr"/>
+          </a:p>
+        </p:txBody>
+      </p:sp>
+      <p:sp>
+        <p:nvSpPr>
+          <p:cNvPr id="21" name="Rectangle 20"/>
+          <p:cNvSpPr/>
+          <p:nvPr/>
+        </p:nvSpPr>
+        <p:spPr>
+          <a:xfrm>
+            <a:off x="415760" y="1767320"/>
+            <a:ext cx="50000" cy="50000"/>
+          </a:xfrm>
+          <a:prstGeom prst="rect">
+            <a:avLst/>
+          </a:prstGeom>
+          <a:solidFill>
+            <a:srgbClr val="000000"/>
+          </a:solidFill>
+          <a:ln w="3175">
+            <a:solidFill>
+              <a:srgbClr val="000000"/>
+            </a:solidFill>
+          </a:ln>
+          <a:effectLst/>
+        </p:spPr>
+        <p:style>
+          <a:lnRef idx="1">
+            <a:schemeClr val="accent1"/>
+          </a:lnRef>
+          <a:fillRef idx="3">
+            <a:schemeClr val="accent1"/>
+          </a:fillRef>
+          <a:effectRef idx="2">
+            <a:schemeClr val="accent1"/>
+          </a:effectRef>
+          <a:fontRef idx="minor">
+            <a:schemeClr val="lt1"/>
+          </a:fontRef>
+        </p:style>
+        <p:txBody>
+          <a:bodyPr rtlCol="0" anchor="ctr"/>
+          <a:lstStyle/>
+          <a:p>
+            <a:pPr algn="ctr"/>
+          </a:p>
+        </p:txBody>
+      </p:sp>
+      <p:sp>
+        <p:nvSpPr>
+          <p:cNvPr id="22" name="Rectangle 21"/>
+          <p:cNvSpPr/>
+          <p:nvPr/>
+        </p:nvSpPr>
+        <p:spPr>
+          <a:xfrm>
+            <a:off x="465760" y="1767320"/>
+            <a:ext cx="50000" cy="50000"/>
+          </a:xfrm>
+          <a:prstGeom prst="rect">
+            <a:avLst/>
+          </a:prstGeom>
+          <a:solidFill>
+            <a:srgbClr val="000000"/>
+          </a:solidFill>
+          <a:ln w="3175">
+            <a:solidFill>
+              <a:srgbClr val="000000"/>
+            </a:solidFill>
+          </a:ln>
+          <a:effectLst/>
+        </p:spPr>
+        <p:style>
+          <a:lnRef idx="1">
+            <a:schemeClr val="accent1"/>
+          </a:lnRef>
+          <a:fillRef idx="3">
+            <a:schemeClr val="accent1"/>
+          </a:fillRef>
+          <a:effectRef idx="2">
+            <a:schemeClr val="accent1"/>
+          </a:effectRef>
+          <a:fontRef idx="minor">
+            <a:schemeClr val="lt1"/>
+          </a:fontRef>
+        </p:style>
+        <p:txBody>
+          <a:bodyPr rtlCol="0" anchor="ctr"/>
+          <a:lstStyle/>
+          <a:p>
+            <a:pPr algn="ctr"/>
+          </a:p>
+        </p:txBody>
+      </p:sp>
+      <p:sp>
+        <p:nvSpPr>
+          <p:cNvPr id="23" name="Rectangle 22"/>
+          <p:cNvSpPr/>
+          <p:nvPr/>
+        </p:nvSpPr>
+        <p:spPr>
+          <a:xfrm>
+            <a:off x="515760" y="1767320"/>
+            <a:ext cx="50000" cy="50000"/>
+          </a:xfrm>
+          <a:prstGeom prst="rect">
+            <a:avLst/>
+          </a:prstGeom>
+          <a:solidFill>
+            <a:srgbClr val="000000"/>
+          </a:solidFill>
+          <a:ln w="3175">
+            <a:solidFill>
+              <a:srgbClr val="000000"/>
+            </a:solidFill>
+          </a:ln>
+          <a:effectLst/>
+        </p:spPr>
+        <p:style>
+          <a:lnRef idx="1">
+            <a:schemeClr val="accent1"/>
+          </a:lnRef>
+          <a:fillRef idx="3">
+            <a:schemeClr val="accent1"/>
+          </a:fillRef>
+          <a:effectRef idx="2">
+            <a:schemeClr val="accent1"/>
+          </a:effectRef>
+          <a:fontRef idx="minor">
+            <a:schemeClr val="lt1"/>
+          </a:fontRef>
+        </p:style>
+        <p:txBody>
+          <a:bodyPr rtlCol="0" anchor="ctr"/>
+          <a:lstStyle/>
+          <a:p>
+            <a:pPr algn="ctr"/>
+          </a:p>
+        </p:txBody>
+      </p:sp>
+      <p:sp>
+        <p:nvSpPr>
+          <p:cNvPr id="24" name="TextBox 23"/>
+          <p:cNvSpPr txBox="1"/>
+          <p:nvPr/>
+        </p:nvSpPr>
+        <p:spPr>
+          <a:xfrm>
+            <a:off x="345760" y="1863040"/>
+            <a:ext cx="290000" cy="457200"/>
+          </a:xfrm>
+          <a:prstGeom prst="rect">
+            <a:avLst/>
+          </a:prstGeom>
+          <a:noFill/>
+        </p:spPr>
+        <p:txBody>
+          <a:bodyPr wrap="square" anchor="t" lIns="0" rIns="0" tIns="0" bIns="0">
+            <a:spAutoFit/>
+          </a:bodyPr>
+          <a:lstStyle/>
+          <a:p>
+            <a:pPr algn="ctr"/>
+            <a:r>
+              <a:rPr sz="900" b="0">
+                <a:solidFill>
+                  <a:srgbClr val="000000"/>
+                </a:solidFill>
+                <a:latin typeface="맑은 고딕"/>
+              </a:rPr>
+              <a:t>t = 0 ms
+(분 변경 직전)</a:t>
+            </a:r>
+          </a:p>
+        </p:txBody>
+      </p:sp>
+      <p:cxnSp>
+        <p:nvCxnSpPr>
+          <p:cNvPr id="25" name="Connector 24"/>
+          <p:cNvCxnSpPr/>
+          <p:nvPr/>
+        </p:nvCxnSpPr>
+        <p:spPr>
+          <a:xfrm>
+            <a:off x="635760" y="1617320"/>
+            <a:ext cx="863000" cy="0"/>
+          </a:xfrm>
+          <a:prstGeom prst="line">
+            <a:avLst/>
+          </a:prstGeom>
+          <a:ln w="12700">
+            <a:solidFill>
+              <a:srgbClr val="000000"/>
+            </a:solidFill>
+            <a:tailEnd type="triangle" w="med" h="med"/>
+          </a:ln>
+        </p:spPr>
+        <p:style>
+          <a:lnRef idx="2">
+            <a:schemeClr val="accent1"/>
+          </a:lnRef>
+          <a:fillRef idx="0">
+            <a:schemeClr val="accent1"/>
+          </a:fillRef>
+          <a:effectRef idx="1">
+            <a:schemeClr val="accent1"/>
+          </a:effectRef>
+          <a:fontRef idx="minor">
+            <a:schemeClr val="tx1"/>
+          </a:fontRef>
+        </p:style>
+      </p:cxnSp>
+      <p:sp>
+        <p:nvSpPr>
+          <p:cNvPr id="26" name="Rectangle 25"/>
+          <p:cNvSpPr/>
+          <p:nvPr/>
+        </p:nvSpPr>
+        <p:spPr>
+          <a:xfrm>
+            <a:off x="1508760" y="1417320"/>
+            <a:ext cx="250000" cy="400000"/>
+          </a:xfrm>
+          <a:prstGeom prst="rect">
+            <a:avLst/>
+          </a:prstGeom>
+          <a:noFill/>
+          <a:ln w="6350">
+            <a:solidFill>
+              <a:srgbClr val="000000"/>
+            </a:solidFill>
+          </a:ln>
+          <a:effectLst/>
+        </p:spPr>
+        <p:style>
+          <a:lnRef idx="1">
+            <a:schemeClr val="accent1"/>
+          </a:lnRef>
+          <a:fillRef idx="3">
+            <a:schemeClr val="accent1"/>
+          </a:fillRef>
+          <a:effectRef idx="2">
+            <a:schemeClr val="accent1"/>
+          </a:effectRef>
+          <a:fontRef idx="minor">
+            <a:schemeClr val="lt1"/>
+          </a:fontRef>
+        </p:style>
+        <p:txBody>
+          <a:bodyPr rtlCol="0" anchor="ctr"/>
+          <a:lstStyle/>
+          <a:p>
+            <a:pPr algn="ctr"/>
+          </a:p>
+        </p:txBody>
+      </p:sp>
+      <p:sp>
+        <p:nvSpPr>
+          <p:cNvPr id="27" name="Rectangle 26"/>
+          <p:cNvSpPr/>
+          <p:nvPr/>
+        </p:nvSpPr>
+        <p:spPr>
+          <a:xfrm>
+            <a:off x="1508760" y="1617320"/>
+            <a:ext cx="50000" cy="50000"/>
+          </a:xfrm>
+          <a:prstGeom prst="rect">
+            <a:avLst/>
+          </a:prstGeom>
+          <a:solidFill>
+            <a:srgbClr val="000000"/>
+          </a:solidFill>
+          <a:ln w="3175">
+            <a:solidFill>
+              <a:srgbClr val="000000"/>
+            </a:solidFill>
+          </a:ln>
+          <a:effectLst/>
+        </p:spPr>
+        <p:style>
+          <a:lnRef idx="1">
+            <a:schemeClr val="accent1"/>
+          </a:lnRef>
+          <a:fillRef idx="3">
+            <a:schemeClr val="accent1"/>
+          </a:fillRef>
+          <a:effectRef idx="2">
+            <a:schemeClr val="accent1"/>
+          </a:effectRef>
+          <a:fontRef idx="minor">
+            <a:schemeClr val="lt1"/>
+          </a:fontRef>
+        </p:style>
+        <p:txBody>
+          <a:bodyPr rtlCol="0" anchor="ctr"/>
+          <a:lstStyle/>
+          <a:p>
+            <a:pPr algn="ctr"/>
+          </a:p>
+        </p:txBody>
+      </p:sp>
+      <p:sp>
+        <p:nvSpPr>
+          <p:cNvPr id="28" name="Rectangle 27"/>
+          <p:cNvSpPr/>
+          <p:nvPr/>
+        </p:nvSpPr>
+        <p:spPr>
+          <a:xfrm>
+            <a:off x="1558760" y="1617320"/>
+            <a:ext cx="50000" cy="50000"/>
+          </a:xfrm>
+          <a:prstGeom prst="rect">
+            <a:avLst/>
+          </a:prstGeom>
+          <a:solidFill>
+            <a:srgbClr val="000000"/>
+          </a:solidFill>
+          <a:ln w="3175">
+            <a:solidFill>
+              <a:srgbClr val="000000"/>
+            </a:solidFill>
+          </a:ln>
+          <a:effectLst/>
+        </p:spPr>
+        <p:style>
+          <a:lnRef idx="1">
+            <a:schemeClr val="accent1"/>
+          </a:lnRef>
+          <a:fillRef idx="3">
+            <a:schemeClr val="accent1"/>
+          </a:fillRef>
+          <a:effectRef idx="2">
+            <a:schemeClr val="accent1"/>
+          </a:effectRef>
+          <a:fontRef idx="minor">
+            <a:schemeClr val="lt1"/>
+          </a:fontRef>
+        </p:style>
+        <p:txBody>
+          <a:bodyPr rtlCol="0" anchor="ctr"/>
+          <a:lstStyle/>
+          <a:p>
+            <a:pPr algn="ctr"/>
+          </a:p>
+        </p:txBody>
+      </p:sp>
+      <p:sp>
+        <p:nvSpPr>
+          <p:cNvPr id="29" name="Rectangle 28"/>
+          <p:cNvSpPr/>
+          <p:nvPr/>
+        </p:nvSpPr>
+        <p:spPr>
+          <a:xfrm>
+            <a:off x="1608760" y="1617320"/>
+            <a:ext cx="50000" cy="50000"/>
+          </a:xfrm>
+          <a:prstGeom prst="rect">
+            <a:avLst/>
+          </a:prstGeom>
+          <a:solidFill>
+            <a:srgbClr val="000000"/>
+          </a:solidFill>
+          <a:ln w="3175">
+            <a:solidFill>
+              <a:srgbClr val="000000"/>
+            </a:solidFill>
+          </a:ln>
+          <a:effectLst/>
+        </p:spPr>
+        <p:style>
+          <a:lnRef idx="1">
+            <a:schemeClr val="accent1"/>
+          </a:lnRef>
+          <a:fillRef idx="3">
+            <a:schemeClr val="accent1"/>
+          </a:fillRef>
+          <a:effectRef idx="2">
+            <a:schemeClr val="accent1"/>
+          </a:effectRef>
+          <a:fontRef idx="minor">
+            <a:schemeClr val="lt1"/>
+          </a:fontRef>
+        </p:style>
+        <p:txBody>
+          <a:bodyPr rtlCol="0" anchor="ctr"/>
+          <a:lstStyle/>
+          <a:p>
+            <a:pPr algn="ctr"/>
+          </a:p>
+        </p:txBody>
+      </p:sp>
+      <p:sp>
+        <p:nvSpPr>
+          <p:cNvPr id="30" name="Rectangle 29"/>
+          <p:cNvSpPr/>
+          <p:nvPr/>
+        </p:nvSpPr>
+        <p:spPr>
+          <a:xfrm>
+            <a:off x="1658760" y="1617320"/>
+            <a:ext cx="50000" cy="50000"/>
+          </a:xfrm>
+          <a:prstGeom prst="rect">
+            <a:avLst/>
+          </a:prstGeom>
+          <a:solidFill>
+            <a:srgbClr val="000000"/>
+          </a:solidFill>
+          <a:ln w="3175">
+            <a:solidFill>
+              <a:srgbClr val="000000"/>
+            </a:solidFill>
+          </a:ln>
+          <a:effectLst/>
+        </p:spPr>
+        <p:style>
+          <a:lnRef idx="1">
+            <a:schemeClr val="accent1"/>
+          </a:lnRef>
+          <a:fillRef idx="3">
+            <a:schemeClr val="accent1"/>
+          </a:fillRef>
+          <a:effectRef idx="2">
+            <a:schemeClr val="accent1"/>
+          </a:effectRef>
+          <a:fontRef idx="minor">
+            <a:schemeClr val="lt1"/>
+          </a:fontRef>
+        </p:style>
+        <p:txBody>
+          <a:bodyPr rtlCol="0" anchor="ctr"/>
+          <a:lstStyle/>
+          <a:p>
+            <a:pPr algn="ctr"/>
+          </a:p>
+        </p:txBody>
+      </p:sp>
+      <p:sp>
+        <p:nvSpPr>
+          <p:cNvPr id="31" name="Rectangle 30"/>
+          <p:cNvSpPr/>
+          <p:nvPr/>
+        </p:nvSpPr>
+        <p:spPr>
+          <a:xfrm>
+            <a:off x="1708760" y="1617320"/>
+            <a:ext cx="50000" cy="50000"/>
+          </a:xfrm>
+          <a:prstGeom prst="rect">
+            <a:avLst/>
+          </a:prstGeom>
+          <a:solidFill>
+            <a:srgbClr val="000000"/>
+          </a:solidFill>
+          <a:ln w="3175">
+            <a:solidFill>
+              <a:srgbClr val="000000"/>
+            </a:solidFill>
+          </a:ln>
+          <a:effectLst/>
+        </p:spPr>
+        <p:style>
+          <a:lnRef idx="1">
+            <a:schemeClr val="accent1"/>
+          </a:lnRef>
+          <a:fillRef idx="3">
+            <a:schemeClr val="accent1"/>
+          </a:fillRef>
+          <a:effectRef idx="2">
+            <a:schemeClr val="accent1"/>
+          </a:effectRef>
+          <a:fontRef idx="minor">
+            <a:schemeClr val="lt1"/>
+          </a:fontRef>
+        </p:style>
+        <p:txBody>
+          <a:bodyPr rtlCol="0" anchor="ctr"/>
+          <a:lstStyle/>
+          <a:p>
+            <a:pPr algn="ctr"/>
+          </a:p>
+        </p:txBody>
+      </p:sp>
+      <p:sp>
+        <p:nvSpPr>
+          <p:cNvPr id="32" name="Rectangle 31"/>
+          <p:cNvSpPr/>
+          <p:nvPr/>
+        </p:nvSpPr>
+        <p:spPr>
+          <a:xfrm>
+            <a:off x="1508760" y="1667320"/>
+            <a:ext cx="50000" cy="50000"/>
+          </a:xfrm>
+          <a:prstGeom prst="rect">
+            <a:avLst/>
+          </a:prstGeom>
+          <a:solidFill>
+            <a:srgbClr val="000000"/>
+          </a:solidFill>
+          <a:ln w="3175">
+            <a:solidFill>
+              <a:srgbClr val="000000"/>
+            </a:solidFill>
+          </a:ln>
+          <a:effectLst/>
+        </p:spPr>
+        <p:style>
+          <a:lnRef idx="1">
+            <a:schemeClr val="accent1"/>
+          </a:lnRef>
+          <a:fillRef idx="3">
+            <a:schemeClr val="accent1"/>
+          </a:fillRef>
+          <a:effectRef idx="2">
+            <a:schemeClr val="accent1"/>
+          </a:effectRef>
+          <a:fontRef idx="minor">
+            <a:schemeClr val="lt1"/>
+          </a:fontRef>
+        </p:style>
+        <p:txBody>
+          <a:bodyPr rtlCol="0" anchor="ctr"/>
+          <a:lstStyle/>
+          <a:p>
+            <a:pPr algn="ctr"/>
+          </a:p>
+        </p:txBody>
+      </p:sp>
+      <p:sp>
+        <p:nvSpPr>
+          <p:cNvPr id="33" name="Rectangle 32"/>
+          <p:cNvSpPr/>
+          <p:nvPr/>
+        </p:nvSpPr>
+        <p:spPr>
+          <a:xfrm>
+            <a:off x="1508760" y="1717320"/>
+            <a:ext cx="50000" cy="50000"/>
+          </a:xfrm>
+          <a:prstGeom prst="rect">
+            <a:avLst/>
+          </a:prstGeom>
+          <a:solidFill>
+            <a:srgbClr val="000000"/>
+          </a:solidFill>
+          <a:ln w="3175">
+            <a:solidFill>
+              <a:srgbClr val="000000"/>
+            </a:solidFill>
+          </a:ln>
+          <a:effectLst/>
+        </p:spPr>
+        <p:style>
+          <a:lnRef idx="1">
+            <a:schemeClr val="accent1"/>
+          </a:lnRef>
+          <a:fillRef idx="3">
+            <a:schemeClr val="accent1"/>
+          </a:fillRef>
+          <a:effectRef idx="2">
+            <a:schemeClr val="accent1"/>
+          </a:effectRef>
+          <a:fontRef idx="minor">
+            <a:schemeClr val="lt1"/>
+          </a:fontRef>
+        </p:style>
+        <p:txBody>
+          <a:bodyPr rtlCol="0" anchor="ctr"/>
+          <a:lstStyle/>
+          <a:p>
+            <a:pPr algn="ctr"/>
+          </a:p>
+        </p:txBody>
+      </p:sp>
+      <p:sp>
+        <p:nvSpPr>
+          <p:cNvPr id="34" name="Rectangle 33"/>
+          <p:cNvSpPr/>
+          <p:nvPr/>
+        </p:nvSpPr>
+        <p:spPr>
+          <a:xfrm>
+            <a:off x="1508760" y="1767320"/>
+            <a:ext cx="50000" cy="50000"/>
+          </a:xfrm>
+          <a:prstGeom prst="rect">
+            <a:avLst/>
+          </a:prstGeom>
+          <a:solidFill>
+            <a:srgbClr val="000000"/>
+          </a:solidFill>
+          <a:ln w="3175">
+            <a:solidFill>
+              <a:srgbClr val="000000"/>
+            </a:solidFill>
+          </a:ln>
+          <a:effectLst/>
+        </p:spPr>
+        <p:style>
+          <a:lnRef idx="1">
+            <a:schemeClr val="accent1"/>
+          </a:lnRef>
+          <a:fillRef idx="3">
+            <a:schemeClr val="accent1"/>
+          </a:fillRef>
+          <a:effectRef idx="2">
+            <a:schemeClr val="accent1"/>
+          </a:effectRef>
+          <a:fontRef idx="minor">
+            <a:schemeClr val="lt1"/>
+          </a:fontRef>
+        </p:style>
+        <p:txBody>
+          <a:bodyPr rtlCol="0" anchor="ctr"/>
+          <a:lstStyle/>
+          <a:p>
+            <a:pPr algn="ctr"/>
+          </a:p>
+        </p:txBody>
+      </p:sp>
+      <p:sp>
+        <p:nvSpPr>
+          <p:cNvPr id="35" name="Rectangle 34"/>
+          <p:cNvSpPr/>
+          <p:nvPr/>
+        </p:nvSpPr>
+        <p:spPr>
+          <a:xfrm>
+            <a:off x="1558760" y="1767320"/>
+            <a:ext cx="50000" cy="50000"/>
+          </a:xfrm>
+          <a:prstGeom prst="rect">
+            <a:avLst/>
+          </a:prstGeom>
+          <a:solidFill>
+            <a:srgbClr val="000000"/>
+          </a:solidFill>
+          <a:ln w="3175">
+            <a:solidFill>
+              <a:srgbClr val="000000"/>
+            </a:solidFill>
+          </a:ln>
+          <a:effectLst/>
+        </p:spPr>
+        <p:style>
+          <a:lnRef idx="1">
+            <a:schemeClr val="accent1"/>
+          </a:lnRef>
+          <a:fillRef idx="3">
+            <a:schemeClr val="accent1"/>
+          </a:fillRef>
+          <a:effectRef idx="2">
+            <a:schemeClr val="accent1"/>
+          </a:effectRef>
+          <a:fontRef idx="minor">
+            <a:schemeClr val="lt1"/>
+          </a:fontRef>
+        </p:style>
+        <p:txBody>
+          <a:bodyPr rtlCol="0" anchor="ctr"/>
+          <a:lstStyle/>
+          <a:p>
+            <a:pPr algn="ctr"/>
+          </a:p>
+        </p:txBody>
+      </p:sp>
+      <p:sp>
+        <p:nvSpPr>
+          <p:cNvPr id="36" name="Rectangle 35"/>
+          <p:cNvSpPr/>
+          <p:nvPr/>
+        </p:nvSpPr>
+        <p:spPr>
+          <a:xfrm>
+            <a:off x="1608760" y="1767320"/>
+            <a:ext cx="50000" cy="50000"/>
+          </a:xfrm>
+          <a:prstGeom prst="rect">
+            <a:avLst/>
+          </a:prstGeom>
+          <a:solidFill>
+            <a:srgbClr val="000000"/>
+          </a:solidFill>
+          <a:ln w="3175">
+            <a:solidFill>
+              <a:srgbClr val="000000"/>
+            </a:solidFill>
+          </a:ln>
+          <a:effectLst/>
+        </p:spPr>
+        <p:style>
+          <a:lnRef idx="1">
+            <a:schemeClr val="accent1"/>
+          </a:lnRef>
+          <a:fillRef idx="3">
+            <a:schemeClr val="accent1"/>
+          </a:fillRef>
+          <a:effectRef idx="2">
+            <a:schemeClr val="accent1"/>
+          </a:effectRef>
+          <a:fontRef idx="minor">
+            <a:schemeClr val="lt1"/>
+          </a:fontRef>
+        </p:style>
+        <p:txBody>
+          <a:bodyPr rtlCol="0" anchor="ctr"/>
+          <a:lstStyle/>
+          <a:p>
+            <a:pPr algn="ctr"/>
+          </a:p>
+        </p:txBody>
+      </p:sp>
+      <p:sp>
+        <p:nvSpPr>
+          <p:cNvPr id="37" name="Rectangle 36"/>
+          <p:cNvSpPr/>
+          <p:nvPr/>
+        </p:nvSpPr>
+        <p:spPr>
+          <a:xfrm>
+            <a:off x="1658760" y="1767320"/>
+            <a:ext cx="50000" cy="50000"/>
+          </a:xfrm>
+          <a:prstGeom prst="rect">
+            <a:avLst/>
+          </a:prstGeom>
+          <a:solidFill>
+            <a:srgbClr val="000000"/>
+          </a:solidFill>
+          <a:ln w="3175">
+            <a:solidFill>
+              <a:srgbClr val="000000"/>
+            </a:solidFill>
+          </a:ln>
+          <a:effectLst/>
+        </p:spPr>
+        <p:style>
+          <a:lnRef idx="1">
+            <a:schemeClr val="accent1"/>
+          </a:lnRef>
+          <a:fillRef idx="3">
+            <a:schemeClr val="accent1"/>
+          </a:fillRef>
+          <a:effectRef idx="2">
+            <a:schemeClr val="accent1"/>
+          </a:effectRef>
+          <a:fontRef idx="minor">
+            <a:schemeClr val="lt1"/>
+          </a:fontRef>
+        </p:style>
+        <p:txBody>
+          <a:bodyPr rtlCol="0" anchor="ctr"/>
+          <a:lstStyle/>
+          <a:p>
+            <a:pPr algn="ctr"/>
+          </a:p>
+        </p:txBody>
+      </p:sp>
+      <p:sp>
+        <p:nvSpPr>
+          <p:cNvPr id="38" name="Rectangle 37"/>
+          <p:cNvSpPr/>
+          <p:nvPr/>
+        </p:nvSpPr>
+        <p:spPr>
+          <a:xfrm>
+            <a:off x="1508760" y="1417320"/>
+            <a:ext cx="50000" cy="50000"/>
+          </a:xfrm>
+          <a:prstGeom prst="rect">
+            <a:avLst/>
+          </a:prstGeom>
+          <a:solidFill>
+            <a:srgbClr val="000000"/>
+          </a:solidFill>
+          <a:ln w="3175">
+            <a:solidFill>
+              <a:srgbClr val="000000"/>
+            </a:solidFill>
+          </a:ln>
+          <a:effectLst/>
+        </p:spPr>
+        <p:style>
+          <a:lnRef idx="1">
+            <a:schemeClr val="accent1"/>
+          </a:lnRef>
+          <a:fillRef idx="3">
+            <a:schemeClr val="accent1"/>
+          </a:fillRef>
+          <a:effectRef idx="2">
+            <a:schemeClr val="accent1"/>
+          </a:effectRef>
+          <a:fontRef idx="minor">
+            <a:schemeClr val="lt1"/>
+          </a:fontRef>
+        </p:style>
+        <p:txBody>
+          <a:bodyPr rtlCol="0" anchor="ctr"/>
+          <a:lstStyle/>
+          <a:p>
+            <a:pPr algn="ctr"/>
+          </a:p>
+        </p:txBody>
+      </p:sp>
+      <p:sp>
+        <p:nvSpPr>
+          <p:cNvPr id="39" name="Rectangle 38"/>
+          <p:cNvSpPr/>
+          <p:nvPr/>
+        </p:nvSpPr>
+        <p:spPr>
+          <a:xfrm>
+            <a:off x="1558760" y="1417320"/>
+            <a:ext cx="50000" cy="50000"/>
+          </a:xfrm>
+          <a:prstGeom prst="rect">
+            <a:avLst/>
+          </a:prstGeom>
+          <a:solidFill>
+            <a:srgbClr val="000000"/>
+          </a:solidFill>
+          <a:ln w="3175">
+            <a:solidFill>
+              <a:srgbClr val="000000"/>
+            </a:solidFill>
+          </a:ln>
+          <a:effectLst/>
+        </p:spPr>
+        <p:style>
+          <a:lnRef idx="1">
+            <a:schemeClr val="accent1"/>
+          </a:lnRef>
+          <a:fillRef idx="3">
+            <a:schemeClr val="accent1"/>
+          </a:fillRef>
+          <a:effectRef idx="2">
+            <a:schemeClr val="accent1"/>
+          </a:effectRef>
+          <a:fontRef idx="minor">
+            <a:schemeClr val="lt1"/>
+          </a:fontRef>
+        </p:style>
+        <p:txBody>
+          <a:bodyPr rtlCol="0" anchor="ctr"/>
+          <a:lstStyle/>
+          <a:p>
+            <a:pPr algn="ctr"/>
+          </a:p>
+        </p:txBody>
+      </p:sp>
+      <p:sp>
+        <p:nvSpPr>
+          <p:cNvPr id="40" name="Rectangle 39"/>
+          <p:cNvSpPr/>
+          <p:nvPr/>
+        </p:nvSpPr>
+        <p:spPr>
+          <a:xfrm>
+            <a:off x="1608760" y="1417320"/>
+            <a:ext cx="50000" cy="50000"/>
+          </a:xfrm>
+          <a:prstGeom prst="rect">
+            <a:avLst/>
+          </a:prstGeom>
+          <a:solidFill>
+            <a:srgbClr val="000000"/>
+          </a:solidFill>
+          <a:ln w="3175">
+            <a:solidFill>
+              <a:srgbClr val="000000"/>
+            </a:solidFill>
+          </a:ln>
+          <a:effectLst/>
+        </p:spPr>
+        <p:style>
+          <a:lnRef idx="1">
+            <a:schemeClr val="accent1"/>
+          </a:lnRef>
+          <a:fillRef idx="3">
+            <a:schemeClr val="accent1"/>
+          </a:fillRef>
+          <a:effectRef idx="2">
+            <a:schemeClr val="accent1"/>
+          </a:effectRef>
+          <a:fontRef idx="minor">
+            <a:schemeClr val="lt1"/>
+          </a:fontRef>
+        </p:style>
+        <p:txBody>
+          <a:bodyPr rtlCol="0" anchor="ctr"/>
+          <a:lstStyle/>
+          <a:p>
+            <a:pPr algn="ctr"/>
+          </a:p>
+        </p:txBody>
+      </p:sp>
+      <p:sp>
+        <p:nvSpPr>
+          <p:cNvPr id="41" name="Rectangle 40"/>
+          <p:cNvSpPr/>
+          <p:nvPr/>
+        </p:nvSpPr>
+        <p:spPr>
+          <a:xfrm>
+            <a:off x="1658760" y="1417320"/>
+            <a:ext cx="50000" cy="50000"/>
+          </a:xfrm>
+          <a:prstGeom prst="rect">
+            <a:avLst/>
+          </a:prstGeom>
+          <a:solidFill>
+            <a:srgbClr val="000000"/>
+          </a:solidFill>
+          <a:ln w="3175">
+            <a:solidFill>
+              <a:srgbClr val="000000"/>
+            </a:solidFill>
+          </a:ln>
+          <a:effectLst/>
+        </p:spPr>
+        <p:style>
+          <a:lnRef idx="1">
+            <a:schemeClr val="accent1"/>
+          </a:lnRef>
+          <a:fillRef idx="3">
+            <a:schemeClr val="accent1"/>
+          </a:fillRef>
+          <a:effectRef idx="2">
+            <a:schemeClr val="accent1"/>
+          </a:effectRef>
+          <a:fontRef idx="minor">
+            <a:schemeClr val="lt1"/>
+          </a:fontRef>
+        </p:style>
+        <p:txBody>
+          <a:bodyPr rtlCol="0" anchor="ctr"/>
+          <a:lstStyle/>
+          <a:p>
+            <a:pPr algn="ctr"/>
+          </a:p>
+        </p:txBody>
+      </p:sp>
+      <p:sp>
+        <p:nvSpPr>
+          <p:cNvPr id="42" name="Rectangle 41"/>
+          <p:cNvSpPr/>
+          <p:nvPr/>
+        </p:nvSpPr>
+        <p:spPr>
+          <a:xfrm>
+            <a:off x="1508760" y="1467320"/>
+            <a:ext cx="50000" cy="50000"/>
+          </a:xfrm>
+          <a:prstGeom prst="rect">
+            <a:avLst/>
+          </a:prstGeom>
+          <a:solidFill>
+            <a:srgbClr val="000000"/>
+          </a:solidFill>
+          <a:ln w="3175">
+            <a:solidFill>
+              <a:srgbClr val="000000"/>
+            </a:solidFill>
+          </a:ln>
+          <a:effectLst/>
+        </p:spPr>
+        <p:style>
+          <a:lnRef idx="1">
+            <a:schemeClr val="accent1"/>
+          </a:lnRef>
+          <a:fillRef idx="3">
+            <a:schemeClr val="accent1"/>
+          </a:fillRef>
+          <a:effectRef idx="2">
+            <a:schemeClr val="accent1"/>
+          </a:effectRef>
+          <a:fontRef idx="minor">
+            <a:schemeClr val="lt1"/>
+          </a:fontRef>
+        </p:style>
+        <p:txBody>
+          <a:bodyPr rtlCol="0" anchor="ctr"/>
+          <a:lstStyle/>
+          <a:p>
+            <a:pPr algn="ctr"/>
+          </a:p>
+        </p:txBody>
+      </p:sp>
+      <p:sp>
+        <p:nvSpPr>
+          <p:cNvPr id="43" name="Rectangle 42"/>
+          <p:cNvSpPr/>
+          <p:nvPr/>
+        </p:nvSpPr>
+        <p:spPr>
+          <a:xfrm>
+            <a:off x="1708760" y="1467320"/>
+            <a:ext cx="50000" cy="50000"/>
+          </a:xfrm>
+          <a:prstGeom prst="rect">
+            <a:avLst/>
+          </a:prstGeom>
+          <a:solidFill>
+            <a:srgbClr val="000000"/>
+          </a:solidFill>
+          <a:ln w="3175">
+            <a:solidFill>
+              <a:srgbClr val="000000"/>
+            </a:solidFill>
+          </a:ln>
+          <a:effectLst/>
+        </p:spPr>
+        <p:style>
+          <a:lnRef idx="1">
+            <a:schemeClr val="accent1"/>
+          </a:lnRef>
+          <a:fillRef idx="3">
+            <a:schemeClr val="accent1"/>
+          </a:fillRef>
+          <a:effectRef idx="2">
+            <a:schemeClr val="accent1"/>
+          </a:effectRef>
+          <a:fontRef idx="minor">
+            <a:schemeClr val="lt1"/>
+          </a:fontRef>
+        </p:style>
+        <p:txBody>
+          <a:bodyPr rtlCol="0" anchor="ctr"/>
+          <a:lstStyle/>
+          <a:p>
+            <a:pPr algn="ctr"/>
+          </a:p>
+        </p:txBody>
+      </p:sp>
+      <p:sp>
+        <p:nvSpPr>
+          <p:cNvPr id="44" name="Rectangle 43"/>
+          <p:cNvSpPr/>
+          <p:nvPr/>
+        </p:nvSpPr>
+        <p:spPr>
+          <a:xfrm>
+            <a:off x="1508760" y="1517320"/>
+            <a:ext cx="50000" cy="50000"/>
+          </a:xfrm>
+          <a:prstGeom prst="rect">
+            <a:avLst/>
+          </a:prstGeom>
+          <a:solidFill>
+            <a:srgbClr val="000000"/>
+          </a:solidFill>
+          <a:ln w="3175">
+            <a:solidFill>
+              <a:srgbClr val="000000"/>
+            </a:solidFill>
+          </a:ln>
+          <a:effectLst/>
+        </p:spPr>
+        <p:style>
+          <a:lnRef idx="1">
+            <a:schemeClr val="accent1"/>
+          </a:lnRef>
+          <a:fillRef idx="3">
+            <a:schemeClr val="accent1"/>
+          </a:fillRef>
+          <a:effectRef idx="2">
+            <a:schemeClr val="accent1"/>
+          </a:effectRef>
+          <a:fontRef idx="minor">
+            <a:schemeClr val="lt1"/>
+          </a:fontRef>
+        </p:style>
+        <p:txBody>
+          <a:bodyPr rtlCol="0" anchor="ctr"/>
+          <a:lstStyle/>
+          <a:p>
+            <a:pPr algn="ctr"/>
+          </a:p>
+        </p:txBody>
+      </p:sp>
+      <p:sp>
+        <p:nvSpPr>
+          <p:cNvPr id="45" name="Rectangle 44"/>
+          <p:cNvSpPr/>
+          <p:nvPr/>
+        </p:nvSpPr>
+        <p:spPr>
+          <a:xfrm>
+            <a:off x="1708760" y="1517320"/>
+            <a:ext cx="50000" cy="50000"/>
+          </a:xfrm>
+          <a:prstGeom prst="rect">
+            <a:avLst/>
+          </a:prstGeom>
+          <a:solidFill>
+            <a:srgbClr val="000000"/>
+          </a:solidFill>
+          <a:ln w="3175">
+            <a:solidFill>
+              <a:srgbClr val="000000"/>
+            </a:solidFill>
+          </a:ln>
+          <a:effectLst/>
+        </p:spPr>
+        <p:style>
+          <a:lnRef idx="1">
+            <a:schemeClr val="accent1"/>
+          </a:lnRef>
+          <a:fillRef idx="3">
+            <a:schemeClr val="accent1"/>
+          </a:fillRef>
+          <a:effectRef idx="2">
+            <a:schemeClr val="accent1"/>
+          </a:effectRef>
+          <a:fontRef idx="minor">
+            <a:schemeClr val="lt1"/>
+          </a:fontRef>
+        </p:style>
+        <p:txBody>
+          <a:bodyPr rtlCol="0" anchor="ctr"/>
+          <a:lstStyle/>
+          <a:p>
+            <a:pPr algn="ctr"/>
+          </a:p>
+        </p:txBody>
+      </p:sp>
+      <p:sp>
+        <p:nvSpPr>
+          <p:cNvPr id="46" name="Rectangle 45"/>
+          <p:cNvSpPr/>
+          <p:nvPr/>
+        </p:nvSpPr>
+        <p:spPr>
+          <a:xfrm>
+            <a:off x="1558760" y="1567320"/>
+            <a:ext cx="50000" cy="50000"/>
+          </a:xfrm>
+          <a:prstGeom prst="rect">
+            <a:avLst/>
+          </a:prstGeom>
+          <a:solidFill>
+            <a:srgbClr val="000000"/>
+          </a:solidFill>
+          <a:ln w="3175">
+            <a:solidFill>
+              <a:srgbClr val="000000"/>
+            </a:solidFill>
+          </a:ln>
+          <a:effectLst/>
+        </p:spPr>
+        <p:style>
+          <a:lnRef idx="1">
+            <a:schemeClr val="accent1"/>
+          </a:lnRef>
+          <a:fillRef idx="3">
+            <a:schemeClr val="accent1"/>
+          </a:fillRef>
+          <a:effectRef idx="2">
+            <a:schemeClr val="accent1"/>
+          </a:effectRef>
+          <a:fontRef idx="minor">
+            <a:schemeClr val="lt1"/>
+          </a:fontRef>
+        </p:style>
+        <p:txBody>
+          <a:bodyPr rtlCol="0" anchor="ctr"/>
+          <a:lstStyle/>
+          <a:p>
+            <a:pPr algn="ctr"/>
+          </a:p>
+        </p:txBody>
+      </p:sp>
+      <p:sp>
+        <p:nvSpPr>
+          <p:cNvPr id="47" name="Rectangle 46"/>
+          <p:cNvSpPr/>
+          <p:nvPr/>
+        </p:nvSpPr>
+        <p:spPr>
+          <a:xfrm>
+            <a:off x="1608760" y="1567320"/>
+            <a:ext cx="50000" cy="50000"/>
+          </a:xfrm>
+          <a:prstGeom prst="rect">
+            <a:avLst/>
+          </a:prstGeom>
+          <a:solidFill>
+            <a:srgbClr val="000000"/>
+          </a:solidFill>
+          <a:ln w="3175">
+            <a:solidFill>
+              <a:srgbClr val="000000"/>
+            </a:solidFill>
+          </a:ln>
+          <a:effectLst/>
+        </p:spPr>
+        <p:style>
+          <a:lnRef idx="1">
+            <a:schemeClr val="accent1"/>
+          </a:lnRef>
+          <a:fillRef idx="3">
+            <a:schemeClr val="accent1"/>
+          </a:fillRef>
+          <a:effectRef idx="2">
+            <a:schemeClr val="accent1"/>
+          </a:effectRef>
+          <a:fontRef idx="minor">
+            <a:schemeClr val="lt1"/>
+          </a:fontRef>
+        </p:style>
+        <p:txBody>
+          <a:bodyPr rtlCol="0" anchor="ctr"/>
+          <a:lstStyle/>
+          <a:p>
+            <a:pPr algn="ctr"/>
+          </a:p>
+        </p:txBody>
+      </p:sp>
+      <p:sp>
+        <p:nvSpPr>
+          <p:cNvPr id="48" name="Rectangle 47"/>
+          <p:cNvSpPr/>
+          <p:nvPr/>
+        </p:nvSpPr>
+        <p:spPr>
+          <a:xfrm>
+            <a:off x="1658760" y="1567320"/>
+            <a:ext cx="50000" cy="50000"/>
+          </a:xfrm>
+          <a:prstGeom prst="rect">
+            <a:avLst/>
+          </a:prstGeom>
+          <a:solidFill>
+            <a:srgbClr val="000000"/>
+          </a:solidFill>
+          <a:ln w="3175">
+            <a:solidFill>
+              <a:srgbClr val="000000"/>
+            </a:solidFill>
+          </a:ln>
+          <a:effectLst/>
+        </p:spPr>
+        <p:style>
+          <a:lnRef idx="1">
+            <a:schemeClr val="accent1"/>
+          </a:lnRef>
+          <a:fillRef idx="3">
+            <a:schemeClr val="accent1"/>
+          </a:fillRef>
+          <a:effectRef idx="2">
+            <a:schemeClr val="accent1"/>
+          </a:effectRef>
+          <a:fontRef idx="minor">
+            <a:schemeClr val="lt1"/>
+          </a:fontRef>
+        </p:style>
+        <p:txBody>
+          <a:bodyPr rtlCol="0" anchor="ctr"/>
+          <a:lstStyle/>
+          <a:p>
+            <a:pPr algn="ctr"/>
+          </a:p>
+        </p:txBody>
+      </p:sp>
+      <p:sp>
+        <p:nvSpPr>
+          <p:cNvPr id="49" name="TextBox 48"/>
+          <p:cNvSpPr txBox="1"/>
+          <p:nvPr/>
+        </p:nvSpPr>
+        <p:spPr>
+          <a:xfrm>
+            <a:off x="1488760" y="1863040"/>
+            <a:ext cx="290000" cy="457200"/>
+          </a:xfrm>
+          <a:prstGeom prst="rect">
+            <a:avLst/>
+          </a:prstGeom>
+          <a:noFill/>
+        </p:spPr>
+        <p:txBody>
+          <a:bodyPr wrap="square" anchor="t" lIns="0" rIns="0" tIns="0" bIns="0">
+            <a:spAutoFit/>
+          </a:bodyPr>
+          <a:lstStyle/>
+          <a:p>
+            <a:pPr algn="ctr"/>
+            <a:r>
+              <a:rPr sz="900" b="0">
+                <a:solidFill>
+                  <a:srgbClr val="000000"/>
+                </a:solidFill>
+                <a:latin typeface="맑은 고딕"/>
+              </a:rPr>
+              <a:t>t = 200 ms
+(슬라이드 중)</a:t>
+            </a:r>
+          </a:p>
+        </p:txBody>
+      </p:sp>
+      <p:cxnSp>
+        <p:nvCxnSpPr>
+          <p:cNvPr id="50" name="Connector 49"/>
+          <p:cNvCxnSpPr/>
+          <p:nvPr/>
+        </p:nvCxnSpPr>
+        <p:spPr>
+          <a:xfrm>
+            <a:off x="1778760" y="1617320"/>
+            <a:ext cx="863000" cy="0"/>
+          </a:xfrm>
+          <a:prstGeom prst="line">
+            <a:avLst/>
+          </a:prstGeom>
+          <a:ln w="12700">
+            <a:solidFill>
+              <a:srgbClr val="000000"/>
+            </a:solidFill>
+            <a:tailEnd type="triangle" w="med" h="med"/>
+          </a:ln>
+        </p:spPr>
+        <p:style>
+          <a:lnRef idx="2">
+            <a:schemeClr val="accent1"/>
+          </a:lnRef>
+          <a:fillRef idx="0">
+            <a:schemeClr val="accent1"/>
+          </a:fillRef>
+          <a:effectRef idx="1">
+            <a:schemeClr val="accent1"/>
+          </a:effectRef>
+          <a:fontRef idx="minor">
+            <a:schemeClr val="tx1"/>
+          </a:fontRef>
+        </p:style>
+      </p:cxnSp>
+      <p:sp>
+        <p:nvSpPr>
+          <p:cNvPr id="51" name="Rectangle 50"/>
+          <p:cNvSpPr/>
+          <p:nvPr/>
+        </p:nvSpPr>
+        <p:spPr>
+          <a:xfrm>
+            <a:off x="2651760" y="1417320"/>
+            <a:ext cx="250000" cy="400000"/>
+          </a:xfrm>
+          <a:prstGeom prst="rect">
+            <a:avLst/>
+          </a:prstGeom>
+          <a:noFill/>
+          <a:ln w="6350">
+            <a:solidFill>
+              <a:srgbClr val="000000"/>
+            </a:solidFill>
+          </a:ln>
+          <a:effectLst/>
+        </p:spPr>
+        <p:style>
+          <a:lnRef idx="1">
+            <a:schemeClr val="accent1"/>
+          </a:lnRef>
+          <a:fillRef idx="3">
+            <a:schemeClr val="accent1"/>
+          </a:fillRef>
+          <a:effectRef idx="2">
+            <a:schemeClr val="accent1"/>
+          </a:effectRef>
+          <a:fontRef idx="minor">
+            <a:schemeClr val="lt1"/>
+          </a:fontRef>
+        </p:style>
+        <p:txBody>
+          <a:bodyPr rtlCol="0" anchor="ctr"/>
+          <a:lstStyle/>
+          <a:p>
+            <a:pPr algn="ctr"/>
+          </a:p>
+        </p:txBody>
+      </p:sp>
+      <p:sp>
+        <p:nvSpPr>
+          <p:cNvPr id="52" name="Rectangle 51"/>
+          <p:cNvSpPr/>
+          <p:nvPr/>
+        </p:nvSpPr>
+        <p:spPr>
+          <a:xfrm>
+            <a:off x="2651760" y="1717320"/>
+            <a:ext cx="50000" cy="50000"/>
+          </a:xfrm>
+          <a:prstGeom prst="rect">
+            <a:avLst/>
+          </a:prstGeom>
+          <a:solidFill>
+            <a:srgbClr val="000000"/>
+          </a:solidFill>
+          <a:ln w="3175">
+            <a:solidFill>
+              <a:srgbClr val="000000"/>
+            </a:solidFill>
+          </a:ln>
+          <a:effectLst/>
+        </p:spPr>
+        <p:style>
+          <a:lnRef idx="1">
+            <a:schemeClr val="accent1"/>
+          </a:lnRef>
+          <a:fillRef idx="3">
+            <a:schemeClr val="accent1"/>
+          </a:fillRef>
+          <a:effectRef idx="2">
+            <a:schemeClr val="accent1"/>
+          </a:effectRef>
+          <a:fontRef idx="minor">
+            <a:schemeClr val="lt1"/>
+          </a:fontRef>
+        </p:style>
+        <p:txBody>
+          <a:bodyPr rtlCol="0" anchor="ctr"/>
+          <a:lstStyle/>
+          <a:p>
+            <a:pPr algn="ctr"/>
+          </a:p>
+        </p:txBody>
+      </p:sp>
+      <p:sp>
+        <p:nvSpPr>
+          <p:cNvPr id="53" name="Rectangle 52"/>
+          <p:cNvSpPr/>
+          <p:nvPr/>
+        </p:nvSpPr>
+        <p:spPr>
+          <a:xfrm>
+            <a:off x="2701760" y="1717320"/>
+            <a:ext cx="50000" cy="50000"/>
+          </a:xfrm>
+          <a:prstGeom prst="rect">
+            <a:avLst/>
+          </a:prstGeom>
+          <a:solidFill>
+            <a:srgbClr val="000000"/>
+          </a:solidFill>
+          <a:ln w="3175">
+            <a:solidFill>
+              <a:srgbClr val="000000"/>
+            </a:solidFill>
+          </a:ln>
+          <a:effectLst/>
+        </p:spPr>
+        <p:style>
+          <a:lnRef idx="1">
+            <a:schemeClr val="accent1"/>
+          </a:lnRef>
+          <a:fillRef idx="3">
+            <a:schemeClr val="accent1"/>
+          </a:fillRef>
+          <a:effectRef idx="2">
+            <a:schemeClr val="accent1"/>
+          </a:effectRef>
+          <a:fontRef idx="minor">
+            <a:schemeClr val="lt1"/>
+          </a:fontRef>
+        </p:style>
+        <p:txBody>
+          <a:bodyPr rtlCol="0" anchor="ctr"/>
+          <a:lstStyle/>
+          <a:p>
+            <a:pPr algn="ctr"/>
+          </a:p>
+        </p:txBody>
+      </p:sp>
+      <p:sp>
+        <p:nvSpPr>
+          <p:cNvPr id="54" name="Rectangle 53"/>
+          <p:cNvSpPr/>
+          <p:nvPr/>
+        </p:nvSpPr>
+        <p:spPr>
+          <a:xfrm>
+            <a:off x="2751760" y="1717320"/>
+            <a:ext cx="50000" cy="50000"/>
+          </a:xfrm>
+          <a:prstGeom prst="rect">
+            <a:avLst/>
+          </a:prstGeom>
+          <a:solidFill>
+            <a:srgbClr val="000000"/>
+          </a:solidFill>
+          <a:ln w="3175">
+            <a:solidFill>
+              <a:srgbClr val="000000"/>
+            </a:solidFill>
+          </a:ln>
+          <a:effectLst/>
+        </p:spPr>
+        <p:style>
+          <a:lnRef idx="1">
+            <a:schemeClr val="accent1"/>
+          </a:lnRef>
+          <a:fillRef idx="3">
+            <a:schemeClr val="accent1"/>
+          </a:fillRef>
+          <a:effectRef idx="2">
+            <a:schemeClr val="accent1"/>
+          </a:effectRef>
+          <a:fontRef idx="minor">
+            <a:schemeClr val="lt1"/>
+          </a:fontRef>
+        </p:style>
+        <p:txBody>
+          <a:bodyPr rtlCol="0" anchor="ctr"/>
+          <a:lstStyle/>
+          <a:p>
+            <a:pPr algn="ctr"/>
+          </a:p>
+        </p:txBody>
+      </p:sp>
+      <p:sp>
+        <p:nvSpPr>
+          <p:cNvPr id="55" name="Rectangle 54"/>
+          <p:cNvSpPr/>
+          <p:nvPr/>
+        </p:nvSpPr>
+        <p:spPr>
+          <a:xfrm>
+            <a:off x="2801760" y="1717320"/>
+            <a:ext cx="50000" cy="50000"/>
+          </a:xfrm>
+          <a:prstGeom prst="rect">
+            <a:avLst/>
+          </a:prstGeom>
+          <a:solidFill>
+            <a:srgbClr val="000000"/>
+          </a:solidFill>
+          <a:ln w="3175">
+            <a:solidFill>
+              <a:srgbClr val="000000"/>
+            </a:solidFill>
+          </a:ln>
+          <a:effectLst/>
+        </p:spPr>
+        <p:style>
+          <a:lnRef idx="1">
+            <a:schemeClr val="accent1"/>
+          </a:lnRef>
+          <a:fillRef idx="3">
+            <a:schemeClr val="accent1"/>
+          </a:fillRef>
+          <a:effectRef idx="2">
+            <a:schemeClr val="accent1"/>
+          </a:effectRef>
+          <a:fontRef idx="minor">
+            <a:schemeClr val="lt1"/>
+          </a:fontRef>
+        </p:style>
+        <p:txBody>
+          <a:bodyPr rtlCol="0" anchor="ctr"/>
+          <a:lstStyle/>
+          <a:p>
+            <a:pPr algn="ctr"/>
+          </a:p>
+        </p:txBody>
+      </p:sp>
+      <p:sp>
+        <p:nvSpPr>
+          <p:cNvPr id="56" name="Rectangle 55"/>
+          <p:cNvSpPr/>
+          <p:nvPr/>
+        </p:nvSpPr>
+        <p:spPr>
+          <a:xfrm>
+            <a:off x="2851760" y="1717320"/>
+            <a:ext cx="50000" cy="50000"/>
+          </a:xfrm>
+          <a:prstGeom prst="rect">
+            <a:avLst/>
+          </a:prstGeom>
+          <a:solidFill>
+            <a:srgbClr val="000000"/>
+          </a:solidFill>
+          <a:ln w="3175">
+            <a:solidFill>
+              <a:srgbClr val="000000"/>
+            </a:solidFill>
+          </a:ln>
+          <a:effectLst/>
+        </p:spPr>
+        <p:style>
+          <a:lnRef idx="1">
+            <a:schemeClr val="accent1"/>
+          </a:lnRef>
+          <a:fillRef idx="3">
+            <a:schemeClr val="accent1"/>
+          </a:fillRef>
+          <a:effectRef idx="2">
+            <a:schemeClr val="accent1"/>
+          </a:effectRef>
+          <a:fontRef idx="minor">
+            <a:schemeClr val="lt1"/>
+          </a:fontRef>
+        </p:style>
+        <p:txBody>
+          <a:bodyPr rtlCol="0" anchor="ctr"/>
+          <a:lstStyle/>
+          <a:p>
+            <a:pPr algn="ctr"/>
+          </a:p>
+        </p:txBody>
+      </p:sp>
+      <p:sp>
+        <p:nvSpPr>
+          <p:cNvPr id="57" name="Rectangle 56"/>
+          <p:cNvSpPr/>
+          <p:nvPr/>
+        </p:nvSpPr>
+        <p:spPr>
+          <a:xfrm>
+            <a:off x="2651760" y="1767320"/>
+            <a:ext cx="50000" cy="50000"/>
+          </a:xfrm>
+          <a:prstGeom prst="rect">
+            <a:avLst/>
+          </a:prstGeom>
+          <a:solidFill>
+            <a:srgbClr val="000000"/>
+          </a:solidFill>
+          <a:ln w="3175">
+            <a:solidFill>
+              <a:srgbClr val="000000"/>
+            </a:solidFill>
+          </a:ln>
+          <a:effectLst/>
+        </p:spPr>
+        <p:style>
+          <a:lnRef idx="1">
+            <a:schemeClr val="accent1"/>
+          </a:lnRef>
+          <a:fillRef idx="3">
+            <a:schemeClr val="accent1"/>
+          </a:fillRef>
+          <a:effectRef idx="2">
+            <a:schemeClr val="accent1"/>
+          </a:effectRef>
+          <a:fontRef idx="minor">
+            <a:schemeClr val="lt1"/>
+          </a:fontRef>
+        </p:style>
+        <p:txBody>
+          <a:bodyPr rtlCol="0" anchor="ctr"/>
+          <a:lstStyle/>
+          <a:p>
+            <a:pPr algn="ctr"/>
+          </a:p>
+        </p:txBody>
+      </p:sp>
+      <p:sp>
+        <p:nvSpPr>
+          <p:cNvPr id="58" name="Rectangle 57"/>
+          <p:cNvSpPr/>
+          <p:nvPr/>
+        </p:nvSpPr>
+        <p:spPr>
+          <a:xfrm>
+            <a:off x="2651760" y="1417320"/>
+            <a:ext cx="50000" cy="50000"/>
+          </a:xfrm>
+          <a:prstGeom prst="rect">
+            <a:avLst/>
+          </a:prstGeom>
+          <a:solidFill>
+            <a:srgbClr val="000000"/>
+          </a:solidFill>
+          <a:ln w="3175">
+            <a:solidFill>
+              <a:srgbClr val="000000"/>
+            </a:solidFill>
+          </a:ln>
+          <a:effectLst/>
+        </p:spPr>
+        <p:style>
+          <a:lnRef idx="1">
+            <a:schemeClr val="accent1"/>
+          </a:lnRef>
+          <a:fillRef idx="3">
+            <a:schemeClr val="accent1"/>
+          </a:fillRef>
+          <a:effectRef idx="2">
+            <a:schemeClr val="accent1"/>
+          </a:effectRef>
+          <a:fontRef idx="minor">
+            <a:schemeClr val="lt1"/>
+          </a:fontRef>
+        </p:style>
+        <p:txBody>
+          <a:bodyPr rtlCol="0" anchor="ctr"/>
+          <a:lstStyle/>
+          <a:p>
+            <a:pPr algn="ctr"/>
+          </a:p>
+        </p:txBody>
+      </p:sp>
+      <p:sp>
+        <p:nvSpPr>
+          <p:cNvPr id="59" name="Rectangle 58"/>
+          <p:cNvSpPr/>
+          <p:nvPr/>
+        </p:nvSpPr>
+        <p:spPr>
+          <a:xfrm>
+            <a:off x="2651760" y="1467320"/>
+            <a:ext cx="50000" cy="50000"/>
+          </a:xfrm>
+          <a:prstGeom prst="rect">
+            <a:avLst/>
+          </a:prstGeom>
+          <a:solidFill>
+            <a:srgbClr val="000000"/>
+          </a:solidFill>
+          <a:ln w="3175">
+            <a:solidFill>
+              <a:srgbClr val="000000"/>
+            </a:solidFill>
+          </a:ln>
+          <a:effectLst/>
+        </p:spPr>
+        <p:style>
+          <a:lnRef idx="1">
+            <a:schemeClr val="accent1"/>
+          </a:lnRef>
+          <a:fillRef idx="3">
+            <a:schemeClr val="accent1"/>
+          </a:fillRef>
+          <a:effectRef idx="2">
+            <a:schemeClr val="accent1"/>
+          </a:effectRef>
+          <a:fontRef idx="minor">
+            <a:schemeClr val="lt1"/>
+          </a:fontRef>
+        </p:style>
+        <p:txBody>
+          <a:bodyPr rtlCol="0" anchor="ctr"/>
+          <a:lstStyle/>
+          <a:p>
+            <a:pPr algn="ctr"/>
+          </a:p>
+        </p:txBody>
+      </p:sp>
+      <p:sp>
+        <p:nvSpPr>
+          <p:cNvPr id="60" name="Rectangle 59"/>
+          <p:cNvSpPr/>
+          <p:nvPr/>
+        </p:nvSpPr>
+        <p:spPr>
+          <a:xfrm>
+            <a:off x="2651760" y="1517320"/>
+            <a:ext cx="50000" cy="50000"/>
+          </a:xfrm>
+          <a:prstGeom prst="rect">
+            <a:avLst/>
+          </a:prstGeom>
+          <a:solidFill>
+            <a:srgbClr val="000000"/>
+          </a:solidFill>
+          <a:ln w="3175">
+            <a:solidFill>
+              <a:srgbClr val="000000"/>
+            </a:solidFill>
+          </a:ln>
+          <a:effectLst/>
+        </p:spPr>
+        <p:style>
+          <a:lnRef idx="1">
+            <a:schemeClr val="accent1"/>
+          </a:lnRef>
+          <a:fillRef idx="3">
+            <a:schemeClr val="accent1"/>
+          </a:fillRef>
+          <a:effectRef idx="2">
+            <a:schemeClr val="accent1"/>
+          </a:effectRef>
+          <a:fontRef idx="minor">
+            <a:schemeClr val="lt1"/>
+          </a:fontRef>
+        </p:style>
+        <p:txBody>
+          <a:bodyPr rtlCol="0" anchor="ctr"/>
+          <a:lstStyle/>
+          <a:p>
+            <a:pPr algn="ctr"/>
+          </a:p>
+        </p:txBody>
+      </p:sp>
+      <p:sp>
+        <p:nvSpPr>
+          <p:cNvPr id="61" name="Rectangle 60"/>
+          <p:cNvSpPr/>
+          <p:nvPr/>
+        </p:nvSpPr>
+        <p:spPr>
+          <a:xfrm>
+            <a:off x="2701760" y="1517320"/>
+            <a:ext cx="50000" cy="50000"/>
+          </a:xfrm>
+          <a:prstGeom prst="rect">
+            <a:avLst/>
+          </a:prstGeom>
+          <a:solidFill>
+            <a:srgbClr val="000000"/>
+          </a:solidFill>
+          <a:ln w="3175">
+            <a:solidFill>
+              <a:srgbClr val="000000"/>
+            </a:solidFill>
+          </a:ln>
+          <a:effectLst/>
+        </p:spPr>
+        <p:style>
+          <a:lnRef idx="1">
+            <a:schemeClr val="accent1"/>
+          </a:lnRef>
+          <a:fillRef idx="3">
+            <a:schemeClr val="accent1"/>
+          </a:fillRef>
+          <a:effectRef idx="2">
+            <a:schemeClr val="accent1"/>
+          </a:effectRef>
+          <a:fontRef idx="minor">
+            <a:schemeClr val="lt1"/>
+          </a:fontRef>
+        </p:style>
+        <p:txBody>
+          <a:bodyPr rtlCol="0" anchor="ctr"/>
+          <a:lstStyle/>
+          <a:p>
+            <a:pPr algn="ctr"/>
+          </a:p>
+        </p:txBody>
+      </p:sp>
+      <p:sp>
+        <p:nvSpPr>
+          <p:cNvPr id="62" name="Rectangle 61"/>
+          <p:cNvSpPr/>
+          <p:nvPr/>
+        </p:nvSpPr>
+        <p:spPr>
+          <a:xfrm>
+            <a:off x="2751760" y="1517320"/>
+            <a:ext cx="50000" cy="50000"/>
+          </a:xfrm>
+          <a:prstGeom prst="rect">
+            <a:avLst/>
+          </a:prstGeom>
+          <a:solidFill>
+            <a:srgbClr val="000000"/>
+          </a:solidFill>
+          <a:ln w="3175">
+            <a:solidFill>
+              <a:srgbClr val="000000"/>
+            </a:solidFill>
+          </a:ln>
+          <a:effectLst/>
+        </p:spPr>
+        <p:style>
+          <a:lnRef idx="1">
+            <a:schemeClr val="accent1"/>
+          </a:lnRef>
+          <a:fillRef idx="3">
+            <a:schemeClr val="accent1"/>
+          </a:fillRef>
+          <a:effectRef idx="2">
+            <a:schemeClr val="accent1"/>
+          </a:effectRef>
+          <a:fontRef idx="minor">
+            <a:schemeClr val="lt1"/>
+          </a:fontRef>
+        </p:style>
+        <p:txBody>
+          <a:bodyPr rtlCol="0" anchor="ctr"/>
+          <a:lstStyle/>
+          <a:p>
+            <a:pPr algn="ctr"/>
+          </a:p>
+        </p:txBody>
+      </p:sp>
+      <p:sp>
+        <p:nvSpPr>
+          <p:cNvPr id="63" name="Rectangle 62"/>
+          <p:cNvSpPr/>
+          <p:nvPr/>
+        </p:nvSpPr>
+        <p:spPr>
+          <a:xfrm>
+            <a:off x="2801760" y="1517320"/>
+            <a:ext cx="50000" cy="50000"/>
+          </a:xfrm>
+          <a:prstGeom prst="rect">
+            <a:avLst/>
+          </a:prstGeom>
+          <a:solidFill>
+            <a:srgbClr val="000000"/>
+          </a:solidFill>
+          <a:ln w="3175">
+            <a:solidFill>
+              <a:srgbClr val="000000"/>
+            </a:solidFill>
+          </a:ln>
+          <a:effectLst/>
+        </p:spPr>
+        <p:style>
+          <a:lnRef idx="1">
+            <a:schemeClr val="accent1"/>
+          </a:lnRef>
+          <a:fillRef idx="3">
+            <a:schemeClr val="accent1"/>
+          </a:fillRef>
+          <a:effectRef idx="2">
+            <a:schemeClr val="accent1"/>
+          </a:effectRef>
+          <a:fontRef idx="minor">
+            <a:schemeClr val="lt1"/>
+          </a:fontRef>
+        </p:style>
+        <p:txBody>
+          <a:bodyPr rtlCol="0" anchor="ctr"/>
+          <a:lstStyle/>
+          <a:p>
+            <a:pPr algn="ctr"/>
+          </a:p>
+        </p:txBody>
+      </p:sp>
+      <p:sp>
+        <p:nvSpPr>
+          <p:cNvPr id="64" name="Rectangle 63"/>
+          <p:cNvSpPr/>
+          <p:nvPr/>
+        </p:nvSpPr>
+        <p:spPr>
+          <a:xfrm>
+            <a:off x="2651760" y="1567320"/>
+            <a:ext cx="50000" cy="50000"/>
+          </a:xfrm>
+          <a:prstGeom prst="rect">
+            <a:avLst/>
+          </a:prstGeom>
+          <a:solidFill>
+            <a:srgbClr val="000000"/>
+          </a:solidFill>
+          <a:ln w="3175">
+            <a:solidFill>
+              <a:srgbClr val="000000"/>
+            </a:solidFill>
+          </a:ln>
+          <a:effectLst/>
+        </p:spPr>
+        <p:style>
+          <a:lnRef idx="1">
+            <a:schemeClr val="accent1"/>
+          </a:lnRef>
+          <a:fillRef idx="3">
+            <a:schemeClr val="accent1"/>
+          </a:fillRef>
+          <a:effectRef idx="2">
+            <a:schemeClr val="accent1"/>
+          </a:effectRef>
+          <a:fontRef idx="minor">
+            <a:schemeClr val="lt1"/>
+          </a:fontRef>
+        </p:style>
+        <p:txBody>
+          <a:bodyPr rtlCol="0" anchor="ctr"/>
+          <a:lstStyle/>
+          <a:p>
+            <a:pPr algn="ctr"/>
+          </a:p>
+        </p:txBody>
+      </p:sp>
+      <p:sp>
+        <p:nvSpPr>
+          <p:cNvPr id="65" name="Rectangle 64"/>
+          <p:cNvSpPr/>
+          <p:nvPr/>
+        </p:nvSpPr>
+        <p:spPr>
+          <a:xfrm>
+            <a:off x="2851760" y="1567320"/>
+            <a:ext cx="50000" cy="50000"/>
+          </a:xfrm>
+          <a:prstGeom prst="rect">
+            <a:avLst/>
+          </a:prstGeom>
+          <a:solidFill>
+            <a:srgbClr val="000000"/>
+          </a:solidFill>
+          <a:ln w="3175">
+            <a:solidFill>
+              <a:srgbClr val="000000"/>
+            </a:solidFill>
+          </a:ln>
+          <a:effectLst/>
+        </p:spPr>
+        <p:style>
+          <a:lnRef idx="1">
+            <a:schemeClr val="accent1"/>
+          </a:lnRef>
+          <a:fillRef idx="3">
+            <a:schemeClr val="accent1"/>
+          </a:fillRef>
+          <a:effectRef idx="2">
+            <a:schemeClr val="accent1"/>
+          </a:effectRef>
+          <a:fontRef idx="minor">
+            <a:schemeClr val="lt1"/>
+          </a:fontRef>
+        </p:style>
+        <p:txBody>
+          <a:bodyPr rtlCol="0" anchor="ctr"/>
+          <a:lstStyle/>
+          <a:p>
+            <a:pPr algn="ctr"/>
+          </a:p>
+        </p:txBody>
+      </p:sp>
+      <p:sp>
+        <p:nvSpPr>
+          <p:cNvPr id="66" name="Rectangle 65"/>
+          <p:cNvSpPr/>
+          <p:nvPr/>
+        </p:nvSpPr>
+        <p:spPr>
+          <a:xfrm>
+            <a:off x="2651760" y="1617320"/>
+            <a:ext cx="50000" cy="50000"/>
+          </a:xfrm>
+          <a:prstGeom prst="rect">
+            <a:avLst/>
+          </a:prstGeom>
+          <a:solidFill>
+            <a:srgbClr val="000000"/>
+          </a:solidFill>
+          <a:ln w="3175">
+            <a:solidFill>
+              <a:srgbClr val="000000"/>
+            </a:solidFill>
+          </a:ln>
+          <a:effectLst/>
+        </p:spPr>
+        <p:style>
+          <a:lnRef idx="1">
+            <a:schemeClr val="accent1"/>
+          </a:lnRef>
+          <a:fillRef idx="3">
+            <a:schemeClr val="accent1"/>
+          </a:fillRef>
+          <a:effectRef idx="2">
+            <a:schemeClr val="accent1"/>
+          </a:effectRef>
+          <a:fontRef idx="minor">
+            <a:schemeClr val="lt1"/>
+          </a:fontRef>
+        </p:style>
+        <p:txBody>
+          <a:bodyPr rtlCol="0" anchor="ctr"/>
+          <a:lstStyle/>
+          <a:p>
+            <a:pPr algn="ctr"/>
+          </a:p>
+        </p:txBody>
+      </p:sp>
+      <p:sp>
+        <p:nvSpPr>
+          <p:cNvPr id="67" name="Rectangle 66"/>
+          <p:cNvSpPr/>
+          <p:nvPr/>
+        </p:nvSpPr>
+        <p:spPr>
+          <a:xfrm>
+            <a:off x="2851760" y="1617320"/>
+            <a:ext cx="50000" cy="50000"/>
+          </a:xfrm>
+          <a:prstGeom prst="rect">
+            <a:avLst/>
+          </a:prstGeom>
+          <a:solidFill>
+            <a:srgbClr val="000000"/>
+          </a:solidFill>
+          <a:ln w="3175">
+            <a:solidFill>
+              <a:srgbClr val="000000"/>
+            </a:solidFill>
+          </a:ln>
+          <a:effectLst/>
+        </p:spPr>
+        <p:style>
+          <a:lnRef idx="1">
+            <a:schemeClr val="accent1"/>
+          </a:lnRef>
+          <a:fillRef idx="3">
+            <a:schemeClr val="accent1"/>
+          </a:fillRef>
+          <a:effectRef idx="2">
+            <a:schemeClr val="accent1"/>
+          </a:effectRef>
+          <a:fontRef idx="minor">
+            <a:schemeClr val="lt1"/>
+          </a:fontRef>
+        </p:style>
+        <p:txBody>
+          <a:bodyPr rtlCol="0" anchor="ctr"/>
+          <a:lstStyle/>
+          <a:p>
+            <a:pPr algn="ctr"/>
+          </a:p>
+        </p:txBody>
+      </p:sp>
+      <p:sp>
+        <p:nvSpPr>
+          <p:cNvPr id="68" name="Rectangle 67"/>
+          <p:cNvSpPr/>
+          <p:nvPr/>
+        </p:nvSpPr>
+        <p:spPr>
+          <a:xfrm>
+            <a:off x="2701760" y="1667320"/>
+            <a:ext cx="50000" cy="50000"/>
+          </a:xfrm>
+          <a:prstGeom prst="rect">
+            <a:avLst/>
+          </a:prstGeom>
+          <a:solidFill>
+            <a:srgbClr val="000000"/>
+          </a:solidFill>
+          <a:ln w="3175">
+            <a:solidFill>
+              <a:srgbClr val="000000"/>
+            </a:solidFill>
+          </a:ln>
+          <a:effectLst/>
+        </p:spPr>
+        <p:style>
+          <a:lnRef idx="1">
+            <a:schemeClr val="accent1"/>
+          </a:lnRef>
+          <a:fillRef idx="3">
+            <a:schemeClr val="accent1"/>
+          </a:fillRef>
+          <a:effectRef idx="2">
+            <a:schemeClr val="accent1"/>
+          </a:effectRef>
+          <a:fontRef idx="minor">
+            <a:schemeClr val="lt1"/>
+          </a:fontRef>
+        </p:style>
+        <p:txBody>
+          <a:bodyPr rtlCol="0" anchor="ctr"/>
+          <a:lstStyle/>
+          <a:p>
+            <a:pPr algn="ctr"/>
+          </a:p>
+        </p:txBody>
+      </p:sp>
+      <p:sp>
+        <p:nvSpPr>
+          <p:cNvPr id="69" name="Rectangle 68"/>
+          <p:cNvSpPr/>
+          <p:nvPr/>
+        </p:nvSpPr>
+        <p:spPr>
+          <a:xfrm>
+            <a:off x="2751760" y="1667320"/>
+            <a:ext cx="50000" cy="50000"/>
+          </a:xfrm>
+          <a:prstGeom prst="rect">
+            <a:avLst/>
+          </a:prstGeom>
+          <a:solidFill>
+            <a:srgbClr val="000000"/>
+          </a:solidFill>
+          <a:ln w="3175">
+            <a:solidFill>
+              <a:srgbClr val="000000"/>
+            </a:solidFill>
+          </a:ln>
+          <a:effectLst/>
+        </p:spPr>
+        <p:style>
+          <a:lnRef idx="1">
+            <a:schemeClr val="accent1"/>
+          </a:lnRef>
+          <a:fillRef idx="3">
+            <a:schemeClr val="accent1"/>
+          </a:fillRef>
+          <a:effectRef idx="2">
+            <a:schemeClr val="accent1"/>
+          </a:effectRef>
+          <a:fontRef idx="minor">
+            <a:schemeClr val="lt1"/>
+          </a:fontRef>
+        </p:style>
+        <p:txBody>
+          <a:bodyPr rtlCol="0" anchor="ctr"/>
+          <a:lstStyle/>
+          <a:p>
+            <a:pPr algn="ctr"/>
+          </a:p>
+        </p:txBody>
+      </p:sp>
+      <p:sp>
+        <p:nvSpPr>
+          <p:cNvPr id="70" name="Rectangle 69"/>
+          <p:cNvSpPr/>
+          <p:nvPr/>
+        </p:nvSpPr>
+        <p:spPr>
+          <a:xfrm>
+            <a:off x="2801760" y="1667320"/>
+            <a:ext cx="50000" cy="50000"/>
+          </a:xfrm>
+          <a:prstGeom prst="rect">
+            <a:avLst/>
+          </a:prstGeom>
+          <a:solidFill>
+            <a:srgbClr val="000000"/>
+          </a:solidFill>
+          <a:ln w="3175">
+            <a:solidFill>
+              <a:srgbClr val="000000"/>
+            </a:solidFill>
+          </a:ln>
+          <a:effectLst/>
+        </p:spPr>
+        <p:style>
+          <a:lnRef idx="1">
+            <a:schemeClr val="accent1"/>
+          </a:lnRef>
+          <a:fillRef idx="3">
+            <a:schemeClr val="accent1"/>
+          </a:fillRef>
+          <a:effectRef idx="2">
+            <a:schemeClr val="accent1"/>
+          </a:effectRef>
+          <a:fontRef idx="minor">
+            <a:schemeClr val="lt1"/>
+          </a:fontRef>
+        </p:style>
+        <p:txBody>
+          <a:bodyPr rtlCol="0" anchor="ctr"/>
+          <a:lstStyle/>
+          <a:p>
+            <a:pPr algn="ctr"/>
+          </a:p>
+        </p:txBody>
+      </p:sp>
+      <p:sp>
+        <p:nvSpPr>
+          <p:cNvPr id="71" name="TextBox 70"/>
+          <p:cNvSpPr txBox="1"/>
+          <p:nvPr/>
+        </p:nvSpPr>
+        <p:spPr>
+          <a:xfrm>
+            <a:off x="2631760" y="1863040"/>
+            <a:ext cx="290000" cy="457200"/>
+          </a:xfrm>
+          <a:prstGeom prst="rect">
+            <a:avLst/>
+          </a:prstGeom>
+          <a:noFill/>
+        </p:spPr>
+        <p:txBody>
+          <a:bodyPr wrap="square" anchor="t" lIns="0" rIns="0" tIns="0" bIns="0">
+            <a:spAutoFit/>
+          </a:bodyPr>
+          <a:lstStyle/>
+          <a:p>
+            <a:pPr algn="ctr"/>
+            <a:r>
+              <a:rPr sz="900" b="0">
+                <a:solidFill>
+                  <a:srgbClr val="000000"/>
+                </a:solidFill>
+                <a:latin typeface="맑은 고딕"/>
+              </a:rPr>
+              <a:t>t = 300 ms
+(슬라이드 중)</a:t>
+            </a:r>
+          </a:p>
+        </p:txBody>
+      </p:sp>
+      <p:cxnSp>
+        <p:nvCxnSpPr>
+          <p:cNvPr id="72" name="Connector 71"/>
+          <p:cNvCxnSpPr/>
+          <p:nvPr/>
+        </p:nvCxnSpPr>
+        <p:spPr>
+          <a:xfrm>
+            <a:off x="2921760" y="1617320"/>
+            <a:ext cx="863000" cy="0"/>
+          </a:xfrm>
+          <a:prstGeom prst="line">
+            <a:avLst/>
+          </a:prstGeom>
+          <a:ln w="12700">
+            <a:solidFill>
+              <a:srgbClr val="000000"/>
+            </a:solidFill>
+            <a:tailEnd type="triangle" w="med" h="med"/>
+          </a:ln>
+        </p:spPr>
+        <p:style>
+          <a:lnRef idx="2">
+            <a:schemeClr val="accent1"/>
+          </a:lnRef>
+          <a:fillRef idx="0">
+            <a:schemeClr val="accent1"/>
+          </a:fillRef>
+          <a:effectRef idx="1">
+            <a:schemeClr val="accent1"/>
+          </a:effectRef>
+          <a:fontRef idx="minor">
+            <a:schemeClr val="tx1"/>
+          </a:fontRef>
+        </p:style>
+      </p:cxnSp>
+      <p:sp>
+        <p:nvSpPr>
+          <p:cNvPr id="73" name="Rectangle 72"/>
+          <p:cNvSpPr/>
+          <p:nvPr/>
+        </p:nvSpPr>
+        <p:spPr>
+          <a:xfrm>
+            <a:off x="3794760" y="1417320"/>
+            <a:ext cx="250000" cy="400000"/>
+          </a:xfrm>
+          <a:prstGeom prst="rect">
+            <a:avLst/>
+          </a:prstGeom>
+          <a:noFill/>
+          <a:ln w="6350">
+            <a:solidFill>
+              <a:srgbClr val="000000"/>
+            </a:solidFill>
+          </a:ln>
+          <a:effectLst/>
+        </p:spPr>
+        <p:style>
+          <a:lnRef idx="1">
+            <a:schemeClr val="accent1"/>
+          </a:lnRef>
+          <a:fillRef idx="3">
+            <a:schemeClr val="accent1"/>
+          </a:fillRef>
+          <a:effectRef idx="2">
+            <a:schemeClr val="accent1"/>
+          </a:effectRef>
+          <a:fontRef idx="minor">
+            <a:schemeClr val="lt1"/>
+          </a:fontRef>
+        </p:style>
+        <p:txBody>
+          <a:bodyPr rtlCol="0" anchor="ctr"/>
+          <a:lstStyle/>
+          <a:p>
+            <a:pPr algn="ctr"/>
+          </a:p>
+        </p:txBody>
+      </p:sp>
+      <p:sp>
+        <p:nvSpPr>
+          <p:cNvPr id="74" name="Rectangle 73"/>
+          <p:cNvSpPr/>
+          <p:nvPr/>
+        </p:nvSpPr>
+        <p:spPr>
+          <a:xfrm>
+            <a:off x="3894760" y="1417320"/>
+            <a:ext cx="50000" cy="50000"/>
+          </a:xfrm>
+          <a:prstGeom prst="rect">
+            <a:avLst/>
+          </a:prstGeom>
+          <a:solidFill>
+            <a:srgbClr val="000000"/>
+          </a:solidFill>
+          <a:ln w="3175">
+            <a:solidFill>
+              <a:srgbClr val="000000"/>
+            </a:solidFill>
+          </a:ln>
+          <a:effectLst/>
+        </p:spPr>
+        <p:style>
+          <a:lnRef idx="1">
+            <a:schemeClr val="accent1"/>
+          </a:lnRef>
+          <a:fillRef idx="3">
+            <a:schemeClr val="accent1"/>
+          </a:fillRef>
+          <a:effectRef idx="2">
+            <a:schemeClr val="accent1"/>
+          </a:effectRef>
+          <a:fontRef idx="minor">
+            <a:schemeClr val="lt1"/>
+          </a:fontRef>
+        </p:style>
+        <p:txBody>
+          <a:bodyPr rtlCol="0" anchor="ctr"/>
+          <a:lstStyle/>
+          <a:p>
+            <a:pPr algn="ctr"/>
+          </a:p>
+        </p:txBody>
+      </p:sp>
+      <p:sp>
+        <p:nvSpPr>
+          <p:cNvPr id="75" name="Rectangle 74"/>
+          <p:cNvSpPr/>
+          <p:nvPr/>
+        </p:nvSpPr>
+        <p:spPr>
+          <a:xfrm>
+            <a:off x="3944760" y="1417320"/>
+            <a:ext cx="50000" cy="50000"/>
+          </a:xfrm>
+          <a:prstGeom prst="rect">
+            <a:avLst/>
+          </a:prstGeom>
+          <a:solidFill>
+            <a:srgbClr val="000000"/>
+          </a:solidFill>
+          <a:ln w="3175">
+            <a:solidFill>
+              <a:srgbClr val="000000"/>
+            </a:solidFill>
+          </a:ln>
+          <a:effectLst/>
+        </p:spPr>
+        <p:style>
+          <a:lnRef idx="1">
+            <a:schemeClr val="accent1"/>
+          </a:lnRef>
+          <a:fillRef idx="3">
+            <a:schemeClr val="accent1"/>
+          </a:fillRef>
+          <a:effectRef idx="2">
+            <a:schemeClr val="accent1"/>
+          </a:effectRef>
+          <a:fontRef idx="minor">
+            <a:schemeClr val="lt1"/>
+          </a:fontRef>
+        </p:style>
+        <p:txBody>
+          <a:bodyPr rtlCol="0" anchor="ctr"/>
+          <a:lstStyle/>
+          <a:p>
+            <a:pPr algn="ctr"/>
+          </a:p>
+        </p:txBody>
+      </p:sp>
+      <p:sp>
+        <p:nvSpPr>
+          <p:cNvPr id="76" name="Rectangle 75"/>
+          <p:cNvSpPr/>
+          <p:nvPr/>
+        </p:nvSpPr>
+        <p:spPr>
+          <a:xfrm>
+            <a:off x="3844760" y="1467320"/>
+            <a:ext cx="50000" cy="50000"/>
+          </a:xfrm>
+          <a:prstGeom prst="rect">
+            <a:avLst/>
+          </a:prstGeom>
+          <a:solidFill>
+            <a:srgbClr val="000000"/>
+          </a:solidFill>
+          <a:ln w="3175">
+            <a:solidFill>
+              <a:srgbClr val="000000"/>
+            </a:solidFill>
+          </a:ln>
+          <a:effectLst/>
+        </p:spPr>
+        <p:style>
+          <a:lnRef idx="1">
+            <a:schemeClr val="accent1"/>
+          </a:lnRef>
+          <a:fillRef idx="3">
+            <a:schemeClr val="accent1"/>
+          </a:fillRef>
+          <a:effectRef idx="2">
+            <a:schemeClr val="accent1"/>
+          </a:effectRef>
+          <a:fontRef idx="minor">
+            <a:schemeClr val="lt1"/>
+          </a:fontRef>
+        </p:style>
+        <p:txBody>
+          <a:bodyPr rtlCol="0" anchor="ctr"/>
+          <a:lstStyle/>
+          <a:p>
+            <a:pPr algn="ctr"/>
+          </a:p>
+        </p:txBody>
+      </p:sp>
+      <p:sp>
+        <p:nvSpPr>
+          <p:cNvPr id="77" name="Rectangle 76"/>
+          <p:cNvSpPr/>
+          <p:nvPr/>
+        </p:nvSpPr>
+        <p:spPr>
+          <a:xfrm>
+            <a:off x="3794760" y="1517320"/>
+            <a:ext cx="50000" cy="50000"/>
+          </a:xfrm>
+          <a:prstGeom prst="rect">
+            <a:avLst/>
+          </a:prstGeom>
+          <a:solidFill>
+            <a:srgbClr val="000000"/>
+          </a:solidFill>
+          <a:ln w="3175">
+            <a:solidFill>
+              <a:srgbClr val="000000"/>
+            </a:solidFill>
+          </a:ln>
+          <a:effectLst/>
+        </p:spPr>
+        <p:style>
+          <a:lnRef idx="1">
+            <a:schemeClr val="accent1"/>
+          </a:lnRef>
+          <a:fillRef idx="3">
+            <a:schemeClr val="accent1"/>
+          </a:fillRef>
+          <a:effectRef idx="2">
+            <a:schemeClr val="accent1"/>
+          </a:effectRef>
+          <a:fontRef idx="minor">
+            <a:schemeClr val="lt1"/>
+          </a:fontRef>
+        </p:style>
+        <p:txBody>
+          <a:bodyPr rtlCol="0" anchor="ctr"/>
+          <a:lstStyle/>
+          <a:p>
+            <a:pPr algn="ctr"/>
+          </a:p>
+        </p:txBody>
+      </p:sp>
+      <p:sp>
+        <p:nvSpPr>
+          <p:cNvPr id="78" name="Rectangle 77"/>
+          <p:cNvSpPr/>
+          <p:nvPr/>
+        </p:nvSpPr>
+        <p:spPr>
+          <a:xfrm>
+            <a:off x="3794760" y="1567320"/>
+            <a:ext cx="50000" cy="50000"/>
+          </a:xfrm>
+          <a:prstGeom prst="rect">
+            <a:avLst/>
+          </a:prstGeom>
+          <a:solidFill>
+            <a:srgbClr val="000000"/>
+          </a:solidFill>
+          <a:ln w="3175">
+            <a:solidFill>
+              <a:srgbClr val="000000"/>
+            </a:solidFill>
+          </a:ln>
+          <a:effectLst/>
+        </p:spPr>
+        <p:style>
+          <a:lnRef idx="1">
+            <a:schemeClr val="accent1"/>
+          </a:lnRef>
+          <a:fillRef idx="3">
+            <a:schemeClr val="accent1"/>
+          </a:fillRef>
+          <a:effectRef idx="2">
+            <a:schemeClr val="accent1"/>
+          </a:effectRef>
+          <a:fontRef idx="minor">
+            <a:schemeClr val="lt1"/>
+          </a:fontRef>
+        </p:style>
+        <p:txBody>
+          <a:bodyPr rtlCol="0" anchor="ctr"/>
+          <a:lstStyle/>
+          <a:p>
+            <a:pPr algn="ctr"/>
+          </a:p>
+        </p:txBody>
+      </p:sp>
+      <p:sp>
+        <p:nvSpPr>
+          <p:cNvPr id="79" name="Rectangle 78"/>
+          <p:cNvSpPr/>
+          <p:nvPr/>
+        </p:nvSpPr>
+        <p:spPr>
+          <a:xfrm>
+            <a:off x="3794760" y="1617320"/>
+            <a:ext cx="50000" cy="50000"/>
+          </a:xfrm>
+          <a:prstGeom prst="rect">
+            <a:avLst/>
+          </a:prstGeom>
+          <a:solidFill>
+            <a:srgbClr val="000000"/>
+          </a:solidFill>
+          <a:ln w="3175">
+            <a:solidFill>
+              <a:srgbClr val="000000"/>
+            </a:solidFill>
+          </a:ln>
+          <a:effectLst/>
+        </p:spPr>
+        <p:style>
+          <a:lnRef idx="1">
+            <a:schemeClr val="accent1"/>
+          </a:lnRef>
+          <a:fillRef idx="3">
+            <a:schemeClr val="accent1"/>
+          </a:fillRef>
+          <a:effectRef idx="2">
+            <a:schemeClr val="accent1"/>
+          </a:effectRef>
+          <a:fontRef idx="minor">
+            <a:schemeClr val="lt1"/>
+          </a:fontRef>
+        </p:style>
+        <p:txBody>
+          <a:bodyPr rtlCol="0" anchor="ctr"/>
+          <a:lstStyle/>
+          <a:p>
+            <a:pPr algn="ctr"/>
+          </a:p>
+        </p:txBody>
+      </p:sp>
+      <p:sp>
+        <p:nvSpPr>
+          <p:cNvPr id="80" name="Rectangle 79"/>
+          <p:cNvSpPr/>
+          <p:nvPr/>
+        </p:nvSpPr>
+        <p:spPr>
+          <a:xfrm>
+            <a:off x="3844760" y="1617320"/>
+            <a:ext cx="50000" cy="50000"/>
+          </a:xfrm>
+          <a:prstGeom prst="rect">
+            <a:avLst/>
+          </a:prstGeom>
+          <a:solidFill>
+            <a:srgbClr val="000000"/>
+          </a:solidFill>
+          <a:ln w="3175">
+            <a:solidFill>
+              <a:srgbClr val="000000"/>
+            </a:solidFill>
+          </a:ln>
+          <a:effectLst/>
+        </p:spPr>
+        <p:style>
+          <a:lnRef idx="1">
+            <a:schemeClr val="accent1"/>
+          </a:lnRef>
+          <a:fillRef idx="3">
+            <a:schemeClr val="accent1"/>
+          </a:fillRef>
+          <a:effectRef idx="2">
+            <a:schemeClr val="accent1"/>
+          </a:effectRef>
+          <a:fontRef idx="minor">
+            <a:schemeClr val="lt1"/>
+          </a:fontRef>
+        </p:style>
+        <p:txBody>
+          <a:bodyPr rtlCol="0" anchor="ctr"/>
+          <a:lstStyle/>
+          <a:p>
+            <a:pPr algn="ctr"/>
+          </a:p>
+        </p:txBody>
+      </p:sp>
+      <p:sp>
+        <p:nvSpPr>
+          <p:cNvPr id="81" name="Rectangle 80"/>
+          <p:cNvSpPr/>
+          <p:nvPr/>
+        </p:nvSpPr>
+        <p:spPr>
+          <a:xfrm>
+            <a:off x="3894760" y="1617320"/>
+            <a:ext cx="50000" cy="50000"/>
+          </a:xfrm>
+          <a:prstGeom prst="rect">
+            <a:avLst/>
+          </a:prstGeom>
+          <a:solidFill>
+            <a:srgbClr val="000000"/>
+          </a:solidFill>
+          <a:ln w="3175">
+            <a:solidFill>
+              <a:srgbClr val="000000"/>
+            </a:solidFill>
+          </a:ln>
+          <a:effectLst/>
+        </p:spPr>
+        <p:style>
+          <a:lnRef idx="1">
+            <a:schemeClr val="accent1"/>
+          </a:lnRef>
+          <a:fillRef idx="3">
+            <a:schemeClr val="accent1"/>
+          </a:fillRef>
+          <a:effectRef idx="2">
+            <a:schemeClr val="accent1"/>
+          </a:effectRef>
+          <a:fontRef idx="minor">
+            <a:schemeClr val="lt1"/>
+          </a:fontRef>
+        </p:style>
+        <p:txBody>
+          <a:bodyPr rtlCol="0" anchor="ctr"/>
+          <a:lstStyle/>
+          <a:p>
+            <a:pPr algn="ctr"/>
+          </a:p>
+        </p:txBody>
+      </p:sp>
+      <p:sp>
+        <p:nvSpPr>
+          <p:cNvPr id="82" name="Rectangle 81"/>
+          <p:cNvSpPr/>
+          <p:nvPr/>
+        </p:nvSpPr>
+        <p:spPr>
+          <a:xfrm>
+            <a:off x="3944760" y="1617320"/>
+            <a:ext cx="50000" cy="50000"/>
+          </a:xfrm>
+          <a:prstGeom prst="rect">
+            <a:avLst/>
+          </a:prstGeom>
+          <a:solidFill>
+            <a:srgbClr val="000000"/>
+          </a:solidFill>
+          <a:ln w="3175">
+            <a:solidFill>
+              <a:srgbClr val="000000"/>
+            </a:solidFill>
+          </a:ln>
+          <a:effectLst/>
+        </p:spPr>
+        <p:style>
+          <a:lnRef idx="1">
+            <a:schemeClr val="accent1"/>
+          </a:lnRef>
+          <a:fillRef idx="3">
+            <a:schemeClr val="accent1"/>
+          </a:fillRef>
+          <a:effectRef idx="2">
+            <a:schemeClr val="accent1"/>
+          </a:effectRef>
+          <a:fontRef idx="minor">
+            <a:schemeClr val="lt1"/>
+          </a:fontRef>
+        </p:style>
+        <p:txBody>
+          <a:bodyPr rtlCol="0" anchor="ctr"/>
+          <a:lstStyle/>
+          <a:p>
+            <a:pPr algn="ctr"/>
+          </a:p>
+        </p:txBody>
+      </p:sp>
+      <p:sp>
+        <p:nvSpPr>
+          <p:cNvPr id="83" name="Rectangle 82"/>
+          <p:cNvSpPr/>
+          <p:nvPr/>
+        </p:nvSpPr>
+        <p:spPr>
+          <a:xfrm>
+            <a:off x="3794760" y="1667320"/>
+            <a:ext cx="50000" cy="50000"/>
+          </a:xfrm>
+          <a:prstGeom prst="rect">
+            <a:avLst/>
+          </a:prstGeom>
+          <a:solidFill>
+            <a:srgbClr val="000000"/>
+          </a:solidFill>
+          <a:ln w="3175">
+            <a:solidFill>
+              <a:srgbClr val="000000"/>
+            </a:solidFill>
+          </a:ln>
+          <a:effectLst/>
+        </p:spPr>
+        <p:style>
+          <a:lnRef idx="1">
+            <a:schemeClr val="accent1"/>
+          </a:lnRef>
+          <a:fillRef idx="3">
+            <a:schemeClr val="accent1"/>
+          </a:fillRef>
+          <a:effectRef idx="2">
+            <a:schemeClr val="accent1"/>
+          </a:effectRef>
+          <a:fontRef idx="minor">
+            <a:schemeClr val="lt1"/>
+          </a:fontRef>
+        </p:style>
+        <p:txBody>
+          <a:bodyPr rtlCol="0" anchor="ctr"/>
+          <a:lstStyle/>
+          <a:p>
+            <a:pPr algn="ctr"/>
+          </a:p>
+        </p:txBody>
+      </p:sp>
+      <p:sp>
+        <p:nvSpPr>
+          <p:cNvPr id="84" name="Rectangle 83"/>
+          <p:cNvSpPr/>
+          <p:nvPr/>
+        </p:nvSpPr>
+        <p:spPr>
+          <a:xfrm>
+            <a:off x="3994760" y="1667320"/>
+            <a:ext cx="50000" cy="50000"/>
+          </a:xfrm>
+          <a:prstGeom prst="rect">
+            <a:avLst/>
+          </a:prstGeom>
+          <a:solidFill>
+            <a:srgbClr val="000000"/>
+          </a:solidFill>
+          <a:ln w="3175">
+            <a:solidFill>
+              <a:srgbClr val="000000"/>
+            </a:solidFill>
+          </a:ln>
+          <a:effectLst/>
+        </p:spPr>
+        <p:style>
+          <a:lnRef idx="1">
+            <a:schemeClr val="accent1"/>
+          </a:lnRef>
+          <a:fillRef idx="3">
+            <a:schemeClr val="accent1"/>
+          </a:fillRef>
+          <a:effectRef idx="2">
+            <a:schemeClr val="accent1"/>
+          </a:effectRef>
+          <a:fontRef idx="minor">
+            <a:schemeClr val="lt1"/>
+          </a:fontRef>
+        </p:style>
+        <p:txBody>
+          <a:bodyPr rtlCol="0" anchor="ctr"/>
+          <a:lstStyle/>
+          <a:p>
+            <a:pPr algn="ctr"/>
+          </a:p>
+        </p:txBody>
+      </p:sp>
+      <p:sp>
+        <p:nvSpPr>
+          <p:cNvPr id="85" name="Rectangle 84"/>
+          <p:cNvSpPr/>
+          <p:nvPr/>
+        </p:nvSpPr>
+        <p:spPr>
+          <a:xfrm>
+            <a:off x="3794760" y="1717320"/>
+            <a:ext cx="50000" cy="50000"/>
+          </a:xfrm>
+          <a:prstGeom prst="rect">
+            <a:avLst/>
+          </a:prstGeom>
+          <a:solidFill>
+            <a:srgbClr val="000000"/>
+          </a:solidFill>
+          <a:ln w="3175">
+            <a:solidFill>
+              <a:srgbClr val="000000"/>
+            </a:solidFill>
+          </a:ln>
+          <a:effectLst/>
+        </p:spPr>
+        <p:style>
+          <a:lnRef idx="1">
+            <a:schemeClr val="accent1"/>
+          </a:lnRef>
+          <a:fillRef idx="3">
+            <a:schemeClr val="accent1"/>
+          </a:fillRef>
+          <a:effectRef idx="2">
+            <a:schemeClr val="accent1"/>
+          </a:effectRef>
+          <a:fontRef idx="minor">
+            <a:schemeClr val="lt1"/>
+          </a:fontRef>
+        </p:style>
+        <p:txBody>
+          <a:bodyPr rtlCol="0" anchor="ctr"/>
+          <a:lstStyle/>
+          <a:p>
+            <a:pPr algn="ctr"/>
+          </a:p>
+        </p:txBody>
+      </p:sp>
+      <p:sp>
+        <p:nvSpPr>
+          <p:cNvPr id="86" name="Rectangle 85"/>
+          <p:cNvSpPr/>
+          <p:nvPr/>
+        </p:nvSpPr>
+        <p:spPr>
+          <a:xfrm>
+            <a:off x="3994760" y="1717320"/>
+            <a:ext cx="50000" cy="50000"/>
+          </a:xfrm>
+          <a:prstGeom prst="rect">
+            <a:avLst/>
+          </a:prstGeom>
+          <a:solidFill>
+            <a:srgbClr val="000000"/>
+          </a:solidFill>
+          <a:ln w="3175">
+            <a:solidFill>
+              <a:srgbClr val="000000"/>
+            </a:solidFill>
+          </a:ln>
+          <a:effectLst/>
+        </p:spPr>
+        <p:style>
+          <a:lnRef idx="1">
+            <a:schemeClr val="accent1"/>
+          </a:lnRef>
+          <a:fillRef idx="3">
+            <a:schemeClr val="accent1"/>
+          </a:fillRef>
+          <a:effectRef idx="2">
+            <a:schemeClr val="accent1"/>
+          </a:effectRef>
+          <a:fontRef idx="minor">
+            <a:schemeClr val="lt1"/>
+          </a:fontRef>
+        </p:style>
+        <p:txBody>
+          <a:bodyPr rtlCol="0" anchor="ctr"/>
+          <a:lstStyle/>
+          <a:p>
+            <a:pPr algn="ctr"/>
+          </a:p>
+        </p:txBody>
+      </p:sp>
+      <p:sp>
+        <p:nvSpPr>
+          <p:cNvPr id="87" name="Rectangle 86"/>
+          <p:cNvSpPr/>
+          <p:nvPr/>
+        </p:nvSpPr>
+        <p:spPr>
+          <a:xfrm>
+            <a:off x="3844760" y="1767320"/>
+            <a:ext cx="50000" cy="50000"/>
+          </a:xfrm>
+          <a:prstGeom prst="rect">
+            <a:avLst/>
+          </a:prstGeom>
+          <a:solidFill>
+            <a:srgbClr val="000000"/>
+          </a:solidFill>
+          <a:ln w="3175">
+            <a:solidFill>
+              <a:srgbClr val="000000"/>
+            </a:solidFill>
+          </a:ln>
+          <a:effectLst/>
+        </p:spPr>
+        <p:style>
+          <a:lnRef idx="1">
+            <a:schemeClr val="accent1"/>
+          </a:lnRef>
+          <a:fillRef idx="3">
+            <a:schemeClr val="accent1"/>
+          </a:fillRef>
+          <a:effectRef idx="2">
+            <a:schemeClr val="accent1"/>
+          </a:effectRef>
+          <a:fontRef idx="minor">
+            <a:schemeClr val="lt1"/>
+          </a:fontRef>
+        </p:style>
+        <p:txBody>
+          <a:bodyPr rtlCol="0" anchor="ctr"/>
+          <a:lstStyle/>
+          <a:p>
+            <a:pPr algn="ctr"/>
+          </a:p>
+        </p:txBody>
+      </p:sp>
+      <p:sp>
+        <p:nvSpPr>
+          <p:cNvPr id="88" name="Rectangle 87"/>
+          <p:cNvSpPr/>
+          <p:nvPr/>
+        </p:nvSpPr>
+        <p:spPr>
+          <a:xfrm>
+            <a:off x="3894760" y="1767320"/>
+            <a:ext cx="50000" cy="50000"/>
+          </a:xfrm>
+          <a:prstGeom prst="rect">
+            <a:avLst/>
+          </a:prstGeom>
+          <a:solidFill>
+            <a:srgbClr val="000000"/>
+          </a:solidFill>
+          <a:ln w="3175">
+            <a:solidFill>
+              <a:srgbClr val="000000"/>
+            </a:solidFill>
+          </a:ln>
+          <a:effectLst/>
+        </p:spPr>
+        <p:style>
+          <a:lnRef idx="1">
+            <a:schemeClr val="accent1"/>
+          </a:lnRef>
+          <a:fillRef idx="3">
+            <a:schemeClr val="accent1"/>
+          </a:fillRef>
+          <a:effectRef idx="2">
+            <a:schemeClr val="accent1"/>
+          </a:effectRef>
+          <a:fontRef idx="minor">
+            <a:schemeClr val="lt1"/>
+          </a:fontRef>
+        </p:style>
+        <p:txBody>
+          <a:bodyPr rtlCol="0" anchor="ctr"/>
+          <a:lstStyle/>
+          <a:p>
+            <a:pPr algn="ctr"/>
+          </a:p>
+        </p:txBody>
+      </p:sp>
+      <p:sp>
+        <p:nvSpPr>
+          <p:cNvPr id="89" name="Rectangle 88"/>
+          <p:cNvSpPr/>
+          <p:nvPr/>
+        </p:nvSpPr>
+        <p:spPr>
+          <a:xfrm>
+            <a:off x="3944760" y="1767320"/>
+            <a:ext cx="50000" cy="50000"/>
+          </a:xfrm>
+          <a:prstGeom prst="rect">
+            <a:avLst/>
+          </a:prstGeom>
+          <a:solidFill>
+            <a:srgbClr val="000000"/>
+          </a:solidFill>
+          <a:ln w="3175">
+            <a:solidFill>
+              <a:srgbClr val="000000"/>
+            </a:solidFill>
+          </a:ln>
+          <a:effectLst/>
+        </p:spPr>
+        <p:style>
+          <a:lnRef idx="1">
+            <a:schemeClr val="accent1"/>
+          </a:lnRef>
+          <a:fillRef idx="3">
+            <a:schemeClr val="accent1"/>
+          </a:fillRef>
+          <a:effectRef idx="2">
+            <a:schemeClr val="accent1"/>
+          </a:effectRef>
+          <a:fontRef idx="minor">
+            <a:schemeClr val="lt1"/>
+          </a:fontRef>
+        </p:style>
+        <p:txBody>
+          <a:bodyPr rtlCol="0" anchor="ctr"/>
+          <a:lstStyle/>
+          <a:p>
+            <a:pPr algn="ctr"/>
+          </a:p>
+        </p:txBody>
+      </p:sp>
+      <p:sp>
+        <p:nvSpPr>
+          <p:cNvPr id="90" name="TextBox 89"/>
+          <p:cNvSpPr txBox="1"/>
+          <p:nvPr/>
+        </p:nvSpPr>
+        <p:spPr>
+          <a:xfrm>
+            <a:off x="3774760" y="1863040"/>
+            <a:ext cx="290000" cy="457200"/>
+          </a:xfrm>
+          <a:prstGeom prst="rect">
+            <a:avLst/>
+          </a:prstGeom>
+          <a:noFill/>
+        </p:spPr>
+        <p:txBody>
+          <a:bodyPr wrap="square" anchor="t" lIns="0" rIns="0" tIns="0" bIns="0">
+            <a:spAutoFit/>
+          </a:bodyPr>
+          <a:lstStyle/>
+          <a:p>
+            <a:pPr algn="ctr"/>
+            <a:r>
+              <a:rPr sz="900" b="0">
+                <a:solidFill>
+                  <a:srgbClr val="000000"/>
+                </a:solidFill>
+                <a:latin typeface="맑은 고딕"/>
+              </a:rPr>
+              <a:t>t = 400 ms
+(완료)</a:t>
+            </a:r>
+          </a:p>
+        </p:txBody>
+      </p:sp>
+      <p:sp>
+        <p:nvSpPr>
+          <p:cNvPr id="91" name="TextBox 90"/>
+          <p:cNvSpPr txBox="1"/>
+          <p:nvPr/>
+        </p:nvSpPr>
+        <p:spPr>
+          <a:xfrm>
+            <a:off x="5394960" y="914400"/>
+            <a:ext cx="3383280" cy="320040"/>
+          </a:xfrm>
+          <a:prstGeom prst="rect">
+            <a:avLst/>
+          </a:prstGeom>
+          <a:noFill/>
+        </p:spPr>
+        <p:txBody>
+          <a:bodyPr wrap="square" anchor="t" lIns="0" rIns="0" tIns="0" bIns="0">
+            <a:spAutoFit/>
+          </a:bodyPr>
+          <a:lstStyle/>
+          <a:p>
+            <a:pPr algn="l"/>
+            <a:r>
+              <a:rPr sz="1200" b="1">
+                <a:solidFill>
+                  <a:srgbClr val="000000"/>
+                </a:solidFill>
+                <a:latin typeface="맑은 고딕"/>
+              </a:rPr>
+              <a:t>▪ 자리별 상태 머신 (DigitAnim)</a:t>
+            </a:r>
+          </a:p>
+        </p:txBody>
+      </p:sp>
+      <p:sp>
+        <p:nvSpPr>
+          <p:cNvPr id="92" name="Oval 91"/>
+          <p:cNvSpPr/>
+          <p:nvPr/>
+        </p:nvSpPr>
+        <p:spPr>
+          <a:xfrm>
+            <a:off x="5394960" y="1371600"/>
+            <a:ext cx="548640" cy="548640"/>
+          </a:xfrm>
+          <a:prstGeom prst="ellipse">
+            <a:avLst/>
+          </a:prstGeom>
+          <a:noFill/>
+          <a:ln w="12700">
+            <a:solidFill>
+              <a:srgbClr val="000000"/>
+            </a:solidFill>
+          </a:ln>
+        </p:spPr>
+        <p:style>
+          <a:lnRef idx="1">
+            <a:schemeClr val="accent1"/>
+          </a:lnRef>
+          <a:fillRef idx="3">
+            <a:schemeClr val="accent1"/>
+          </a:fillRef>
+          <a:effectRef idx="2">
+            <a:schemeClr val="accent1"/>
+          </a:effectRef>
+          <a:fontRef idx="minor">
+            <a:schemeClr val="lt1"/>
+          </a:fontRef>
+        </p:style>
+        <p:txBody>
+          <a:bodyPr rtlCol="0" anchor="ctr"/>
+          <a:lstStyle/>
+          <a:p>
+            <a:pPr algn="ctr"/>
+          </a:p>
+        </p:txBody>
+      </p:sp>
+      <p:sp>
+        <p:nvSpPr>
+          <p:cNvPr id="93" name="TextBox 92"/>
+          <p:cNvSpPr txBox="1"/>
+          <p:nvPr/>
+        </p:nvSpPr>
+        <p:spPr>
+          <a:xfrm>
+            <a:off x="5394960" y="1371600"/>
+            <a:ext cx="548640" cy="548640"/>
+          </a:xfrm>
+          <a:prstGeom prst="rect">
+            <a:avLst/>
+          </a:prstGeom>
+          <a:noFill/>
+        </p:spPr>
+        <p:txBody>
+          <a:bodyPr wrap="square" anchor="ctr" lIns="0" rIns="0" tIns="0" bIns="0">
+            <a:spAutoFit/>
+          </a:bodyPr>
+          <a:lstStyle/>
+          <a:p>
+            <a:pPr algn="ctr"/>
+            <a:r>
+              <a:rPr sz="800" b="1">
+                <a:solidFill>
+                  <a:srgbClr val="000000"/>
+                </a:solidFill>
+                <a:latin typeface="맑은 고딕"/>
+              </a:rPr>
+              <a:t>정적</a:t>
+            </a:r>
+          </a:p>
+        </p:txBody>
+      </p:sp>
+      <p:cxnSp>
+        <p:nvCxnSpPr>
+          <p:cNvPr id="94" name="Connector 93"/>
+          <p:cNvCxnSpPr/>
+          <p:nvPr/>
+        </p:nvCxnSpPr>
+        <p:spPr>
+          <a:xfrm>
+            <a:off x="5961888" y="1645920.0"/>
+            <a:ext cx="694944" cy="0.0"/>
+          </a:xfrm>
+          <a:prstGeom prst="line">
+            <a:avLst/>
+          </a:prstGeom>
+          <a:ln w="12700">
+            <a:solidFill>
+              <a:srgbClr val="000000"/>
+            </a:solidFill>
+            <a:tailEnd type="triangle" w="med" h="med"/>
+          </a:ln>
+        </p:spPr>
+        <p:style>
+          <a:lnRef idx="2">
+            <a:schemeClr val="accent1"/>
+          </a:lnRef>
+          <a:fillRef idx="0">
+            <a:schemeClr val="accent1"/>
+          </a:fillRef>
+          <a:effectRef idx="1">
+            <a:schemeClr val="accent1"/>
+          </a:effectRef>
+          <a:fontRef idx="minor">
+            <a:schemeClr val="tx1"/>
+          </a:fontRef>
+        </p:style>
+      </p:cxnSp>
+      <p:sp>
+        <p:nvSpPr>
+          <p:cNvPr id="95" name="Oval 94"/>
+          <p:cNvSpPr/>
+          <p:nvPr/>
+        </p:nvSpPr>
+        <p:spPr>
+          <a:xfrm>
+            <a:off x="6675120" y="1371600"/>
+            <a:ext cx="548640" cy="548640"/>
+          </a:xfrm>
+          <a:prstGeom prst="ellipse">
+            <a:avLst/>
+          </a:prstGeom>
+          <a:noFill/>
+          <a:ln w="12700">
+            <a:solidFill>
+              <a:srgbClr val="000000"/>
+            </a:solidFill>
+          </a:ln>
+        </p:spPr>
+        <p:style>
+          <a:lnRef idx="1">
+            <a:schemeClr val="accent1"/>
+          </a:lnRef>
+          <a:fillRef idx="3">
+            <a:schemeClr val="accent1"/>
+          </a:fillRef>
+          <a:effectRef idx="2">
+            <a:schemeClr val="accent1"/>
+          </a:effectRef>
+          <a:fontRef idx="minor">
+            <a:schemeClr val="lt1"/>
+          </a:fontRef>
+        </p:style>
+        <p:txBody>
+          <a:bodyPr rtlCol="0" anchor="ctr"/>
+          <a:lstStyle/>
+          <a:p>
+            <a:pPr algn="ctr"/>
+          </a:p>
+        </p:txBody>
+      </p:sp>
+      <p:sp>
+        <p:nvSpPr>
+          <p:cNvPr id="96" name="TextBox 95"/>
+          <p:cNvSpPr txBox="1"/>
+          <p:nvPr/>
+        </p:nvSpPr>
+        <p:spPr>
+          <a:xfrm>
+            <a:off x="6675120" y="1371600"/>
+            <a:ext cx="548640" cy="548640"/>
+          </a:xfrm>
+          <a:prstGeom prst="rect">
+            <a:avLst/>
+          </a:prstGeom>
+          <a:noFill/>
+        </p:spPr>
+        <p:txBody>
+          <a:bodyPr wrap="square" anchor="ctr" lIns="0" rIns="0" tIns="0" bIns="0">
+            <a:spAutoFit/>
+          </a:bodyPr>
+          <a:lstStyle/>
+          <a:p>
+            <a:pPr algn="ctr"/>
+            <a:r>
+              <a:rPr sz="800" b="1">
+                <a:solidFill>
+                  <a:srgbClr val="000000"/>
+                </a:solidFill>
+                <a:latin typeface="맑은 고딕"/>
+              </a:rPr>
+              <a:t>frame=8</a:t>
+            </a:r>
+          </a:p>
+        </p:txBody>
+      </p:sp>
+      <p:cxnSp>
+        <p:nvCxnSpPr>
+          <p:cNvPr id="97" name="Connector 96"/>
+          <p:cNvCxnSpPr/>
+          <p:nvPr/>
+        </p:nvCxnSpPr>
+        <p:spPr>
+          <a:xfrm>
+            <a:off x="7242048" y="1645920.0"/>
+            <a:ext cx="603504" cy="0.0"/>
+          </a:xfrm>
+          <a:prstGeom prst="line">
+            <a:avLst/>
+          </a:prstGeom>
+          <a:ln w="12700">
+            <a:solidFill>
+              <a:srgbClr val="000000"/>
+            </a:solidFill>
+            <a:tailEnd type="triangle" w="med" h="med"/>
+          </a:ln>
+        </p:spPr>
+        <p:style>
+          <a:lnRef idx="2">
+            <a:schemeClr val="accent1"/>
+          </a:lnRef>
+          <a:fillRef idx="0">
+            <a:schemeClr val="accent1"/>
+          </a:fillRef>
+          <a:effectRef idx="1">
+            <a:schemeClr val="accent1"/>
+          </a:effectRef>
+          <a:fontRef idx="minor">
+            <a:schemeClr val="tx1"/>
+          </a:fontRef>
+        </p:style>
+      </p:cxnSp>
+      <p:sp>
+        <p:nvSpPr>
+          <p:cNvPr id="98" name="Oval 97"/>
+          <p:cNvSpPr/>
+          <p:nvPr/>
+        </p:nvSpPr>
+        <p:spPr>
+          <a:xfrm>
+            <a:off x="7863840" y="1371600"/>
+            <a:ext cx="548640" cy="548640"/>
+          </a:xfrm>
+          <a:prstGeom prst="ellipse">
+            <a:avLst/>
+          </a:prstGeom>
+          <a:noFill/>
+          <a:ln w="12700">
+            <a:solidFill>
+              <a:srgbClr val="000000"/>
+            </a:solidFill>
+          </a:ln>
+        </p:spPr>
+        <p:style>
+          <a:lnRef idx="1">
+            <a:schemeClr val="accent1"/>
+          </a:lnRef>
+          <a:fillRef idx="3">
+            <a:schemeClr val="accent1"/>
+          </a:fillRef>
+          <a:effectRef idx="2">
+            <a:schemeClr val="accent1"/>
+          </a:effectRef>
+          <a:fontRef idx="minor">
+            <a:schemeClr val="lt1"/>
+          </a:fontRef>
+        </p:style>
+        <p:txBody>
+          <a:bodyPr rtlCol="0" anchor="ctr"/>
+          <a:lstStyle/>
+          <a:p>
+            <a:pPr algn="ctr"/>
+          </a:p>
+        </p:txBody>
+      </p:sp>
+      <p:sp>
+        <p:nvSpPr>
+          <p:cNvPr id="99" name="TextBox 98"/>
+          <p:cNvSpPr txBox="1"/>
+          <p:nvPr/>
+        </p:nvSpPr>
+        <p:spPr>
+          <a:xfrm>
+            <a:off x="7863840" y="1371600"/>
+            <a:ext cx="548640" cy="548640"/>
+          </a:xfrm>
+          <a:prstGeom prst="rect">
+            <a:avLst/>
+          </a:prstGeom>
+          <a:noFill/>
+        </p:spPr>
+        <p:txBody>
+          <a:bodyPr wrap="square" anchor="ctr" lIns="0" rIns="0" tIns="0" bIns="0">
+            <a:spAutoFit/>
+          </a:bodyPr>
+          <a:lstStyle/>
+          <a:p>
+            <a:pPr algn="ctr"/>
+            <a:r>
+              <a:rPr sz="800" b="1">
+                <a:solidFill>
+                  <a:srgbClr val="000000"/>
+                </a:solidFill>
+                <a:latin typeface="맑은 고딕"/>
+              </a:rPr>
+              <a:t>frame--</a:t>
+            </a:r>
+          </a:p>
+        </p:txBody>
+      </p:sp>
+      <p:sp>
+        <p:nvSpPr>
+          <p:cNvPr id="100" name="TextBox 99"/>
+          <p:cNvSpPr txBox="1"/>
+          <p:nvPr/>
+        </p:nvSpPr>
+        <p:spPr>
+          <a:xfrm>
+            <a:off x="5394960" y="1947672"/>
+            <a:ext cx="3383280" cy="274320"/>
+          </a:xfrm>
+          <a:prstGeom prst="rect">
+            <a:avLst/>
+          </a:prstGeom>
+          <a:noFill/>
+        </p:spPr>
+        <p:txBody>
+          <a:bodyPr wrap="square" anchor="t" lIns="0" rIns="0" tIns="0" bIns="0">
+            <a:spAutoFit/>
+          </a:bodyPr>
+          <a:lstStyle/>
+          <a:p>
+            <a:pPr algn="l"/>
+            <a:r>
+              <a:rPr sz="800" b="0">
+                <a:solidFill>
+                  <a:srgbClr val="555555"/>
+                </a:solidFill>
+                <a:latin typeface="맑은 고딕"/>
+              </a:rPr>
+              <a:t>newD ≠ cur          매 50ms 호출         frame == 0 → 정적</a:t>
+            </a:r>
+          </a:p>
+        </p:txBody>
+      </p:sp>
+      <p:sp>
+        <p:nvSpPr>
+          <p:cNvPr id="101" name="TextBox 100"/>
+          <p:cNvSpPr txBox="1"/>
+          <p:nvPr/>
+        </p:nvSpPr>
+        <p:spPr>
+          <a:xfrm>
+            <a:off x="5394960" y="2331720"/>
+            <a:ext cx="3383280" cy="292608"/>
+          </a:xfrm>
+          <a:prstGeom prst="rect">
+            <a:avLst/>
+          </a:prstGeom>
+          <a:noFill/>
+        </p:spPr>
+        <p:txBody>
+          <a:bodyPr wrap="square" anchor="t" lIns="0" rIns="0" tIns="0" bIns="0">
+            <a:spAutoFit/>
+          </a:bodyPr>
+          <a:lstStyle/>
+          <a:p>
+            <a:pPr algn="l"/>
+            <a:r>
+              <a:rPr sz="1200" b="1">
+                <a:solidFill>
+                  <a:srgbClr val="000000"/>
+                </a:solidFill>
+                <a:latin typeface="맑은 고딕"/>
+              </a:rPr>
+              <a:t>▪ 핵심 함수</a:t>
+            </a:r>
+          </a:p>
+        </p:txBody>
+      </p:sp>
+      <p:sp>
+        <p:nvSpPr>
+          <p:cNvPr id="102" name="TextBox 101"/>
+          <p:cNvSpPr txBox="1"/>
+          <p:nvPr/>
+        </p:nvSpPr>
+        <p:spPr>
+          <a:xfrm>
+            <a:off x="5394960" y="2697480"/>
+            <a:ext cx="3383280" cy="292608"/>
+          </a:xfrm>
+          <a:prstGeom prst="rect">
+            <a:avLst/>
+          </a:prstGeom>
+          <a:noFill/>
+        </p:spPr>
+        <p:txBody>
+          <a:bodyPr wrap="square" anchor="t" lIns="0" rIns="0" tIns="0" bIns="0">
+            <a:spAutoFit/>
+          </a:bodyPr>
+          <a:lstStyle/>
+          <a:p>
+            <a:pPr algn="l"/>
+            <a:r>
+              <a:rPr sz="1000" b="0">
+                <a:solidFill>
+                  <a:srgbClr val="000000"/>
+                </a:solidFill>
+                <a:latin typeface="Consolas"/>
+              </a:rPr>
+              <a:t>• drawDigitAnim(idx, x, newD, color, yMin, yMax)</a:t>
+            </a:r>
+          </a:p>
+        </p:txBody>
+      </p:sp>
+      <p:sp>
+        <p:nvSpPr>
+          <p:cNvPr id="103" name="TextBox 102"/>
+          <p:cNvSpPr txBox="1"/>
+          <p:nvPr/>
+        </p:nvSpPr>
+        <p:spPr>
+          <a:xfrm>
+            <a:off x="5394960" y="3017520"/>
+            <a:ext cx="3383280" cy="292608"/>
+          </a:xfrm>
+          <a:prstGeom prst="rect">
+            <a:avLst/>
+          </a:prstGeom>
+          <a:noFill/>
+        </p:spPr>
+        <p:txBody>
+          <a:bodyPr wrap="square" anchor="t" lIns="0" rIns="0" tIns="0" bIns="0">
+            <a:spAutoFit/>
+          </a:bodyPr>
+          <a:lstStyle/>
+          <a:p>
+            <a:pPr algn="l"/>
+            <a:r>
+              <a:rPr sz="1000" b="0">
+                <a:solidFill>
+                  <a:srgbClr val="000000"/>
+                </a:solidFill>
+                <a:latin typeface="Consolas"/>
+              </a:rPr>
+              <a:t>• drawDigitClipped(...)  ─ yMin~yMax 행만 그림</a:t>
+            </a:r>
+          </a:p>
+        </p:txBody>
+      </p:sp>
+      <p:sp>
+        <p:nvSpPr>
+          <p:cNvPr id="104" name="TextBox 103"/>
+          <p:cNvSpPr txBox="1"/>
+          <p:nvPr/>
+        </p:nvSpPr>
+        <p:spPr>
+          <a:xfrm>
+            <a:off x="5394960" y="3337560"/>
+            <a:ext cx="3383280" cy="292608"/>
+          </a:xfrm>
+          <a:prstGeom prst="rect">
+            <a:avLst/>
+          </a:prstGeom>
+          <a:noFill/>
+        </p:spPr>
+        <p:txBody>
+          <a:bodyPr wrap="square" anchor="t" lIns="0" rIns="0" tIns="0" bIns="0">
+            <a:spAutoFit/>
+          </a:bodyPr>
+          <a:lstStyle/>
+          <a:p>
+            <a:pPr algn="l"/>
+            <a:r>
+              <a:rPr sz="1000" b="0">
+                <a:solidFill>
+                  <a:srgbClr val="000000"/>
+                </a:solidFill>
+                <a:latin typeface="Consolas"/>
+              </a:rPr>
+              <a:t>• drawCharPx() / drawStringPx()  ─ ASCII 렌더링</a:t>
+            </a:r>
+          </a:p>
+        </p:txBody>
+      </p:sp>
+      <p:sp>
+        <p:nvSpPr>
+          <p:cNvPr id="105" name="Rectangle 104"/>
+          <p:cNvSpPr/>
+          <p:nvPr/>
+        </p:nvSpPr>
+        <p:spPr>
+          <a:xfrm>
+            <a:off x="365760" y="4434840"/>
+            <a:ext cx="8412480" cy="548640"/>
+          </a:xfrm>
+          <a:prstGeom prst="rect">
+            <a:avLst/>
+          </a:prstGeom>
+          <a:noFill/>
+          <a:ln w="12700">
+            <a:solidFill>
+              <a:srgbClr val="000000"/>
+            </a:solidFill>
+          </a:ln>
+          <a:effectLst/>
+        </p:spPr>
+        <p:style>
+          <a:lnRef idx="1">
+            <a:schemeClr val="accent1"/>
+          </a:lnRef>
+          <a:fillRef idx="3">
+            <a:schemeClr val="accent1"/>
+          </a:fillRef>
+          <a:effectRef idx="2">
+            <a:schemeClr val="accent1"/>
+          </a:effectRef>
+          <a:fontRef idx="minor">
+            <a:schemeClr val="lt1"/>
+          </a:fontRef>
+        </p:style>
+        <p:txBody>
+          <a:bodyPr rtlCol="0" anchor="ctr"/>
+          <a:lstStyle/>
+          <a:p>
+            <a:pPr algn="ctr"/>
+          </a:p>
+        </p:txBody>
+      </p:sp>
+      <p:sp>
+        <p:nvSpPr>
+          <p:cNvPr id="106" name="TextBox 105"/>
+          <p:cNvSpPr txBox="1"/>
+          <p:nvPr/>
+        </p:nvSpPr>
+        <p:spPr>
+          <a:xfrm>
+            <a:off x="502920" y="4434840"/>
+            <a:ext cx="8229600" cy="548640"/>
+          </a:xfrm>
+          <a:prstGeom prst="rect">
+            <a:avLst/>
+          </a:prstGeom>
+          <a:noFill/>
+        </p:spPr>
+        <p:txBody>
+          <a:bodyPr wrap="square" anchor="ctr" lIns="0" rIns="0" tIns="0" bIns="0">
+            <a:spAutoFit/>
+          </a:bodyPr>
+          <a:lstStyle/>
+          <a:p>
+            <a:pPr algn="l"/>
+            <a:r>
+              <a:rPr sz="1100" b="0">
+                <a:solidFill>
+                  <a:srgbClr val="000000"/>
+                </a:solidFill>
+                <a:latin typeface="맑은 고딕"/>
+              </a:rPr>
+              <a:t>변경 없는 자리는 정적 표시 유지 · 변경된 자리만 슬라이드 · 콜론 영역(x=14,15)은 숫자(x=1..11, 19..29)와 분리되어 yMax=7 클리핑으로 보호</a:t>
+            </a:r>
           </a:p>
         </p:txBody>
       </p:sp>
